--- a/~sasano/lecture/proglang/26/proglang9Ans.pptx
+++ b/~sasano/lecture/proglang/26/proglang9Ans.pptx
@@ -118,6 +118,22 @@
       </a:defRPr>
     </a:lvl9pPr>
   </p:defaultTextStyle>
+  <p:extLst>
+    <p:ext uri="{EFAFB233-063F-42B5-8137-9DF3F51BA10A}">
+      <p15:sldGuideLst xmlns:p15="http://schemas.microsoft.com/office/powerpoint/2012/main">
+        <p15:guide id="1" orient="horz" pos="2160">
+          <p15:clr>
+            <a:srgbClr val="A4A3A4"/>
+          </p15:clr>
+        </p15:guide>
+        <p15:guide id="2" pos="2880">
+          <p15:clr>
+            <a:srgbClr val="A4A3A4"/>
+          </p15:clr>
+        </p15:guide>
+      </p15:sldGuideLst>
+    </p:ext>
+  </p:extLst>
 </p:presentation>
 </file>
 
@@ -204,7 +220,7 @@
             <a:fld id="{CD3D9CFB-0975-45A5-A4EB-427654E76663}" type="datetimeFigureOut">
               <a:rPr kumimoji="1" lang="ja-JP" altLang="en-US" smtClean="0"/>
               <a:pPr/>
-              <a:t>2014/11/27</a:t>
+              <a:t>2026/9/28</a:t>
             </a:fld>
             <a:endParaRPr kumimoji="1" lang="ja-JP" altLang="en-US"/>
           </a:p>
@@ -270,70 +286,69 @@
           <a:p>
             <a:pPr lvl="0"/>
             <a:r>
-              <a:rPr kumimoji="1" lang="ja-JP" altLang="en-US" smtClean="0"/>
+              <a:rPr kumimoji="1" lang="ja-JP" altLang="en-US"/>
               <a:t>マスタ テキストの書式設定</a:t>
             </a:r>
           </a:p>
           <a:p>
             <a:pPr lvl="1"/>
             <a:r>
-              <a:rPr kumimoji="1" lang="ja-JP" altLang="en-US" smtClean="0"/>
+              <a:rPr kumimoji="1" lang="ja-JP" altLang="en-US"/>
               <a:t>第 </a:t>
             </a:r>
             <a:r>
-              <a:rPr kumimoji="1" lang="en-US" altLang="ja-JP" smtClean="0"/>
+              <a:rPr kumimoji="1" lang="en-US" altLang="ja-JP"/>
               <a:t>2 </a:t>
             </a:r>
             <a:r>
-              <a:rPr kumimoji="1" lang="ja-JP" altLang="en-US" smtClean="0"/>
+              <a:rPr kumimoji="1" lang="ja-JP" altLang="en-US"/>
               <a:t>レベル</a:t>
             </a:r>
           </a:p>
           <a:p>
             <a:pPr lvl="2"/>
             <a:r>
-              <a:rPr kumimoji="1" lang="ja-JP" altLang="en-US" smtClean="0"/>
+              <a:rPr kumimoji="1" lang="ja-JP" altLang="en-US"/>
               <a:t>第 </a:t>
             </a:r>
             <a:r>
-              <a:rPr kumimoji="1" lang="en-US" altLang="ja-JP" smtClean="0"/>
+              <a:rPr kumimoji="1" lang="en-US" altLang="ja-JP"/>
               <a:t>3 </a:t>
             </a:r>
             <a:r>
-              <a:rPr kumimoji="1" lang="ja-JP" altLang="en-US" smtClean="0"/>
+              <a:rPr kumimoji="1" lang="ja-JP" altLang="en-US"/>
               <a:t>レベル</a:t>
             </a:r>
           </a:p>
           <a:p>
             <a:pPr lvl="3"/>
             <a:r>
-              <a:rPr kumimoji="1" lang="ja-JP" altLang="en-US" smtClean="0"/>
+              <a:rPr kumimoji="1" lang="ja-JP" altLang="en-US"/>
               <a:t>第 </a:t>
             </a:r>
             <a:r>
-              <a:rPr kumimoji="1" lang="en-US" altLang="ja-JP" smtClean="0"/>
+              <a:rPr kumimoji="1" lang="en-US" altLang="ja-JP"/>
               <a:t>4 </a:t>
             </a:r>
             <a:r>
-              <a:rPr kumimoji="1" lang="ja-JP" altLang="en-US" smtClean="0"/>
+              <a:rPr kumimoji="1" lang="ja-JP" altLang="en-US"/>
               <a:t>レベル</a:t>
             </a:r>
           </a:p>
           <a:p>
             <a:pPr lvl="4"/>
             <a:r>
-              <a:rPr kumimoji="1" lang="ja-JP" altLang="en-US" smtClean="0"/>
+              <a:rPr kumimoji="1" lang="ja-JP" altLang="en-US"/>
               <a:t>第 </a:t>
             </a:r>
             <a:r>
-              <a:rPr kumimoji="1" lang="en-US" altLang="ja-JP" smtClean="0"/>
+              <a:rPr kumimoji="1" lang="en-US" altLang="ja-JP"/>
               <a:t>5 </a:t>
             </a:r>
             <a:r>
-              <a:rPr kumimoji="1" lang="ja-JP" altLang="en-US" smtClean="0"/>
+              <a:rPr kumimoji="1" lang="ja-JP" altLang="en-US"/>
               <a:t>レベル</a:t>
             </a:r>
-            <a:endParaRPr kumimoji="1" lang="ja-JP" altLang="en-US"/>
           </a:p>
         </p:txBody>
       </p:sp>
@@ -595,7 +610,7 @@
           <a:lstStyle/>
           <a:p>
             <a:pPr eaLnBrk="1" hangingPunct="1"/>
-            <a:endParaRPr lang="ja-JP" altLang="ja-JP" smtClean="0">
+            <a:endParaRPr lang="ja-JP" altLang="ja-JP">
               <a:ea typeface="ＭＳ Ｐゴシック" pitchFamily="50" charset="-128"/>
             </a:endParaRPr>
           </a:p>
@@ -697,7 +712,7 @@
           <a:lstStyle/>
           <a:p>
             <a:pPr eaLnBrk="1" hangingPunct="1"/>
-            <a:endParaRPr lang="ja-JP" altLang="ja-JP" smtClean="0">
+            <a:endParaRPr lang="ja-JP" altLang="ja-JP">
               <a:ea typeface="ＭＳ Ｐゴシック" pitchFamily="50" charset="-128"/>
             </a:endParaRPr>
           </a:p>
@@ -799,7 +814,7 @@
           <a:lstStyle/>
           <a:p>
             <a:pPr eaLnBrk="1" hangingPunct="1"/>
-            <a:endParaRPr lang="ja-JP" altLang="ja-JP" smtClean="0">
+            <a:endParaRPr lang="ja-JP" altLang="ja-JP">
               <a:ea typeface="ＭＳ Ｐゴシック" pitchFamily="50" charset="-128"/>
             </a:endParaRPr>
           </a:p>
@@ -901,7 +916,7 @@
           <a:lstStyle/>
           <a:p>
             <a:pPr eaLnBrk="1" hangingPunct="1"/>
-            <a:endParaRPr lang="ja-JP" altLang="ja-JP" smtClean="0">
+            <a:endParaRPr lang="ja-JP" altLang="ja-JP">
               <a:ea typeface="ＭＳ Ｐゴシック" pitchFamily="50" charset="-128"/>
             </a:endParaRPr>
           </a:p>
@@ -953,10 +968,9 @@
           <a:lstStyle/>
           <a:p>
             <a:r>
-              <a:rPr kumimoji="1" lang="ja-JP" altLang="en-US" smtClean="0"/>
+              <a:rPr kumimoji="1" lang="ja-JP" altLang="en-US"/>
               <a:t>マスタ タイトルの書式設定</a:t>
             </a:r>
-            <a:endParaRPr kumimoji="1" lang="ja-JP" altLang="en-US"/>
           </a:p>
         </p:txBody>
       </p:sp>
@@ -1072,10 +1086,9 @@
           </a:lstStyle>
           <a:p>
             <a:r>
-              <a:rPr kumimoji="1" lang="ja-JP" altLang="en-US" smtClean="0"/>
+              <a:rPr kumimoji="1" lang="ja-JP" altLang="en-US"/>
               <a:t>マスタ サブタイトルの書式設定</a:t>
             </a:r>
-            <a:endParaRPr kumimoji="1" lang="ja-JP" altLang="en-US"/>
           </a:p>
         </p:txBody>
       </p:sp>
@@ -1097,7 +1110,7 @@
             <a:fld id="{E90ED720-0104-4369-84BC-D37694168613}" type="datetimeFigureOut">
               <a:rPr kumimoji="1" lang="ja-JP" altLang="en-US" smtClean="0"/>
               <a:pPr/>
-              <a:t>2014/11/27</a:t>
+              <a:t>2026/9/28</a:t>
             </a:fld>
             <a:endParaRPr kumimoji="1" lang="ja-JP" altLang="en-US"/>
           </a:p>
@@ -1187,10 +1200,9 @@
           <a:lstStyle/>
           <a:p>
             <a:r>
-              <a:rPr kumimoji="1" lang="ja-JP" altLang="en-US" smtClean="0"/>
+              <a:rPr kumimoji="1" lang="ja-JP" altLang="en-US"/>
               <a:t>マスタ タイトルの書式設定</a:t>
             </a:r>
-            <a:endParaRPr kumimoji="1" lang="ja-JP" altLang="en-US"/>
           </a:p>
         </p:txBody>
       </p:sp>
@@ -1211,70 +1223,69 @@
           <a:p>
             <a:pPr lvl="0"/>
             <a:r>
-              <a:rPr kumimoji="1" lang="ja-JP" altLang="en-US" smtClean="0"/>
+              <a:rPr kumimoji="1" lang="ja-JP" altLang="en-US"/>
               <a:t>マスタ テキストの書式設定</a:t>
             </a:r>
           </a:p>
           <a:p>
             <a:pPr lvl="1"/>
             <a:r>
-              <a:rPr kumimoji="1" lang="ja-JP" altLang="en-US" smtClean="0"/>
+              <a:rPr kumimoji="1" lang="ja-JP" altLang="en-US"/>
               <a:t>第 </a:t>
             </a:r>
             <a:r>
-              <a:rPr kumimoji="1" lang="en-US" altLang="ja-JP" smtClean="0"/>
+              <a:rPr kumimoji="1" lang="en-US" altLang="ja-JP"/>
               <a:t>2 </a:t>
             </a:r>
             <a:r>
-              <a:rPr kumimoji="1" lang="ja-JP" altLang="en-US" smtClean="0"/>
+              <a:rPr kumimoji="1" lang="ja-JP" altLang="en-US"/>
               <a:t>レベル</a:t>
             </a:r>
           </a:p>
           <a:p>
             <a:pPr lvl="2"/>
             <a:r>
-              <a:rPr kumimoji="1" lang="ja-JP" altLang="en-US" smtClean="0"/>
+              <a:rPr kumimoji="1" lang="ja-JP" altLang="en-US"/>
               <a:t>第 </a:t>
             </a:r>
             <a:r>
-              <a:rPr kumimoji="1" lang="en-US" altLang="ja-JP" smtClean="0"/>
+              <a:rPr kumimoji="1" lang="en-US" altLang="ja-JP"/>
               <a:t>3 </a:t>
             </a:r>
             <a:r>
-              <a:rPr kumimoji="1" lang="ja-JP" altLang="en-US" smtClean="0"/>
+              <a:rPr kumimoji="1" lang="ja-JP" altLang="en-US"/>
               <a:t>レベル</a:t>
             </a:r>
           </a:p>
           <a:p>
             <a:pPr lvl="3"/>
             <a:r>
-              <a:rPr kumimoji="1" lang="ja-JP" altLang="en-US" smtClean="0"/>
+              <a:rPr kumimoji="1" lang="ja-JP" altLang="en-US"/>
               <a:t>第 </a:t>
             </a:r>
             <a:r>
-              <a:rPr kumimoji="1" lang="en-US" altLang="ja-JP" smtClean="0"/>
+              <a:rPr kumimoji="1" lang="en-US" altLang="ja-JP"/>
               <a:t>4 </a:t>
             </a:r>
             <a:r>
-              <a:rPr kumimoji="1" lang="ja-JP" altLang="en-US" smtClean="0"/>
+              <a:rPr kumimoji="1" lang="ja-JP" altLang="en-US"/>
               <a:t>レベル</a:t>
             </a:r>
           </a:p>
           <a:p>
             <a:pPr lvl="4"/>
             <a:r>
-              <a:rPr kumimoji="1" lang="ja-JP" altLang="en-US" smtClean="0"/>
+              <a:rPr kumimoji="1" lang="ja-JP" altLang="en-US"/>
               <a:t>第 </a:t>
             </a:r>
             <a:r>
-              <a:rPr kumimoji="1" lang="en-US" altLang="ja-JP" smtClean="0"/>
+              <a:rPr kumimoji="1" lang="en-US" altLang="ja-JP"/>
               <a:t>5 </a:t>
             </a:r>
             <a:r>
-              <a:rPr kumimoji="1" lang="ja-JP" altLang="en-US" smtClean="0"/>
+              <a:rPr kumimoji="1" lang="ja-JP" altLang="en-US"/>
               <a:t>レベル</a:t>
             </a:r>
-            <a:endParaRPr kumimoji="1" lang="ja-JP" altLang="en-US"/>
           </a:p>
         </p:txBody>
       </p:sp>
@@ -1296,7 +1307,7 @@
             <a:fld id="{E90ED720-0104-4369-84BC-D37694168613}" type="datetimeFigureOut">
               <a:rPr kumimoji="1" lang="ja-JP" altLang="en-US" smtClean="0"/>
               <a:pPr/>
-              <a:t>2014/11/27</a:t>
+              <a:t>2026/9/28</a:t>
             </a:fld>
             <a:endParaRPr kumimoji="1" lang="ja-JP" altLang="en-US"/>
           </a:p>
@@ -1391,10 +1402,9 @@
           <a:lstStyle/>
           <a:p>
             <a:r>
-              <a:rPr kumimoji="1" lang="ja-JP" altLang="en-US" smtClean="0"/>
+              <a:rPr kumimoji="1" lang="ja-JP" altLang="en-US"/>
               <a:t>マスタ タイトルの書式設定</a:t>
             </a:r>
-            <a:endParaRPr kumimoji="1" lang="ja-JP" altLang="en-US"/>
           </a:p>
         </p:txBody>
       </p:sp>
@@ -1420,70 +1430,69 @@
           <a:p>
             <a:pPr lvl="0"/>
             <a:r>
-              <a:rPr kumimoji="1" lang="ja-JP" altLang="en-US" smtClean="0"/>
+              <a:rPr kumimoji="1" lang="ja-JP" altLang="en-US"/>
               <a:t>マスタ テキストの書式設定</a:t>
             </a:r>
           </a:p>
           <a:p>
             <a:pPr lvl="1"/>
             <a:r>
-              <a:rPr kumimoji="1" lang="ja-JP" altLang="en-US" smtClean="0"/>
+              <a:rPr kumimoji="1" lang="ja-JP" altLang="en-US"/>
               <a:t>第 </a:t>
             </a:r>
             <a:r>
-              <a:rPr kumimoji="1" lang="en-US" altLang="ja-JP" smtClean="0"/>
+              <a:rPr kumimoji="1" lang="en-US" altLang="ja-JP"/>
               <a:t>2 </a:t>
             </a:r>
             <a:r>
-              <a:rPr kumimoji="1" lang="ja-JP" altLang="en-US" smtClean="0"/>
+              <a:rPr kumimoji="1" lang="ja-JP" altLang="en-US"/>
               <a:t>レベル</a:t>
             </a:r>
           </a:p>
           <a:p>
             <a:pPr lvl="2"/>
             <a:r>
-              <a:rPr kumimoji="1" lang="ja-JP" altLang="en-US" smtClean="0"/>
+              <a:rPr kumimoji="1" lang="ja-JP" altLang="en-US"/>
               <a:t>第 </a:t>
             </a:r>
             <a:r>
-              <a:rPr kumimoji="1" lang="en-US" altLang="ja-JP" smtClean="0"/>
+              <a:rPr kumimoji="1" lang="en-US" altLang="ja-JP"/>
               <a:t>3 </a:t>
             </a:r>
             <a:r>
-              <a:rPr kumimoji="1" lang="ja-JP" altLang="en-US" smtClean="0"/>
+              <a:rPr kumimoji="1" lang="ja-JP" altLang="en-US"/>
               <a:t>レベル</a:t>
             </a:r>
           </a:p>
           <a:p>
             <a:pPr lvl="3"/>
             <a:r>
-              <a:rPr kumimoji="1" lang="ja-JP" altLang="en-US" smtClean="0"/>
+              <a:rPr kumimoji="1" lang="ja-JP" altLang="en-US"/>
               <a:t>第 </a:t>
             </a:r>
             <a:r>
-              <a:rPr kumimoji="1" lang="en-US" altLang="ja-JP" smtClean="0"/>
+              <a:rPr kumimoji="1" lang="en-US" altLang="ja-JP"/>
               <a:t>4 </a:t>
             </a:r>
             <a:r>
-              <a:rPr kumimoji="1" lang="ja-JP" altLang="en-US" smtClean="0"/>
+              <a:rPr kumimoji="1" lang="ja-JP" altLang="en-US"/>
               <a:t>レベル</a:t>
             </a:r>
           </a:p>
           <a:p>
             <a:pPr lvl="4"/>
             <a:r>
-              <a:rPr kumimoji="1" lang="ja-JP" altLang="en-US" smtClean="0"/>
+              <a:rPr kumimoji="1" lang="ja-JP" altLang="en-US"/>
               <a:t>第 </a:t>
             </a:r>
             <a:r>
-              <a:rPr kumimoji="1" lang="en-US" altLang="ja-JP" smtClean="0"/>
+              <a:rPr kumimoji="1" lang="en-US" altLang="ja-JP"/>
               <a:t>5 </a:t>
             </a:r>
             <a:r>
-              <a:rPr kumimoji="1" lang="ja-JP" altLang="en-US" smtClean="0"/>
+              <a:rPr kumimoji="1" lang="ja-JP" altLang="en-US"/>
               <a:t>レベル</a:t>
             </a:r>
-            <a:endParaRPr kumimoji="1" lang="ja-JP" altLang="en-US"/>
           </a:p>
         </p:txBody>
       </p:sp>
@@ -1505,7 +1514,7 @@
             <a:fld id="{E90ED720-0104-4369-84BC-D37694168613}" type="datetimeFigureOut">
               <a:rPr kumimoji="1" lang="ja-JP" altLang="en-US" smtClean="0"/>
               <a:pPr/>
-              <a:t>2014/11/27</a:t>
+              <a:t>2026/9/28</a:t>
             </a:fld>
             <a:endParaRPr kumimoji="1" lang="ja-JP" altLang="en-US"/>
           </a:p>
@@ -1595,10 +1604,9 @@
           <a:lstStyle/>
           <a:p>
             <a:r>
-              <a:rPr kumimoji="1" lang="ja-JP" altLang="en-US" smtClean="0"/>
+              <a:rPr kumimoji="1" lang="ja-JP" altLang="en-US"/>
               <a:t>マスタ タイトルの書式設定</a:t>
             </a:r>
-            <a:endParaRPr kumimoji="1" lang="ja-JP" altLang="en-US"/>
           </a:p>
         </p:txBody>
       </p:sp>
@@ -1619,70 +1627,69 @@
           <a:p>
             <a:pPr lvl="0"/>
             <a:r>
-              <a:rPr kumimoji="1" lang="ja-JP" altLang="en-US" smtClean="0"/>
+              <a:rPr kumimoji="1" lang="ja-JP" altLang="en-US"/>
               <a:t>マスタ テキストの書式設定</a:t>
             </a:r>
           </a:p>
           <a:p>
             <a:pPr lvl="1"/>
             <a:r>
-              <a:rPr kumimoji="1" lang="ja-JP" altLang="en-US" smtClean="0"/>
+              <a:rPr kumimoji="1" lang="ja-JP" altLang="en-US"/>
               <a:t>第 </a:t>
             </a:r>
             <a:r>
-              <a:rPr kumimoji="1" lang="en-US" altLang="ja-JP" smtClean="0"/>
+              <a:rPr kumimoji="1" lang="en-US" altLang="ja-JP"/>
               <a:t>2 </a:t>
             </a:r>
             <a:r>
-              <a:rPr kumimoji="1" lang="ja-JP" altLang="en-US" smtClean="0"/>
+              <a:rPr kumimoji="1" lang="ja-JP" altLang="en-US"/>
               <a:t>レベル</a:t>
             </a:r>
           </a:p>
           <a:p>
             <a:pPr lvl="2"/>
             <a:r>
-              <a:rPr kumimoji="1" lang="ja-JP" altLang="en-US" smtClean="0"/>
+              <a:rPr kumimoji="1" lang="ja-JP" altLang="en-US"/>
               <a:t>第 </a:t>
             </a:r>
             <a:r>
-              <a:rPr kumimoji="1" lang="en-US" altLang="ja-JP" smtClean="0"/>
+              <a:rPr kumimoji="1" lang="en-US" altLang="ja-JP"/>
               <a:t>3 </a:t>
             </a:r>
             <a:r>
-              <a:rPr kumimoji="1" lang="ja-JP" altLang="en-US" smtClean="0"/>
+              <a:rPr kumimoji="1" lang="ja-JP" altLang="en-US"/>
               <a:t>レベル</a:t>
             </a:r>
           </a:p>
           <a:p>
             <a:pPr lvl="3"/>
             <a:r>
-              <a:rPr kumimoji="1" lang="ja-JP" altLang="en-US" smtClean="0"/>
+              <a:rPr kumimoji="1" lang="ja-JP" altLang="en-US"/>
               <a:t>第 </a:t>
             </a:r>
             <a:r>
-              <a:rPr kumimoji="1" lang="en-US" altLang="ja-JP" smtClean="0"/>
+              <a:rPr kumimoji="1" lang="en-US" altLang="ja-JP"/>
               <a:t>4 </a:t>
             </a:r>
             <a:r>
-              <a:rPr kumimoji="1" lang="ja-JP" altLang="en-US" smtClean="0"/>
+              <a:rPr kumimoji="1" lang="ja-JP" altLang="en-US"/>
               <a:t>レベル</a:t>
             </a:r>
           </a:p>
           <a:p>
             <a:pPr lvl="4"/>
             <a:r>
-              <a:rPr kumimoji="1" lang="ja-JP" altLang="en-US" smtClean="0"/>
+              <a:rPr kumimoji="1" lang="ja-JP" altLang="en-US"/>
               <a:t>第 </a:t>
             </a:r>
             <a:r>
-              <a:rPr kumimoji="1" lang="en-US" altLang="ja-JP" smtClean="0"/>
+              <a:rPr kumimoji="1" lang="en-US" altLang="ja-JP"/>
               <a:t>5 </a:t>
             </a:r>
             <a:r>
-              <a:rPr kumimoji="1" lang="ja-JP" altLang="en-US" smtClean="0"/>
+              <a:rPr kumimoji="1" lang="ja-JP" altLang="en-US"/>
               <a:t>レベル</a:t>
             </a:r>
-            <a:endParaRPr kumimoji="1" lang="ja-JP" altLang="en-US"/>
           </a:p>
         </p:txBody>
       </p:sp>
@@ -1704,7 +1711,7 @@
             <a:fld id="{E90ED720-0104-4369-84BC-D37694168613}" type="datetimeFigureOut">
               <a:rPr kumimoji="1" lang="ja-JP" altLang="en-US" smtClean="0"/>
               <a:pPr/>
-              <a:t>2014/11/27</a:t>
+              <a:t>2026/9/28</a:t>
             </a:fld>
             <a:endParaRPr kumimoji="1" lang="ja-JP" altLang="en-US"/>
           </a:p>
@@ -1803,10 +1810,9 @@
           </a:lstStyle>
           <a:p>
             <a:r>
-              <a:rPr kumimoji="1" lang="ja-JP" altLang="en-US" smtClean="0"/>
+              <a:rPr kumimoji="1" lang="ja-JP" altLang="en-US"/>
               <a:t>マスタ タイトルの書式設定</a:t>
             </a:r>
-            <a:endParaRPr kumimoji="1" lang="ja-JP" altLang="en-US"/>
           </a:p>
         </p:txBody>
       </p:sp>
@@ -1923,7 +1929,7 @@
           <a:p>
             <a:pPr lvl="0"/>
             <a:r>
-              <a:rPr kumimoji="1" lang="ja-JP" altLang="en-US" smtClean="0"/>
+              <a:rPr kumimoji="1" lang="ja-JP" altLang="en-US"/>
               <a:t>マスタ テキストの書式設定</a:t>
             </a:r>
           </a:p>
@@ -1947,7 +1953,7 @@
             <a:fld id="{E90ED720-0104-4369-84BC-D37694168613}" type="datetimeFigureOut">
               <a:rPr kumimoji="1" lang="ja-JP" altLang="en-US" smtClean="0"/>
               <a:pPr/>
-              <a:t>2014/11/27</a:t>
+              <a:t>2026/9/28</a:t>
             </a:fld>
             <a:endParaRPr kumimoji="1" lang="ja-JP" altLang="en-US"/>
           </a:p>
@@ -2037,10 +2043,9 @@
           <a:lstStyle/>
           <a:p>
             <a:r>
-              <a:rPr kumimoji="1" lang="ja-JP" altLang="en-US" smtClean="0"/>
+              <a:rPr kumimoji="1" lang="ja-JP" altLang="en-US"/>
               <a:t>マスタ タイトルの書式設定</a:t>
             </a:r>
-            <a:endParaRPr kumimoji="1" lang="ja-JP" altLang="en-US"/>
           </a:p>
         </p:txBody>
       </p:sp>
@@ -2094,70 +2099,69 @@
           <a:p>
             <a:pPr lvl="0"/>
             <a:r>
-              <a:rPr kumimoji="1" lang="ja-JP" altLang="en-US" smtClean="0"/>
+              <a:rPr kumimoji="1" lang="ja-JP" altLang="en-US"/>
               <a:t>マスタ テキストの書式設定</a:t>
             </a:r>
           </a:p>
           <a:p>
             <a:pPr lvl="1"/>
             <a:r>
-              <a:rPr kumimoji="1" lang="ja-JP" altLang="en-US" smtClean="0"/>
+              <a:rPr kumimoji="1" lang="ja-JP" altLang="en-US"/>
               <a:t>第 </a:t>
             </a:r>
             <a:r>
-              <a:rPr kumimoji="1" lang="en-US" altLang="ja-JP" smtClean="0"/>
+              <a:rPr kumimoji="1" lang="en-US" altLang="ja-JP"/>
               <a:t>2 </a:t>
             </a:r>
             <a:r>
-              <a:rPr kumimoji="1" lang="ja-JP" altLang="en-US" smtClean="0"/>
+              <a:rPr kumimoji="1" lang="ja-JP" altLang="en-US"/>
               <a:t>レベル</a:t>
             </a:r>
           </a:p>
           <a:p>
             <a:pPr lvl="2"/>
             <a:r>
-              <a:rPr kumimoji="1" lang="ja-JP" altLang="en-US" smtClean="0"/>
+              <a:rPr kumimoji="1" lang="ja-JP" altLang="en-US"/>
               <a:t>第 </a:t>
             </a:r>
             <a:r>
-              <a:rPr kumimoji="1" lang="en-US" altLang="ja-JP" smtClean="0"/>
+              <a:rPr kumimoji="1" lang="en-US" altLang="ja-JP"/>
               <a:t>3 </a:t>
             </a:r>
             <a:r>
-              <a:rPr kumimoji="1" lang="ja-JP" altLang="en-US" smtClean="0"/>
+              <a:rPr kumimoji="1" lang="ja-JP" altLang="en-US"/>
               <a:t>レベル</a:t>
             </a:r>
           </a:p>
           <a:p>
             <a:pPr lvl="3"/>
             <a:r>
-              <a:rPr kumimoji="1" lang="ja-JP" altLang="en-US" smtClean="0"/>
+              <a:rPr kumimoji="1" lang="ja-JP" altLang="en-US"/>
               <a:t>第 </a:t>
             </a:r>
             <a:r>
-              <a:rPr kumimoji="1" lang="en-US" altLang="ja-JP" smtClean="0"/>
+              <a:rPr kumimoji="1" lang="en-US" altLang="ja-JP"/>
               <a:t>4 </a:t>
             </a:r>
             <a:r>
-              <a:rPr kumimoji="1" lang="ja-JP" altLang="en-US" smtClean="0"/>
+              <a:rPr kumimoji="1" lang="ja-JP" altLang="en-US"/>
               <a:t>レベル</a:t>
             </a:r>
           </a:p>
           <a:p>
             <a:pPr lvl="4"/>
             <a:r>
-              <a:rPr kumimoji="1" lang="ja-JP" altLang="en-US" smtClean="0"/>
+              <a:rPr kumimoji="1" lang="ja-JP" altLang="en-US"/>
               <a:t>第 </a:t>
             </a:r>
             <a:r>
-              <a:rPr kumimoji="1" lang="en-US" altLang="ja-JP" smtClean="0"/>
+              <a:rPr kumimoji="1" lang="en-US" altLang="ja-JP"/>
               <a:t>5 </a:t>
             </a:r>
             <a:r>
-              <a:rPr kumimoji="1" lang="ja-JP" altLang="en-US" smtClean="0"/>
+              <a:rPr kumimoji="1" lang="ja-JP" altLang="en-US"/>
               <a:t>レベル</a:t>
             </a:r>
-            <a:endParaRPr kumimoji="1" lang="ja-JP" altLang="en-US"/>
           </a:p>
         </p:txBody>
       </p:sp>
@@ -2211,70 +2215,69 @@
           <a:p>
             <a:pPr lvl="0"/>
             <a:r>
-              <a:rPr kumimoji="1" lang="ja-JP" altLang="en-US" smtClean="0"/>
+              <a:rPr kumimoji="1" lang="ja-JP" altLang="en-US"/>
               <a:t>マスタ テキストの書式設定</a:t>
             </a:r>
           </a:p>
           <a:p>
             <a:pPr lvl="1"/>
             <a:r>
-              <a:rPr kumimoji="1" lang="ja-JP" altLang="en-US" smtClean="0"/>
+              <a:rPr kumimoji="1" lang="ja-JP" altLang="en-US"/>
               <a:t>第 </a:t>
             </a:r>
             <a:r>
-              <a:rPr kumimoji="1" lang="en-US" altLang="ja-JP" smtClean="0"/>
+              <a:rPr kumimoji="1" lang="en-US" altLang="ja-JP"/>
               <a:t>2 </a:t>
             </a:r>
             <a:r>
-              <a:rPr kumimoji="1" lang="ja-JP" altLang="en-US" smtClean="0"/>
+              <a:rPr kumimoji="1" lang="ja-JP" altLang="en-US"/>
               <a:t>レベル</a:t>
             </a:r>
           </a:p>
           <a:p>
             <a:pPr lvl="2"/>
             <a:r>
-              <a:rPr kumimoji="1" lang="ja-JP" altLang="en-US" smtClean="0"/>
+              <a:rPr kumimoji="1" lang="ja-JP" altLang="en-US"/>
               <a:t>第 </a:t>
             </a:r>
             <a:r>
-              <a:rPr kumimoji="1" lang="en-US" altLang="ja-JP" smtClean="0"/>
+              <a:rPr kumimoji="1" lang="en-US" altLang="ja-JP"/>
               <a:t>3 </a:t>
             </a:r>
             <a:r>
-              <a:rPr kumimoji="1" lang="ja-JP" altLang="en-US" smtClean="0"/>
+              <a:rPr kumimoji="1" lang="ja-JP" altLang="en-US"/>
               <a:t>レベル</a:t>
             </a:r>
           </a:p>
           <a:p>
             <a:pPr lvl="3"/>
             <a:r>
-              <a:rPr kumimoji="1" lang="ja-JP" altLang="en-US" smtClean="0"/>
+              <a:rPr kumimoji="1" lang="ja-JP" altLang="en-US"/>
               <a:t>第 </a:t>
             </a:r>
             <a:r>
-              <a:rPr kumimoji="1" lang="en-US" altLang="ja-JP" smtClean="0"/>
+              <a:rPr kumimoji="1" lang="en-US" altLang="ja-JP"/>
               <a:t>4 </a:t>
             </a:r>
             <a:r>
-              <a:rPr kumimoji="1" lang="ja-JP" altLang="en-US" smtClean="0"/>
+              <a:rPr kumimoji="1" lang="ja-JP" altLang="en-US"/>
               <a:t>レベル</a:t>
             </a:r>
           </a:p>
           <a:p>
             <a:pPr lvl="4"/>
             <a:r>
-              <a:rPr kumimoji="1" lang="ja-JP" altLang="en-US" smtClean="0"/>
+              <a:rPr kumimoji="1" lang="ja-JP" altLang="en-US"/>
               <a:t>第 </a:t>
             </a:r>
             <a:r>
-              <a:rPr kumimoji="1" lang="en-US" altLang="ja-JP" smtClean="0"/>
+              <a:rPr kumimoji="1" lang="en-US" altLang="ja-JP"/>
               <a:t>5 </a:t>
             </a:r>
             <a:r>
-              <a:rPr kumimoji="1" lang="ja-JP" altLang="en-US" smtClean="0"/>
+              <a:rPr kumimoji="1" lang="ja-JP" altLang="en-US"/>
               <a:t>レベル</a:t>
             </a:r>
-            <a:endParaRPr kumimoji="1" lang="ja-JP" altLang="en-US"/>
           </a:p>
         </p:txBody>
       </p:sp>
@@ -2296,7 +2299,7 @@
             <a:fld id="{E90ED720-0104-4369-84BC-D37694168613}" type="datetimeFigureOut">
               <a:rPr kumimoji="1" lang="ja-JP" altLang="en-US" smtClean="0"/>
               <a:pPr/>
-              <a:t>2014/11/27</a:t>
+              <a:t>2026/9/28</a:t>
             </a:fld>
             <a:endParaRPr kumimoji="1" lang="ja-JP" altLang="en-US"/>
           </a:p>
@@ -2390,10 +2393,9 @@
           </a:lstStyle>
           <a:p>
             <a:r>
-              <a:rPr kumimoji="1" lang="ja-JP" altLang="en-US" smtClean="0"/>
+              <a:rPr kumimoji="1" lang="ja-JP" altLang="en-US"/>
               <a:t>マスタ タイトルの書式設定</a:t>
             </a:r>
-            <a:endParaRPr kumimoji="1" lang="ja-JP" altLang="en-US"/>
           </a:p>
         </p:txBody>
       </p:sp>
@@ -2456,7 +2458,7 @@
           <a:p>
             <a:pPr lvl="0"/>
             <a:r>
-              <a:rPr kumimoji="1" lang="ja-JP" altLang="en-US" smtClean="0"/>
+              <a:rPr kumimoji="1" lang="ja-JP" altLang="en-US"/>
               <a:t>マスタ テキストの書式設定</a:t>
             </a:r>
           </a:p>
@@ -2512,70 +2514,69 @@
           <a:p>
             <a:pPr lvl="0"/>
             <a:r>
-              <a:rPr kumimoji="1" lang="ja-JP" altLang="en-US" smtClean="0"/>
+              <a:rPr kumimoji="1" lang="ja-JP" altLang="en-US"/>
               <a:t>マスタ テキストの書式設定</a:t>
             </a:r>
           </a:p>
           <a:p>
             <a:pPr lvl="1"/>
             <a:r>
-              <a:rPr kumimoji="1" lang="ja-JP" altLang="en-US" smtClean="0"/>
+              <a:rPr kumimoji="1" lang="ja-JP" altLang="en-US"/>
               <a:t>第 </a:t>
             </a:r>
             <a:r>
-              <a:rPr kumimoji="1" lang="en-US" altLang="ja-JP" smtClean="0"/>
+              <a:rPr kumimoji="1" lang="en-US" altLang="ja-JP"/>
               <a:t>2 </a:t>
             </a:r>
             <a:r>
-              <a:rPr kumimoji="1" lang="ja-JP" altLang="en-US" smtClean="0"/>
+              <a:rPr kumimoji="1" lang="ja-JP" altLang="en-US"/>
               <a:t>レベル</a:t>
             </a:r>
           </a:p>
           <a:p>
             <a:pPr lvl="2"/>
             <a:r>
-              <a:rPr kumimoji="1" lang="ja-JP" altLang="en-US" smtClean="0"/>
+              <a:rPr kumimoji="1" lang="ja-JP" altLang="en-US"/>
               <a:t>第 </a:t>
             </a:r>
             <a:r>
-              <a:rPr kumimoji="1" lang="en-US" altLang="ja-JP" smtClean="0"/>
+              <a:rPr kumimoji="1" lang="en-US" altLang="ja-JP"/>
               <a:t>3 </a:t>
             </a:r>
             <a:r>
-              <a:rPr kumimoji="1" lang="ja-JP" altLang="en-US" smtClean="0"/>
+              <a:rPr kumimoji="1" lang="ja-JP" altLang="en-US"/>
               <a:t>レベル</a:t>
             </a:r>
           </a:p>
           <a:p>
             <a:pPr lvl="3"/>
             <a:r>
-              <a:rPr kumimoji="1" lang="ja-JP" altLang="en-US" smtClean="0"/>
+              <a:rPr kumimoji="1" lang="ja-JP" altLang="en-US"/>
               <a:t>第 </a:t>
             </a:r>
             <a:r>
-              <a:rPr kumimoji="1" lang="en-US" altLang="ja-JP" smtClean="0"/>
+              <a:rPr kumimoji="1" lang="en-US" altLang="ja-JP"/>
               <a:t>4 </a:t>
             </a:r>
             <a:r>
-              <a:rPr kumimoji="1" lang="ja-JP" altLang="en-US" smtClean="0"/>
+              <a:rPr kumimoji="1" lang="ja-JP" altLang="en-US"/>
               <a:t>レベル</a:t>
             </a:r>
           </a:p>
           <a:p>
             <a:pPr lvl="4"/>
             <a:r>
-              <a:rPr kumimoji="1" lang="ja-JP" altLang="en-US" smtClean="0"/>
+              <a:rPr kumimoji="1" lang="ja-JP" altLang="en-US"/>
               <a:t>第 </a:t>
             </a:r>
             <a:r>
-              <a:rPr kumimoji="1" lang="en-US" altLang="ja-JP" smtClean="0"/>
+              <a:rPr kumimoji="1" lang="en-US" altLang="ja-JP"/>
               <a:t>5 </a:t>
             </a:r>
             <a:r>
-              <a:rPr kumimoji="1" lang="ja-JP" altLang="en-US" smtClean="0"/>
+              <a:rPr kumimoji="1" lang="ja-JP" altLang="en-US"/>
               <a:t>レベル</a:t>
             </a:r>
-            <a:endParaRPr kumimoji="1" lang="ja-JP" altLang="en-US"/>
           </a:p>
         </p:txBody>
       </p:sp>
@@ -2638,7 +2639,7 @@
           <a:p>
             <a:pPr lvl="0"/>
             <a:r>
-              <a:rPr kumimoji="1" lang="ja-JP" altLang="en-US" smtClean="0"/>
+              <a:rPr kumimoji="1" lang="ja-JP" altLang="en-US"/>
               <a:t>マスタ テキストの書式設定</a:t>
             </a:r>
           </a:p>
@@ -2694,70 +2695,69 @@
           <a:p>
             <a:pPr lvl="0"/>
             <a:r>
-              <a:rPr kumimoji="1" lang="ja-JP" altLang="en-US" smtClean="0"/>
+              <a:rPr kumimoji="1" lang="ja-JP" altLang="en-US"/>
               <a:t>マスタ テキストの書式設定</a:t>
             </a:r>
           </a:p>
           <a:p>
             <a:pPr lvl="1"/>
             <a:r>
-              <a:rPr kumimoji="1" lang="ja-JP" altLang="en-US" smtClean="0"/>
+              <a:rPr kumimoji="1" lang="ja-JP" altLang="en-US"/>
               <a:t>第 </a:t>
             </a:r>
             <a:r>
-              <a:rPr kumimoji="1" lang="en-US" altLang="ja-JP" smtClean="0"/>
+              <a:rPr kumimoji="1" lang="en-US" altLang="ja-JP"/>
               <a:t>2 </a:t>
             </a:r>
             <a:r>
-              <a:rPr kumimoji="1" lang="ja-JP" altLang="en-US" smtClean="0"/>
+              <a:rPr kumimoji="1" lang="ja-JP" altLang="en-US"/>
               <a:t>レベル</a:t>
             </a:r>
           </a:p>
           <a:p>
             <a:pPr lvl="2"/>
             <a:r>
-              <a:rPr kumimoji="1" lang="ja-JP" altLang="en-US" smtClean="0"/>
+              <a:rPr kumimoji="1" lang="ja-JP" altLang="en-US"/>
               <a:t>第 </a:t>
             </a:r>
             <a:r>
-              <a:rPr kumimoji="1" lang="en-US" altLang="ja-JP" smtClean="0"/>
+              <a:rPr kumimoji="1" lang="en-US" altLang="ja-JP"/>
               <a:t>3 </a:t>
             </a:r>
             <a:r>
-              <a:rPr kumimoji="1" lang="ja-JP" altLang="en-US" smtClean="0"/>
+              <a:rPr kumimoji="1" lang="ja-JP" altLang="en-US"/>
               <a:t>レベル</a:t>
             </a:r>
           </a:p>
           <a:p>
             <a:pPr lvl="3"/>
             <a:r>
-              <a:rPr kumimoji="1" lang="ja-JP" altLang="en-US" smtClean="0"/>
+              <a:rPr kumimoji="1" lang="ja-JP" altLang="en-US"/>
               <a:t>第 </a:t>
             </a:r>
             <a:r>
-              <a:rPr kumimoji="1" lang="en-US" altLang="ja-JP" smtClean="0"/>
+              <a:rPr kumimoji="1" lang="en-US" altLang="ja-JP"/>
               <a:t>4 </a:t>
             </a:r>
             <a:r>
-              <a:rPr kumimoji="1" lang="ja-JP" altLang="en-US" smtClean="0"/>
+              <a:rPr kumimoji="1" lang="ja-JP" altLang="en-US"/>
               <a:t>レベル</a:t>
             </a:r>
           </a:p>
           <a:p>
             <a:pPr lvl="4"/>
             <a:r>
-              <a:rPr kumimoji="1" lang="ja-JP" altLang="en-US" smtClean="0"/>
+              <a:rPr kumimoji="1" lang="ja-JP" altLang="en-US"/>
               <a:t>第 </a:t>
             </a:r>
             <a:r>
-              <a:rPr kumimoji="1" lang="en-US" altLang="ja-JP" smtClean="0"/>
+              <a:rPr kumimoji="1" lang="en-US" altLang="ja-JP"/>
               <a:t>5 </a:t>
             </a:r>
             <a:r>
-              <a:rPr kumimoji="1" lang="ja-JP" altLang="en-US" smtClean="0"/>
+              <a:rPr kumimoji="1" lang="ja-JP" altLang="en-US"/>
               <a:t>レベル</a:t>
             </a:r>
-            <a:endParaRPr kumimoji="1" lang="ja-JP" altLang="en-US"/>
           </a:p>
         </p:txBody>
       </p:sp>
@@ -2779,7 +2779,7 @@
             <a:fld id="{E90ED720-0104-4369-84BC-D37694168613}" type="datetimeFigureOut">
               <a:rPr kumimoji="1" lang="ja-JP" altLang="en-US" smtClean="0"/>
               <a:pPr/>
-              <a:t>2014/11/27</a:t>
+              <a:t>2026/9/28</a:t>
             </a:fld>
             <a:endParaRPr kumimoji="1" lang="ja-JP" altLang="en-US"/>
           </a:p>
@@ -2869,10 +2869,9 @@
           <a:lstStyle/>
           <a:p>
             <a:r>
-              <a:rPr kumimoji="1" lang="ja-JP" altLang="en-US" smtClean="0"/>
+              <a:rPr kumimoji="1" lang="ja-JP" altLang="en-US"/>
               <a:t>マスタ タイトルの書式設定</a:t>
             </a:r>
-            <a:endParaRPr kumimoji="1" lang="ja-JP" altLang="en-US"/>
           </a:p>
         </p:txBody>
       </p:sp>
@@ -2894,7 +2893,7 @@
             <a:fld id="{E90ED720-0104-4369-84BC-D37694168613}" type="datetimeFigureOut">
               <a:rPr kumimoji="1" lang="ja-JP" altLang="en-US" smtClean="0"/>
               <a:pPr/>
-              <a:t>2014/11/27</a:t>
+              <a:t>2026/9/28</a:t>
             </a:fld>
             <a:endParaRPr kumimoji="1" lang="ja-JP" altLang="en-US"/>
           </a:p>
@@ -2986,7 +2985,7 @@
             <a:fld id="{E90ED720-0104-4369-84BC-D37694168613}" type="datetimeFigureOut">
               <a:rPr kumimoji="1" lang="ja-JP" altLang="en-US" smtClean="0"/>
               <a:pPr/>
-              <a:t>2014/11/27</a:t>
+              <a:t>2026/9/28</a:t>
             </a:fld>
             <a:endParaRPr kumimoji="1" lang="ja-JP" altLang="en-US"/>
           </a:p>
@@ -3085,10 +3084,9 @@
           </a:lstStyle>
           <a:p>
             <a:r>
-              <a:rPr kumimoji="1" lang="ja-JP" altLang="en-US" smtClean="0"/>
+              <a:rPr kumimoji="1" lang="ja-JP" altLang="en-US"/>
               <a:t>マスタ タイトルの書式設定</a:t>
             </a:r>
-            <a:endParaRPr kumimoji="1" lang="ja-JP" altLang="en-US"/>
           </a:p>
         </p:txBody>
       </p:sp>
@@ -3142,70 +3140,69 @@
           <a:p>
             <a:pPr lvl="0"/>
             <a:r>
-              <a:rPr kumimoji="1" lang="ja-JP" altLang="en-US" smtClean="0"/>
+              <a:rPr kumimoji="1" lang="ja-JP" altLang="en-US"/>
               <a:t>マスタ テキストの書式設定</a:t>
             </a:r>
           </a:p>
           <a:p>
             <a:pPr lvl="1"/>
             <a:r>
-              <a:rPr kumimoji="1" lang="ja-JP" altLang="en-US" smtClean="0"/>
+              <a:rPr kumimoji="1" lang="ja-JP" altLang="en-US"/>
               <a:t>第 </a:t>
             </a:r>
             <a:r>
-              <a:rPr kumimoji="1" lang="en-US" altLang="ja-JP" smtClean="0"/>
+              <a:rPr kumimoji="1" lang="en-US" altLang="ja-JP"/>
               <a:t>2 </a:t>
             </a:r>
             <a:r>
-              <a:rPr kumimoji="1" lang="ja-JP" altLang="en-US" smtClean="0"/>
+              <a:rPr kumimoji="1" lang="ja-JP" altLang="en-US"/>
               <a:t>レベル</a:t>
             </a:r>
           </a:p>
           <a:p>
             <a:pPr lvl="2"/>
             <a:r>
-              <a:rPr kumimoji="1" lang="ja-JP" altLang="en-US" smtClean="0"/>
+              <a:rPr kumimoji="1" lang="ja-JP" altLang="en-US"/>
               <a:t>第 </a:t>
             </a:r>
             <a:r>
-              <a:rPr kumimoji="1" lang="en-US" altLang="ja-JP" smtClean="0"/>
+              <a:rPr kumimoji="1" lang="en-US" altLang="ja-JP"/>
               <a:t>3 </a:t>
             </a:r>
             <a:r>
-              <a:rPr kumimoji="1" lang="ja-JP" altLang="en-US" smtClean="0"/>
+              <a:rPr kumimoji="1" lang="ja-JP" altLang="en-US"/>
               <a:t>レベル</a:t>
             </a:r>
           </a:p>
           <a:p>
             <a:pPr lvl="3"/>
             <a:r>
-              <a:rPr kumimoji="1" lang="ja-JP" altLang="en-US" smtClean="0"/>
+              <a:rPr kumimoji="1" lang="ja-JP" altLang="en-US"/>
               <a:t>第 </a:t>
             </a:r>
             <a:r>
-              <a:rPr kumimoji="1" lang="en-US" altLang="ja-JP" smtClean="0"/>
+              <a:rPr kumimoji="1" lang="en-US" altLang="ja-JP"/>
               <a:t>4 </a:t>
             </a:r>
             <a:r>
-              <a:rPr kumimoji="1" lang="ja-JP" altLang="en-US" smtClean="0"/>
+              <a:rPr kumimoji="1" lang="ja-JP" altLang="en-US"/>
               <a:t>レベル</a:t>
             </a:r>
           </a:p>
           <a:p>
             <a:pPr lvl="4"/>
             <a:r>
-              <a:rPr kumimoji="1" lang="ja-JP" altLang="en-US" smtClean="0"/>
+              <a:rPr kumimoji="1" lang="ja-JP" altLang="en-US"/>
               <a:t>第 </a:t>
             </a:r>
             <a:r>
-              <a:rPr kumimoji="1" lang="en-US" altLang="ja-JP" smtClean="0"/>
+              <a:rPr kumimoji="1" lang="en-US" altLang="ja-JP"/>
               <a:t>5 </a:t>
             </a:r>
             <a:r>
-              <a:rPr kumimoji="1" lang="ja-JP" altLang="en-US" smtClean="0"/>
+              <a:rPr kumimoji="1" lang="ja-JP" altLang="en-US"/>
               <a:t>レベル</a:t>
             </a:r>
-            <a:endParaRPr kumimoji="1" lang="ja-JP" altLang="en-US"/>
           </a:p>
         </p:txBody>
       </p:sp>
@@ -3268,7 +3265,7 @@
           <a:p>
             <a:pPr lvl="0"/>
             <a:r>
-              <a:rPr kumimoji="1" lang="ja-JP" altLang="en-US" smtClean="0"/>
+              <a:rPr kumimoji="1" lang="ja-JP" altLang="en-US"/>
               <a:t>マスタ テキストの書式設定</a:t>
             </a:r>
           </a:p>
@@ -3292,7 +3289,7 @@
             <a:fld id="{E90ED720-0104-4369-84BC-D37694168613}" type="datetimeFigureOut">
               <a:rPr kumimoji="1" lang="ja-JP" altLang="en-US" smtClean="0"/>
               <a:pPr/>
-              <a:t>2014/11/27</a:t>
+              <a:t>2026/9/28</a:t>
             </a:fld>
             <a:endParaRPr kumimoji="1" lang="ja-JP" altLang="en-US"/>
           </a:p>
@@ -3391,10 +3388,9 @@
           </a:lstStyle>
           <a:p>
             <a:r>
-              <a:rPr kumimoji="1" lang="ja-JP" altLang="en-US" smtClean="0"/>
+              <a:rPr kumimoji="1" lang="ja-JP" altLang="en-US"/>
               <a:t>マスタ タイトルの書式設定</a:t>
             </a:r>
-            <a:endParaRPr kumimoji="1" lang="ja-JP" altLang="en-US"/>
           </a:p>
         </p:txBody>
       </p:sp>
@@ -3518,7 +3514,7 @@
           <a:p>
             <a:pPr lvl="0"/>
             <a:r>
-              <a:rPr kumimoji="1" lang="ja-JP" altLang="en-US" smtClean="0"/>
+              <a:rPr kumimoji="1" lang="ja-JP" altLang="en-US"/>
               <a:t>マスタ テキストの書式設定</a:t>
             </a:r>
           </a:p>
@@ -3542,7 +3538,7 @@
             <a:fld id="{E90ED720-0104-4369-84BC-D37694168613}" type="datetimeFigureOut">
               <a:rPr kumimoji="1" lang="ja-JP" altLang="en-US" smtClean="0"/>
               <a:pPr/>
-              <a:t>2014/11/27</a:t>
+              <a:t>2026/9/28</a:t>
             </a:fld>
             <a:endParaRPr kumimoji="1" lang="ja-JP" altLang="en-US"/>
           </a:p>
@@ -3647,10 +3643,9 @@
           <a:lstStyle/>
           <a:p>
             <a:r>
-              <a:rPr kumimoji="1" lang="ja-JP" altLang="en-US" smtClean="0"/>
+              <a:rPr kumimoji="1" lang="ja-JP" altLang="en-US"/>
               <a:t>マスタ タイトルの書式設定</a:t>
             </a:r>
-            <a:endParaRPr kumimoji="1" lang="ja-JP" altLang="en-US"/>
           </a:p>
         </p:txBody>
       </p:sp>
@@ -3681,70 +3676,69 @@
           <a:p>
             <a:pPr lvl="0"/>
             <a:r>
-              <a:rPr kumimoji="1" lang="ja-JP" altLang="en-US" smtClean="0"/>
+              <a:rPr kumimoji="1" lang="ja-JP" altLang="en-US"/>
               <a:t>マスタ テキストの書式設定</a:t>
             </a:r>
           </a:p>
           <a:p>
             <a:pPr lvl="1"/>
             <a:r>
-              <a:rPr kumimoji="1" lang="ja-JP" altLang="en-US" smtClean="0"/>
+              <a:rPr kumimoji="1" lang="ja-JP" altLang="en-US"/>
               <a:t>第 </a:t>
             </a:r>
             <a:r>
-              <a:rPr kumimoji="1" lang="en-US" altLang="ja-JP" smtClean="0"/>
+              <a:rPr kumimoji="1" lang="en-US" altLang="ja-JP"/>
               <a:t>2 </a:t>
             </a:r>
             <a:r>
-              <a:rPr kumimoji="1" lang="ja-JP" altLang="en-US" smtClean="0"/>
+              <a:rPr kumimoji="1" lang="ja-JP" altLang="en-US"/>
               <a:t>レベル</a:t>
             </a:r>
           </a:p>
           <a:p>
             <a:pPr lvl="2"/>
             <a:r>
-              <a:rPr kumimoji="1" lang="ja-JP" altLang="en-US" smtClean="0"/>
+              <a:rPr kumimoji="1" lang="ja-JP" altLang="en-US"/>
               <a:t>第 </a:t>
             </a:r>
             <a:r>
-              <a:rPr kumimoji="1" lang="en-US" altLang="ja-JP" smtClean="0"/>
+              <a:rPr kumimoji="1" lang="en-US" altLang="ja-JP"/>
               <a:t>3 </a:t>
             </a:r>
             <a:r>
-              <a:rPr kumimoji="1" lang="ja-JP" altLang="en-US" smtClean="0"/>
+              <a:rPr kumimoji="1" lang="ja-JP" altLang="en-US"/>
               <a:t>レベル</a:t>
             </a:r>
           </a:p>
           <a:p>
             <a:pPr lvl="3"/>
             <a:r>
-              <a:rPr kumimoji="1" lang="ja-JP" altLang="en-US" smtClean="0"/>
+              <a:rPr kumimoji="1" lang="ja-JP" altLang="en-US"/>
               <a:t>第 </a:t>
             </a:r>
             <a:r>
-              <a:rPr kumimoji="1" lang="en-US" altLang="ja-JP" smtClean="0"/>
+              <a:rPr kumimoji="1" lang="en-US" altLang="ja-JP"/>
               <a:t>4 </a:t>
             </a:r>
             <a:r>
-              <a:rPr kumimoji="1" lang="ja-JP" altLang="en-US" smtClean="0"/>
+              <a:rPr kumimoji="1" lang="ja-JP" altLang="en-US"/>
               <a:t>レベル</a:t>
             </a:r>
           </a:p>
           <a:p>
             <a:pPr lvl="4"/>
             <a:r>
-              <a:rPr kumimoji="1" lang="ja-JP" altLang="en-US" smtClean="0"/>
+              <a:rPr kumimoji="1" lang="ja-JP" altLang="en-US"/>
               <a:t>第 </a:t>
             </a:r>
             <a:r>
-              <a:rPr kumimoji="1" lang="en-US" altLang="ja-JP" smtClean="0"/>
+              <a:rPr kumimoji="1" lang="en-US" altLang="ja-JP"/>
               <a:t>5 </a:t>
             </a:r>
             <a:r>
-              <a:rPr kumimoji="1" lang="ja-JP" altLang="en-US" smtClean="0"/>
+              <a:rPr kumimoji="1" lang="ja-JP" altLang="en-US"/>
               <a:t>レベル</a:t>
             </a:r>
-            <a:endParaRPr kumimoji="1" lang="ja-JP" altLang="en-US"/>
           </a:p>
         </p:txBody>
       </p:sp>
@@ -3784,7 +3778,7 @@
             <a:fld id="{E90ED720-0104-4369-84BC-D37694168613}" type="datetimeFigureOut">
               <a:rPr kumimoji="1" lang="ja-JP" altLang="en-US" smtClean="0"/>
               <a:pPr/>
-              <a:t>2014/11/27</a:t>
+              <a:t>2026/9/28</a:t>
             </a:fld>
             <a:endParaRPr kumimoji="1" lang="ja-JP" altLang="en-US"/>
           </a:p>
@@ -4173,33 +4167,25 @@
           <a:lstStyle/>
           <a:p>
             <a:r>
-              <a:rPr kumimoji="1" lang="ja-JP" altLang="en-US" dirty="0" smtClean="0"/>
+              <a:rPr kumimoji="1" lang="ja-JP" altLang="en-US" dirty="0"/>
               <a:t>プログラミング言語論</a:t>
             </a:r>
-            <a:r>
-              <a:rPr kumimoji="1" lang="en-US" altLang="ja-JP" dirty="0" smtClean="0"/>
-              <a:t/>
-            </a:r>
             <a:br>
-              <a:rPr kumimoji="1" lang="en-US" altLang="ja-JP" dirty="0" smtClean="0"/>
+              <a:rPr kumimoji="1" lang="en-US" altLang="ja-JP" dirty="0"/>
             </a:br>
             <a:r>
-              <a:rPr lang="en-US" altLang="en-US" dirty="0" smtClean="0"/>
+              <a:rPr lang="en-US" altLang="en-US" dirty="0"/>
               <a:t>第</a:t>
             </a:r>
             <a:r>
-              <a:rPr lang="ja-JP" altLang="en-US" dirty="0" smtClean="0"/>
+              <a:rPr lang="ja-JP" altLang="en-US" dirty="0"/>
               <a:t>９回</a:t>
             </a:r>
-            <a:r>
-              <a:rPr kumimoji="1" lang="en-US" altLang="ja-JP" dirty="0" smtClean="0"/>
-              <a:t/>
-            </a:r>
             <a:br>
-              <a:rPr kumimoji="1" lang="en-US" altLang="ja-JP" dirty="0" smtClean="0"/>
+              <a:rPr kumimoji="1" lang="en-US" altLang="ja-JP" dirty="0"/>
             </a:br>
             <a:r>
-              <a:rPr lang="ja-JP" altLang="en-US" dirty="0" smtClean="0"/>
+              <a:rPr lang="ja-JP" altLang="en-US" dirty="0"/>
               <a:t>練習問題解答例</a:t>
             </a:r>
             <a:endParaRPr kumimoji="1" lang="ja-JP" altLang="en-US" dirty="0"/>
@@ -4214,8 +4200,8 @@
         </p:nvSpPr>
         <p:spPr>
           <a:xfrm>
-            <a:off x="2786050" y="5143512"/>
-            <a:ext cx="3534942" cy="523220"/>
+            <a:off x="3821634" y="5157192"/>
+            <a:ext cx="1500732" cy="523220"/>
           </a:xfrm>
           <a:prstGeom prst="rect">
             <a:avLst/>
@@ -4228,11 +4214,15 @@
           </a:bodyPr>
           <a:lstStyle/>
           <a:p>
-            <a:r>
-              <a:rPr kumimoji="1" lang="ja-JP" altLang="en-US" sz="2800" dirty="0" smtClean="0"/>
-              <a:t>情報工学科　篠埜　功</a:t>
-            </a:r>
-            <a:endParaRPr kumimoji="1" lang="ja-JP" altLang="en-US" sz="2800" dirty="0"/>
+            <a:pPr algn="ctr"/>
+            <a:r>
+              <a:rPr kumimoji="1" lang="ja-JP" altLang="en-US" sz="2800"/>
+              <a:t>篠埜　</a:t>
+            </a:r>
+            <a:r>
+              <a:rPr kumimoji="1" lang="ja-JP" altLang="en-US" sz="2800" dirty="0"/>
+              <a:t>功</a:t>
+            </a:r>
           </a:p>
         </p:txBody>
       </p:sp>
@@ -4277,7 +4267,7 @@
           <a:lstStyle/>
           <a:p>
             <a:r>
-              <a:rPr lang="ja-JP" altLang="en-US" dirty="0" smtClean="0">
+              <a:rPr lang="ja-JP" altLang="en-US" dirty="0">
                 <a:sym typeface="Symbol" pitchFamily="18" charset="2"/>
               </a:rPr>
               <a:t>練習問題４解答例</a:t>
@@ -4308,11 +4298,11 @@
           <a:p>
             <a:pPr marL="457200" indent="-457200"/>
             <a:r>
-              <a:rPr lang="en-US" altLang="ja-JP" sz="2800" dirty="0" smtClean="0"/>
+              <a:rPr lang="en-US" altLang="ja-JP" sz="2800" dirty="0"/>
               <a:t>(</a:t>
             </a:r>
             <a:r>
-              <a:rPr lang="en-US" altLang="ja-JP" sz="2800" dirty="0" smtClean="0">
+              <a:rPr lang="en-US" altLang="ja-JP" sz="2800" dirty="0">
                 <a:sym typeface="Symbol" pitchFamily="18" charset="2"/>
               </a:rPr>
               <a:t>x. y. x y)  (z. z) w</a:t>
@@ -4321,49 +4311,49 @@
           <a:p>
             <a:pPr marL="457200" indent="-457200"/>
             <a:r>
-              <a:rPr lang="en-US" altLang="ja-JP" sz="2800" dirty="0" smtClean="0">
+              <a:rPr lang="en-US" altLang="ja-JP" sz="2800" dirty="0">
                 <a:sym typeface="Symbol" pitchFamily="18" charset="2"/>
               </a:rPr>
               <a:t> </a:t>
             </a:r>
             <a:r>
-              <a:rPr lang="en-US" altLang="ja-JP" sz="2800" dirty="0" smtClean="0">
+              <a:rPr lang="en-US" altLang="ja-JP" sz="2800" dirty="0">
                 <a:sym typeface="Symbol"/>
               </a:rPr>
               <a:t></a:t>
             </a:r>
             <a:r>
-              <a:rPr lang="ja-JP" altLang="en-US" sz="2800" dirty="0" smtClean="0">
+              <a:rPr lang="ja-JP" altLang="en-US" sz="2800" dirty="0">
                 <a:sym typeface="Symbol"/>
               </a:rPr>
               <a:t> </a:t>
             </a:r>
             <a:r>
-              <a:rPr lang="en-US" altLang="ja-JP" sz="2800" dirty="0" smtClean="0">
+              <a:rPr lang="en-US" altLang="ja-JP" sz="2800" dirty="0">
                 <a:sym typeface="Symbol"/>
               </a:rPr>
               <a:t>(</a:t>
             </a:r>
             <a:r>
-              <a:rPr lang="en-US" altLang="ja-JP" sz="2800" dirty="0" err="1" smtClean="0">
+              <a:rPr lang="en-US" altLang="ja-JP" sz="2800" dirty="0" err="1">
                 <a:sym typeface="Symbol"/>
               </a:rPr>
               <a:t>λy</a:t>
             </a:r>
             <a:r>
-              <a:rPr lang="en-US" altLang="ja-JP" sz="2800" dirty="0" smtClean="0">
+              <a:rPr lang="en-US" altLang="ja-JP" sz="2800" dirty="0">
                 <a:sym typeface="Symbol"/>
               </a:rPr>
               <a:t>. (</a:t>
             </a:r>
             <a:r>
-              <a:rPr lang="en-US" altLang="ja-JP" sz="2800" dirty="0" err="1" smtClean="0">
+              <a:rPr lang="en-US" altLang="ja-JP" sz="2800" dirty="0" err="1">
                 <a:sym typeface="Symbol"/>
               </a:rPr>
               <a:t>λz</a:t>
             </a:r>
             <a:r>
-              <a:rPr lang="en-US" altLang="ja-JP" sz="2800" dirty="0" smtClean="0">
+              <a:rPr lang="en-US" altLang="ja-JP" sz="2800" dirty="0">
                 <a:sym typeface="Symbol"/>
               </a:rPr>
               <a:t>. z) y) w</a:t>
@@ -4372,31 +4362,31 @@
           <a:p>
             <a:pPr marL="457200" indent="-457200"/>
             <a:r>
-              <a:rPr lang="en-US" altLang="ja-JP" sz="2800" dirty="0" smtClean="0">
+              <a:rPr lang="en-US" altLang="ja-JP" sz="2800" dirty="0">
                 <a:sym typeface="Symbol"/>
               </a:rPr>
               <a:t> </a:t>
             </a:r>
             <a:r>
-              <a:rPr lang="ja-JP" altLang="en-US" sz="2800" dirty="0" smtClean="0">
+              <a:rPr lang="ja-JP" altLang="en-US" sz="2800" dirty="0">
                 <a:sym typeface="Symbol"/>
               </a:rPr>
               <a:t> </a:t>
             </a:r>
             <a:r>
-              <a:rPr lang="en-US" altLang="ja-JP" sz="2800" dirty="0" smtClean="0">
+              <a:rPr lang="en-US" altLang="ja-JP" sz="2800" dirty="0">
                 <a:sym typeface="Symbol"/>
               </a:rPr>
               <a:t>(</a:t>
             </a:r>
             <a:r>
-              <a:rPr lang="en-US" altLang="ja-JP" sz="2800" dirty="0" err="1" smtClean="0">
+              <a:rPr lang="en-US" altLang="ja-JP" sz="2800" dirty="0" err="1">
                 <a:sym typeface="Symbol"/>
               </a:rPr>
               <a:t>λy</a:t>
             </a:r>
             <a:r>
-              <a:rPr lang="en-US" altLang="ja-JP" sz="2800" dirty="0" smtClean="0">
+              <a:rPr lang="en-US" altLang="ja-JP" sz="2800" dirty="0">
                 <a:sym typeface="Symbol"/>
               </a:rPr>
               <a:t>. y) w</a:t>
@@ -4405,19 +4395,19 @@
           <a:p>
             <a:pPr marL="457200" indent="-457200"/>
             <a:r>
-              <a:rPr lang="en-US" altLang="ja-JP" sz="2800" dirty="0" smtClean="0">
+              <a:rPr lang="en-US" altLang="ja-JP" sz="2800" dirty="0">
                 <a:sym typeface="Symbol"/>
               </a:rPr>
               <a:t> </a:t>
             </a:r>
             <a:r>
-              <a:rPr lang="ja-JP" altLang="en-US" sz="2800" dirty="0" smtClean="0">
+              <a:rPr lang="ja-JP" altLang="en-US" sz="2800" dirty="0">
                 <a:sym typeface="Symbol"/>
               </a:rPr>
               <a:t> </a:t>
             </a:r>
             <a:r>
-              <a:rPr lang="en-US" altLang="ja-JP" sz="2800" dirty="0" smtClean="0">
+              <a:rPr lang="en-US" altLang="ja-JP" sz="2800" dirty="0">
                 <a:sym typeface="Symbol"/>
               </a:rPr>
               <a:t>w</a:t>
@@ -4448,19 +4438,19 @@
           <a:p>
             <a:pPr marL="457200" indent="-457200"/>
             <a:r>
-              <a:rPr lang="ja-JP" altLang="en-US" sz="2800" dirty="0" smtClean="0"/>
+              <a:rPr lang="ja-JP" altLang="en-US" sz="2800" dirty="0"/>
               <a:t>または</a:t>
             </a:r>
-            <a:endParaRPr lang="en-US" altLang="ja-JP" sz="2800" dirty="0" smtClean="0"/>
+            <a:endParaRPr lang="en-US" altLang="ja-JP" sz="2800" dirty="0"/>
           </a:p>
           <a:p>
             <a:pPr marL="457200" indent="-457200"/>
             <a:r>
-              <a:rPr lang="en-US" altLang="ja-JP" sz="2800" dirty="0" smtClean="0"/>
+              <a:rPr lang="en-US" altLang="ja-JP" sz="2800" dirty="0"/>
               <a:t>(</a:t>
             </a:r>
             <a:r>
-              <a:rPr lang="en-US" altLang="ja-JP" sz="2800" dirty="0" smtClean="0">
+              <a:rPr lang="en-US" altLang="ja-JP" sz="2800" dirty="0">
                 <a:sym typeface="Symbol" pitchFamily="18" charset="2"/>
               </a:rPr>
               <a:t>x. y. x y)  (z. z) w</a:t>
@@ -4469,49 +4459,49 @@
           <a:p>
             <a:pPr marL="457200" indent="-457200"/>
             <a:r>
-              <a:rPr lang="en-US" altLang="ja-JP" sz="2800" dirty="0" smtClean="0">
+              <a:rPr lang="en-US" altLang="ja-JP" sz="2800" dirty="0">
                 <a:sym typeface="Symbol" pitchFamily="18" charset="2"/>
               </a:rPr>
               <a:t> </a:t>
             </a:r>
             <a:r>
-              <a:rPr lang="en-US" altLang="ja-JP" sz="2800" dirty="0" smtClean="0">
+              <a:rPr lang="en-US" altLang="ja-JP" sz="2800" dirty="0">
                 <a:sym typeface="Symbol"/>
               </a:rPr>
               <a:t></a:t>
             </a:r>
             <a:r>
-              <a:rPr lang="ja-JP" altLang="en-US" sz="2800" dirty="0" smtClean="0">
+              <a:rPr lang="ja-JP" altLang="en-US" sz="2800" dirty="0">
                 <a:sym typeface="Symbol"/>
               </a:rPr>
               <a:t> </a:t>
             </a:r>
             <a:r>
-              <a:rPr lang="en-US" altLang="ja-JP" sz="2800" dirty="0" smtClean="0">
+              <a:rPr lang="en-US" altLang="ja-JP" sz="2800" dirty="0">
                 <a:sym typeface="Symbol"/>
               </a:rPr>
               <a:t>(</a:t>
             </a:r>
             <a:r>
-              <a:rPr lang="en-US" altLang="ja-JP" sz="2800" dirty="0" err="1" smtClean="0">
+              <a:rPr lang="en-US" altLang="ja-JP" sz="2800" dirty="0" err="1">
                 <a:sym typeface="Symbol"/>
               </a:rPr>
               <a:t>λy</a:t>
             </a:r>
             <a:r>
-              <a:rPr lang="en-US" altLang="ja-JP" sz="2800" dirty="0" smtClean="0">
+              <a:rPr lang="en-US" altLang="ja-JP" sz="2800" dirty="0">
                 <a:sym typeface="Symbol"/>
               </a:rPr>
               <a:t>. (</a:t>
             </a:r>
             <a:r>
-              <a:rPr lang="en-US" altLang="ja-JP" sz="2800" dirty="0" err="1" smtClean="0">
+              <a:rPr lang="en-US" altLang="ja-JP" sz="2800" dirty="0" err="1">
                 <a:sym typeface="Symbol"/>
               </a:rPr>
               <a:t>λz</a:t>
             </a:r>
             <a:r>
-              <a:rPr lang="en-US" altLang="ja-JP" sz="2800" dirty="0" smtClean="0">
+              <a:rPr lang="en-US" altLang="ja-JP" sz="2800" dirty="0">
                 <a:sym typeface="Symbol"/>
               </a:rPr>
               <a:t>. z) y) w</a:t>
@@ -4520,31 +4510,31 @@
           <a:p>
             <a:pPr marL="457200" indent="-457200"/>
             <a:r>
-              <a:rPr lang="en-US" altLang="ja-JP" sz="2800" dirty="0" smtClean="0">
+              <a:rPr lang="en-US" altLang="ja-JP" sz="2800" dirty="0">
                 <a:sym typeface="Symbol"/>
               </a:rPr>
               <a:t> </a:t>
             </a:r>
             <a:r>
-              <a:rPr lang="ja-JP" altLang="en-US" sz="2800" dirty="0" smtClean="0">
+              <a:rPr lang="ja-JP" altLang="en-US" sz="2800" dirty="0">
                 <a:sym typeface="Symbol"/>
               </a:rPr>
               <a:t> </a:t>
             </a:r>
             <a:r>
-              <a:rPr lang="en-US" altLang="ja-JP" sz="2800" dirty="0" smtClean="0">
+              <a:rPr lang="en-US" altLang="ja-JP" sz="2800" dirty="0">
                 <a:sym typeface="Symbol"/>
               </a:rPr>
               <a:t>(</a:t>
             </a:r>
             <a:r>
-              <a:rPr lang="en-US" altLang="ja-JP" sz="2800" dirty="0" err="1" smtClean="0">
+              <a:rPr lang="en-US" altLang="ja-JP" sz="2800" dirty="0" err="1">
                 <a:sym typeface="Symbol"/>
               </a:rPr>
               <a:t>λz</a:t>
             </a:r>
             <a:r>
-              <a:rPr lang="en-US" altLang="ja-JP" sz="2800" dirty="0" smtClean="0">
+              <a:rPr lang="en-US" altLang="ja-JP" sz="2800" dirty="0">
                 <a:sym typeface="Symbol"/>
               </a:rPr>
               <a:t>. z) w</a:t>
@@ -4553,19 +4543,19 @@
           <a:p>
             <a:pPr marL="457200" indent="-457200"/>
             <a:r>
-              <a:rPr lang="en-US" altLang="ja-JP" sz="2800" dirty="0" smtClean="0">
+              <a:rPr lang="en-US" altLang="ja-JP" sz="2800" dirty="0">
                 <a:sym typeface="Symbol"/>
               </a:rPr>
               <a:t> </a:t>
             </a:r>
             <a:r>
-              <a:rPr lang="ja-JP" altLang="en-US" sz="2800" dirty="0" smtClean="0">
+              <a:rPr lang="ja-JP" altLang="en-US" sz="2800" dirty="0">
                 <a:sym typeface="Symbol"/>
               </a:rPr>
               <a:t> </a:t>
             </a:r>
             <a:r>
-              <a:rPr lang="en-US" altLang="ja-JP" sz="2800" dirty="0" smtClean="0">
+              <a:rPr lang="en-US" altLang="ja-JP" sz="2800" dirty="0">
                 <a:sym typeface="Symbol"/>
               </a:rPr>
               <a:t>w</a:t>
@@ -4596,10 +4586,9 @@
           <a:lstStyle/>
           <a:p>
             <a:r>
-              <a:rPr kumimoji="1" lang="ja-JP" altLang="en-US" sz="2400" dirty="0" smtClean="0"/>
+              <a:rPr kumimoji="1" lang="ja-JP" altLang="en-US" sz="2400" dirty="0"/>
               <a:t>（注意）上記において、置換を用いた記述は省略している。</a:t>
             </a:r>
-            <a:endParaRPr kumimoji="1" lang="ja-JP" altLang="en-US" sz="2400" dirty="0"/>
           </a:p>
         </p:txBody>
       </p:sp>
@@ -4608,13 +4597,6 @@
   <p:clrMapOvr>
     <a:masterClrMapping/>
   </p:clrMapOvr>
-  <p:timing>
-    <p:tnLst>
-      <p:par>
-        <p:cTn xmlns:p14="http://schemas.microsoft.com/office/powerpoint/2010/main" id="1" dur="indefinite" restart="never" nodeType="tmRoot"/>
-      </p:par>
-    </p:tnLst>
-  </p:timing>
 </p:sld>
 </file>
 
@@ -4651,7 +4633,7 @@
           <a:lstStyle/>
           <a:p>
             <a:r>
-              <a:rPr lang="ja-JP" altLang="en-US" dirty="0" smtClean="0">
+              <a:rPr lang="ja-JP" altLang="en-US" dirty="0">
                 <a:sym typeface="Symbol" pitchFamily="18" charset="2"/>
               </a:rPr>
               <a:t>練習問題５</a:t>
@@ -4681,66 +4663,65 @@
           <a:lstStyle/>
           <a:p>
             <a:r>
-              <a:rPr lang="ja-JP" altLang="en-US" sz="2800" dirty="0" smtClean="0"/>
+              <a:rPr lang="ja-JP" altLang="en-US" sz="2800" dirty="0"/>
               <a:t>ラムダ式 </a:t>
             </a:r>
             <a:r>
-              <a:rPr lang="en-US" altLang="ja-JP" sz="2800" dirty="0" smtClean="0"/>
+              <a:rPr lang="en-US" altLang="ja-JP" sz="2800" dirty="0"/>
               <a:t>(</a:t>
             </a:r>
             <a:r>
-              <a:rPr lang="en-US" altLang="ja-JP" sz="2800" dirty="0" err="1" smtClean="0"/>
+              <a:rPr lang="en-US" altLang="ja-JP" sz="2800" dirty="0" err="1"/>
               <a:t>λx</a:t>
             </a:r>
             <a:r>
-              <a:rPr lang="en-US" altLang="ja-JP" sz="2800" dirty="0" smtClean="0"/>
+              <a:rPr lang="en-US" altLang="ja-JP" sz="2800" dirty="0"/>
               <a:t>. </a:t>
             </a:r>
             <a:r>
-              <a:rPr lang="en-US" altLang="ja-JP" sz="2800" dirty="0" err="1" smtClean="0"/>
+              <a:rPr lang="en-US" altLang="ja-JP" sz="2800" dirty="0" err="1"/>
               <a:t>λy</a:t>
             </a:r>
             <a:r>
-              <a:rPr lang="en-US" altLang="ja-JP" sz="2800" dirty="0" smtClean="0"/>
+              <a:rPr lang="en-US" altLang="ja-JP" sz="2800" dirty="0"/>
               <a:t>. x y)  (</a:t>
             </a:r>
             <a:r>
-              <a:rPr lang="en-US" altLang="ja-JP" sz="2800" dirty="0" err="1" smtClean="0"/>
+              <a:rPr lang="en-US" altLang="ja-JP" sz="2800" dirty="0" err="1"/>
               <a:t>λx</a:t>
             </a:r>
             <a:r>
-              <a:rPr lang="en-US" altLang="ja-JP" sz="2800" dirty="0" smtClean="0"/>
+              <a:rPr lang="en-US" altLang="ja-JP" sz="2800" dirty="0"/>
               <a:t>. x y) w</a:t>
             </a:r>
             <a:r>
-              <a:rPr lang="ja-JP" altLang="en-US" sz="2800" dirty="0" smtClean="0"/>
+              <a:rPr lang="ja-JP" altLang="en-US" sz="2800" dirty="0"/>
               <a:t>に対して、</a:t>
             </a:r>
             <a:r>
-              <a:rPr lang="en-US" altLang="ja-JP" sz="2800" dirty="0" smtClean="0"/>
+              <a:rPr lang="en-US" altLang="ja-JP" sz="2800" dirty="0"/>
               <a:t>β</a:t>
             </a:r>
             <a:r>
-              <a:rPr lang="ja-JP" altLang="en-US" sz="2800" dirty="0" smtClean="0"/>
+              <a:rPr lang="ja-JP" altLang="en-US" sz="2800" dirty="0"/>
               <a:t>変換を適用する箇所のないラムダ式になるまで</a:t>
             </a:r>
             <a:r>
-              <a:rPr lang="en-US" altLang="ja-JP" sz="2800" dirty="0" smtClean="0"/>
+              <a:rPr lang="en-US" altLang="ja-JP" sz="2800" dirty="0"/>
               <a:t>β</a:t>
             </a:r>
             <a:r>
-              <a:rPr lang="ja-JP" altLang="en-US" sz="2800" dirty="0" smtClean="0"/>
+              <a:rPr lang="ja-JP" altLang="en-US" sz="2800" dirty="0"/>
               <a:t>変換を適用せよ。また、この例では途中で、２通りの適用可能性のあるラムダ式が出てくる。２通りの</a:t>
             </a:r>
             <a:r>
-              <a:rPr lang="en-US" altLang="ja-JP" sz="2800" dirty="0" smtClean="0"/>
+              <a:rPr lang="en-US" altLang="ja-JP" sz="2800" dirty="0"/>
               <a:t>β</a:t>
             </a:r>
             <a:r>
-              <a:rPr lang="ja-JP" altLang="en-US" sz="2800" dirty="0" smtClean="0"/>
+              <a:rPr lang="ja-JP" altLang="en-US" sz="2800" dirty="0"/>
               <a:t>変換列を示せ。</a:t>
             </a:r>
-            <a:endParaRPr lang="ja-JP" altLang="en-US" sz="2800" dirty="0"/>
           </a:p>
         </p:txBody>
       </p:sp>
@@ -4749,13 +4730,6 @@
   <p:clrMapOvr>
     <a:masterClrMapping/>
   </p:clrMapOvr>
-  <p:timing>
-    <p:tnLst>
-      <p:par>
-        <p:cTn xmlns:p14="http://schemas.microsoft.com/office/powerpoint/2010/main" id="1" dur="indefinite" restart="never" nodeType="tmRoot"/>
-      </p:par>
-    </p:tnLst>
-  </p:timing>
 </p:sld>
 </file>
 
@@ -4792,7 +4766,7 @@
           <a:lstStyle/>
           <a:p>
             <a:r>
-              <a:rPr lang="ja-JP" altLang="en-US" dirty="0" smtClean="0">
+              <a:rPr lang="ja-JP" altLang="en-US" dirty="0">
                 <a:sym typeface="Symbol" pitchFamily="18" charset="2"/>
               </a:rPr>
               <a:t>練習問題５解答例</a:t>
@@ -4833,7 +4807,7 @@
           <a:p>
             <a:pPr marL="457200" indent="-457200"/>
             <a:r>
-              <a:rPr lang="en-US" altLang="ja-JP" sz="2800" b="0" dirty="0" smtClean="0"/>
+              <a:rPr lang="en-US" altLang="ja-JP" sz="2800" b="0" dirty="0"/>
               <a:t>(</a:t>
             </a:r>
             <a:r>
@@ -4843,19 +4817,19 @@
               <a:t>x. y. x y)  </a:t>
             </a:r>
             <a:r>
-              <a:rPr lang="en-US" altLang="ja-JP" sz="2800" dirty="0" smtClean="0">
+              <a:rPr lang="en-US" altLang="ja-JP" sz="2800" dirty="0">
                 <a:sym typeface="Symbol" pitchFamily="18" charset="2"/>
               </a:rPr>
               <a:t>(</a:t>
             </a:r>
             <a:r>
-              <a:rPr lang="en-US" altLang="ja-JP" sz="2800" dirty="0" err="1" smtClean="0">
+              <a:rPr lang="en-US" altLang="ja-JP" sz="2800" dirty="0" err="1">
                 <a:sym typeface="Symbol" pitchFamily="18" charset="2"/>
               </a:rPr>
               <a:t>λx</a:t>
             </a:r>
             <a:r>
-              <a:rPr lang="en-US" altLang="ja-JP" sz="2800" dirty="0" smtClean="0">
+              <a:rPr lang="en-US" altLang="ja-JP" sz="2800" dirty="0">
                 <a:sym typeface="Symbol" pitchFamily="18" charset="2"/>
               </a:rPr>
               <a:t>. x y) w</a:t>
@@ -4864,37 +4838,37 @@
           <a:p>
             <a:pPr marL="457200" indent="-457200"/>
             <a:r>
-              <a:rPr lang="en-US" altLang="ja-JP" sz="2800" b="0" dirty="0" smtClean="0">
+              <a:rPr lang="en-US" altLang="ja-JP" sz="2800" b="0" dirty="0">
                 <a:sym typeface="Symbol" pitchFamily="18" charset="2"/>
               </a:rPr>
               <a:t> </a:t>
             </a:r>
             <a:r>
-              <a:rPr lang="en-US" altLang="ja-JP" sz="2800" b="0" dirty="0" smtClean="0">
+              <a:rPr lang="en-US" altLang="ja-JP" sz="2800" b="0" dirty="0">
                 <a:sym typeface="Symbol"/>
               </a:rPr>
               <a:t> (</a:t>
             </a:r>
             <a:r>
-              <a:rPr lang="en-US" altLang="ja-JP" sz="2800" b="0" dirty="0" err="1" smtClean="0">
+              <a:rPr lang="en-US" altLang="ja-JP" sz="2800" b="0" dirty="0" err="1">
                 <a:sym typeface="Symbol"/>
               </a:rPr>
               <a:t>λz</a:t>
             </a:r>
             <a:r>
-              <a:rPr lang="en-US" altLang="ja-JP" sz="2800" b="0" dirty="0" smtClean="0">
+              <a:rPr lang="en-US" altLang="ja-JP" sz="2800" b="0" dirty="0">
                 <a:sym typeface="Symbol"/>
               </a:rPr>
               <a:t>. (</a:t>
             </a:r>
             <a:r>
-              <a:rPr lang="en-US" altLang="ja-JP" sz="2800" b="0" dirty="0" err="1" smtClean="0">
+              <a:rPr lang="en-US" altLang="ja-JP" sz="2800" b="0" dirty="0" err="1">
                 <a:sym typeface="Symbol"/>
               </a:rPr>
               <a:t>λx</a:t>
             </a:r>
             <a:r>
-              <a:rPr lang="en-US" altLang="ja-JP" sz="2800" b="0" dirty="0" smtClean="0">
+              <a:rPr lang="en-US" altLang="ja-JP" sz="2800" b="0" dirty="0">
                 <a:sym typeface="Symbol"/>
               </a:rPr>
               <a:t>. x y) z) w</a:t>
@@ -4903,25 +4877,25 @@
           <a:p>
             <a:pPr marL="457200" indent="-457200"/>
             <a:r>
-              <a:rPr lang="en-US" altLang="ja-JP" sz="2800" dirty="0" smtClean="0">
+              <a:rPr lang="en-US" altLang="ja-JP" sz="2800" dirty="0">
                 <a:sym typeface="Symbol" pitchFamily="18" charset="2"/>
               </a:rPr>
               <a:t> </a:t>
             </a:r>
             <a:r>
-              <a:rPr lang="en-US" altLang="ja-JP" sz="2800" dirty="0" smtClean="0">
+              <a:rPr lang="en-US" altLang="ja-JP" sz="2800" dirty="0">
                 <a:sym typeface="Symbol"/>
               </a:rPr>
               <a:t> (</a:t>
             </a:r>
             <a:r>
-              <a:rPr lang="en-US" altLang="ja-JP" sz="2800" dirty="0" err="1" smtClean="0">
+              <a:rPr lang="en-US" altLang="ja-JP" sz="2800" dirty="0" err="1">
                 <a:sym typeface="Symbol"/>
               </a:rPr>
               <a:t>λz</a:t>
             </a:r>
             <a:r>
-              <a:rPr lang="en-US" altLang="ja-JP" sz="2800" dirty="0" smtClean="0">
+              <a:rPr lang="en-US" altLang="ja-JP" sz="2800" dirty="0">
                 <a:sym typeface="Symbol"/>
               </a:rPr>
               <a:t>. z y) w</a:t>
@@ -4930,7 +4904,7 @@
           <a:p>
             <a:pPr marL="457200" indent="-457200"/>
             <a:r>
-              <a:rPr lang="en-US" altLang="ja-JP" sz="2800" dirty="0" smtClean="0">
+              <a:rPr lang="en-US" altLang="ja-JP" sz="2800" dirty="0">
                 <a:sym typeface="Symbol"/>
               </a:rPr>
               <a:t>  w y</a:t>
@@ -4939,35 +4913,35 @@
           <a:p>
             <a:pPr marL="457200" indent="-457200"/>
             <a:r>
-              <a:rPr lang="ja-JP" altLang="en-US" sz="2800" dirty="0" smtClean="0">
+              <a:rPr lang="ja-JP" altLang="en-US" sz="2800" dirty="0">
                 <a:sym typeface="Symbol"/>
               </a:rPr>
               <a:t>または、</a:t>
             </a:r>
-            <a:endParaRPr lang="en-US" altLang="ja-JP" sz="2800" dirty="0" smtClean="0">
+            <a:endParaRPr lang="en-US" altLang="ja-JP" sz="2800" dirty="0">
               <a:sym typeface="Symbol"/>
             </a:endParaRPr>
           </a:p>
           <a:p>
             <a:pPr marL="457200" indent="-457200"/>
             <a:r>
-              <a:rPr lang="en-US" altLang="ja-JP" sz="2800" dirty="0" smtClean="0"/>
+              <a:rPr lang="en-US" altLang="ja-JP" sz="2800" dirty="0"/>
               <a:t>(</a:t>
             </a:r>
             <a:r>
-              <a:rPr lang="en-US" altLang="ja-JP" sz="2800" dirty="0" smtClean="0">
+              <a:rPr lang="en-US" altLang="ja-JP" sz="2800" dirty="0">
                 <a:sym typeface="Symbol" pitchFamily="18" charset="2"/>
               </a:rPr>
               <a:t>x. y. x y)  (</a:t>
             </a:r>
             <a:r>
-              <a:rPr lang="en-US" altLang="ja-JP" sz="2800" dirty="0" err="1" smtClean="0">
+              <a:rPr lang="en-US" altLang="ja-JP" sz="2800" dirty="0" err="1">
                 <a:sym typeface="Symbol" pitchFamily="18" charset="2"/>
               </a:rPr>
               <a:t>λx</a:t>
             </a:r>
             <a:r>
-              <a:rPr lang="en-US" altLang="ja-JP" sz="2800" dirty="0" smtClean="0">
+              <a:rPr lang="en-US" altLang="ja-JP" sz="2800" dirty="0">
                 <a:sym typeface="Symbol" pitchFamily="18" charset="2"/>
               </a:rPr>
               <a:t>. x y) w</a:t>
@@ -4976,37 +4950,37 @@
           <a:p>
             <a:pPr marL="457200" indent="-457200"/>
             <a:r>
-              <a:rPr lang="en-US" altLang="ja-JP" sz="2800" dirty="0" smtClean="0">
+              <a:rPr lang="en-US" altLang="ja-JP" sz="2800" dirty="0">
                 <a:sym typeface="Symbol" pitchFamily="18" charset="2"/>
               </a:rPr>
               <a:t> </a:t>
             </a:r>
             <a:r>
-              <a:rPr lang="en-US" altLang="ja-JP" sz="2800" dirty="0" smtClean="0">
+              <a:rPr lang="en-US" altLang="ja-JP" sz="2800" dirty="0">
                 <a:sym typeface="Symbol"/>
               </a:rPr>
               <a:t> (</a:t>
             </a:r>
             <a:r>
-              <a:rPr lang="en-US" altLang="ja-JP" sz="2800" dirty="0" err="1" smtClean="0">
+              <a:rPr lang="en-US" altLang="ja-JP" sz="2800" dirty="0" err="1">
                 <a:sym typeface="Symbol"/>
               </a:rPr>
               <a:t>λz</a:t>
             </a:r>
             <a:r>
-              <a:rPr lang="en-US" altLang="ja-JP" sz="2800" dirty="0" smtClean="0">
+              <a:rPr lang="en-US" altLang="ja-JP" sz="2800" dirty="0">
                 <a:sym typeface="Symbol"/>
               </a:rPr>
               <a:t>. (</a:t>
             </a:r>
             <a:r>
-              <a:rPr lang="en-US" altLang="ja-JP" sz="2800" dirty="0" err="1" smtClean="0">
+              <a:rPr lang="en-US" altLang="ja-JP" sz="2800" dirty="0" err="1">
                 <a:sym typeface="Symbol"/>
               </a:rPr>
               <a:t>λx</a:t>
             </a:r>
             <a:r>
-              <a:rPr lang="en-US" altLang="ja-JP" sz="2800" dirty="0" smtClean="0">
+              <a:rPr lang="en-US" altLang="ja-JP" sz="2800" dirty="0">
                 <a:sym typeface="Symbol"/>
               </a:rPr>
               <a:t>. x y) z) w</a:t>
@@ -5015,25 +4989,25 @@
           <a:p>
             <a:pPr marL="457200" indent="-457200"/>
             <a:r>
-              <a:rPr lang="en-US" altLang="ja-JP" sz="2800" dirty="0" smtClean="0">
+              <a:rPr lang="en-US" altLang="ja-JP" sz="2800" dirty="0">
                 <a:sym typeface="Symbol" pitchFamily="18" charset="2"/>
               </a:rPr>
               <a:t> </a:t>
             </a:r>
             <a:r>
-              <a:rPr lang="en-US" altLang="ja-JP" sz="2800" dirty="0" smtClean="0">
+              <a:rPr lang="en-US" altLang="ja-JP" sz="2800" dirty="0">
                 <a:sym typeface="Symbol"/>
               </a:rPr>
               <a:t> (</a:t>
             </a:r>
             <a:r>
-              <a:rPr lang="en-US" altLang="ja-JP" sz="2800" dirty="0" err="1" smtClean="0">
+              <a:rPr lang="en-US" altLang="ja-JP" sz="2800" dirty="0" err="1">
                 <a:sym typeface="Symbol"/>
               </a:rPr>
               <a:t>λx</a:t>
             </a:r>
             <a:r>
-              <a:rPr lang="en-US" altLang="ja-JP" sz="2800" dirty="0" smtClean="0">
+              <a:rPr lang="en-US" altLang="ja-JP" sz="2800" dirty="0">
                 <a:sym typeface="Symbol"/>
               </a:rPr>
               <a:t>. x y) w</a:t>
@@ -5042,7 +5016,7 @@
           <a:p>
             <a:pPr marL="457200" indent="-457200"/>
             <a:r>
-              <a:rPr lang="en-US" altLang="ja-JP" sz="2800" dirty="0" smtClean="0">
+              <a:rPr lang="en-US" altLang="ja-JP" sz="2800" dirty="0">
                 <a:sym typeface="Symbol"/>
               </a:rPr>
               <a:t>  w y</a:t>
@@ -5076,10 +5050,9 @@
           <a:lstStyle/>
           <a:p>
             <a:r>
-              <a:rPr kumimoji="1" lang="ja-JP" altLang="en-US" sz="2400" dirty="0" smtClean="0"/>
+              <a:rPr kumimoji="1" lang="ja-JP" altLang="en-US" sz="2400" dirty="0"/>
               <a:t>（注意）上記において、置換を用いた記述は省略している。</a:t>
             </a:r>
-            <a:endParaRPr kumimoji="1" lang="ja-JP" altLang="en-US" sz="2400" dirty="0"/>
           </a:p>
         </p:txBody>
       </p:sp>
@@ -5088,13 +5061,6 @@
   <p:clrMapOvr>
     <a:masterClrMapping/>
   </p:clrMapOvr>
-  <p:timing>
-    <p:tnLst>
-      <p:par>
-        <p:cTn xmlns:p14="http://schemas.microsoft.com/office/powerpoint/2010/main" id="1" dur="indefinite" restart="never" nodeType="tmRoot"/>
-      </p:par>
-    </p:tnLst>
-  </p:timing>
 </p:sld>
 </file>
 
@@ -5156,7 +5122,7 @@
               <a:defRPr/>
             </a:pPr>
             <a:r>
-              <a:rPr kumimoji="1" lang="ja-JP" altLang="en-US" sz="4400" b="0" i="0" u="none" strike="noStrike" kern="1200" cap="none" spc="0" normalizeH="0" baseline="0" noProof="0" dirty="0" smtClean="0">
+              <a:rPr kumimoji="1" lang="ja-JP" altLang="en-US" sz="4400" b="0" i="0" u="none" strike="noStrike" kern="1200" cap="none" spc="0" normalizeH="0" baseline="0" noProof="0" dirty="0">
                 <a:ln>
                   <a:noFill/>
                 </a:ln>
@@ -5199,69 +5165,69 @@
           <a:lstStyle/>
           <a:p>
             <a:r>
-              <a:rPr kumimoji="1" lang="ja-JP" altLang="en-US" sz="2800" dirty="0" smtClean="0"/>
+              <a:rPr kumimoji="1" lang="ja-JP" altLang="en-US" sz="2800" dirty="0"/>
               <a:t>（問１） ラムダ式 </a:t>
             </a:r>
             <a:r>
-              <a:rPr lang="en-US" altLang="ja-JP" sz="2800" dirty="0" smtClean="0">
+              <a:rPr lang="en-US" altLang="ja-JP" sz="2800" dirty="0">
                 <a:sym typeface="Symbol" pitchFamily="18" charset="2"/>
               </a:rPr>
               <a:t>(z. z) w </a:t>
             </a:r>
             <a:r>
-              <a:rPr lang="ja-JP" altLang="en-US" sz="2800" dirty="0" smtClean="0">
+              <a:rPr lang="ja-JP" altLang="en-US" sz="2800" dirty="0">
                 <a:sym typeface="Symbol" pitchFamily="18" charset="2"/>
               </a:rPr>
               <a:t>中の自由変数を求めよ。</a:t>
             </a:r>
-            <a:endParaRPr lang="en-US" altLang="ja-JP" sz="2800" dirty="0" smtClean="0">
+            <a:endParaRPr lang="en-US" altLang="ja-JP" sz="2800" dirty="0">
               <a:sym typeface="Symbol" pitchFamily="18" charset="2"/>
             </a:endParaRPr>
           </a:p>
           <a:p>
             <a:r>
-              <a:rPr lang="ja-JP" altLang="en-US" sz="2800" dirty="0" smtClean="0">
+              <a:rPr lang="ja-JP" altLang="en-US" sz="2800" dirty="0">
                 <a:sym typeface="Symbol" pitchFamily="18" charset="2"/>
               </a:rPr>
               <a:t>（問２） ラムダ式 </a:t>
             </a:r>
             <a:r>
-              <a:rPr lang="en-US" altLang="ja-JP" sz="2800" dirty="0" smtClean="0">
+              <a:rPr lang="en-US" altLang="ja-JP" sz="2800" dirty="0">
                 <a:sym typeface="Symbol" pitchFamily="18" charset="2"/>
               </a:rPr>
               <a:t>(</a:t>
             </a:r>
             <a:r>
-              <a:rPr lang="en-US" altLang="ja-JP" sz="2800" dirty="0" err="1" smtClean="0">
+              <a:rPr lang="en-US" altLang="ja-JP" sz="2800" dirty="0" err="1">
                 <a:sym typeface="Symbol" pitchFamily="18" charset="2"/>
               </a:rPr>
               <a:t>λz</a:t>
             </a:r>
             <a:r>
-              <a:rPr lang="en-US" altLang="ja-JP" sz="2800" dirty="0" smtClean="0">
+              <a:rPr lang="en-US" altLang="ja-JP" sz="2800" dirty="0">
                 <a:sym typeface="Symbol" pitchFamily="18" charset="2"/>
               </a:rPr>
               <a:t>. z y) ((</a:t>
             </a:r>
             <a:r>
-              <a:rPr lang="en-US" altLang="ja-JP" sz="2800" dirty="0" err="1" smtClean="0">
+              <a:rPr lang="en-US" altLang="ja-JP" sz="2800" dirty="0" err="1">
                 <a:sym typeface="Symbol" pitchFamily="18" charset="2"/>
               </a:rPr>
               <a:t>λz</a:t>
             </a:r>
             <a:r>
-              <a:rPr lang="en-US" altLang="ja-JP" sz="2800" dirty="0" smtClean="0">
+              <a:rPr lang="en-US" altLang="ja-JP" sz="2800" dirty="0">
                 <a:sym typeface="Symbol" pitchFamily="18" charset="2"/>
               </a:rPr>
               <a:t>. z) w) </a:t>
             </a:r>
             <a:r>
-              <a:rPr lang="ja-JP" altLang="en-US" sz="2800" dirty="0" smtClean="0">
+              <a:rPr lang="ja-JP" altLang="en-US" sz="2800" dirty="0">
                 <a:sym typeface="Symbol" pitchFamily="18" charset="2"/>
               </a:rPr>
               <a:t>中の自由変数を求めよ。</a:t>
             </a:r>
-            <a:endParaRPr lang="en-US" altLang="ja-JP" sz="2800" dirty="0" smtClean="0">
+            <a:endParaRPr lang="en-US" altLang="ja-JP" sz="2800" dirty="0">
               <a:sym typeface="Symbol" pitchFamily="18" charset="2"/>
             </a:endParaRPr>
           </a:p>
@@ -5333,7 +5299,7 @@
               <a:defRPr/>
             </a:pPr>
             <a:r>
-              <a:rPr kumimoji="1" lang="ja-JP" altLang="en-US" sz="4400" b="0" i="0" u="none" strike="noStrike" kern="1200" cap="none" spc="0" normalizeH="0" baseline="0" noProof="0" dirty="0" smtClean="0">
+              <a:rPr kumimoji="1" lang="ja-JP" altLang="en-US" sz="4400" b="0" i="0" u="none" strike="noStrike" kern="1200" cap="none" spc="0" normalizeH="0" baseline="0" noProof="0" dirty="0">
                 <a:ln>
                   <a:noFill/>
                 </a:ln>
@@ -5376,40 +5342,40 @@
           <a:lstStyle/>
           <a:p>
             <a:r>
-              <a:rPr kumimoji="1" lang="ja-JP" altLang="en-US" sz="2400" dirty="0" smtClean="0"/>
+              <a:rPr kumimoji="1" lang="ja-JP" altLang="en-US" sz="2400" dirty="0"/>
               <a:t>（問１） ラムダ式 </a:t>
             </a:r>
             <a:r>
-              <a:rPr lang="en-US" altLang="ja-JP" sz="2400" dirty="0" smtClean="0">
+              <a:rPr lang="en-US" altLang="ja-JP" sz="2400" dirty="0">
                 <a:sym typeface="Symbol" pitchFamily="18" charset="2"/>
               </a:rPr>
               <a:t>(z. z) w </a:t>
             </a:r>
             <a:r>
-              <a:rPr lang="ja-JP" altLang="en-US" sz="2400" dirty="0" smtClean="0">
+              <a:rPr lang="ja-JP" altLang="en-US" sz="2400" dirty="0">
                 <a:sym typeface="Symbol" pitchFamily="18" charset="2"/>
               </a:rPr>
               <a:t>中の自由変数を求めよ。</a:t>
             </a:r>
-            <a:endParaRPr lang="en-US" altLang="ja-JP" sz="2400" dirty="0" smtClean="0">
+            <a:endParaRPr lang="en-US" altLang="ja-JP" sz="2400" dirty="0">
               <a:sym typeface="Symbol" pitchFamily="18" charset="2"/>
             </a:endParaRPr>
           </a:p>
           <a:p>
             <a:r>
-              <a:rPr lang="en-US" altLang="ja-JP" sz="2400" dirty="0" smtClean="0">
+              <a:rPr lang="en-US" altLang="ja-JP" sz="2400" dirty="0">
                 <a:sym typeface="Symbol" pitchFamily="18" charset="2"/>
               </a:rPr>
               <a:t>FV((z. z) w) = FV((z. z)) </a:t>
             </a:r>
             <a:r>
-              <a:rPr lang="en-US" altLang="ja-JP" sz="2400" dirty="0" smtClean="0">
+              <a:rPr lang="en-US" altLang="ja-JP" sz="2400" dirty="0">
                 <a:sym typeface="Symbol"/>
               </a:rPr>
               <a:t></a:t>
             </a:r>
             <a:r>
-              <a:rPr lang="en-US" altLang="ja-JP" sz="2400" dirty="0" smtClean="0">
+              <a:rPr lang="en-US" altLang="ja-JP" sz="2400" dirty="0">
                 <a:sym typeface="Symbol" pitchFamily="18" charset="2"/>
               </a:rPr>
               <a:t> FV (w)</a:t>
@@ -5417,19 +5383,19 @@
           </a:p>
           <a:p>
             <a:r>
-              <a:rPr lang="en-US" altLang="ja-JP" sz="2400" dirty="0" smtClean="0">
+              <a:rPr lang="en-US" altLang="ja-JP" sz="2400" dirty="0">
                 <a:sym typeface="Symbol" pitchFamily="18" charset="2"/>
               </a:rPr>
               <a:t>                       = (FV (z) \ {z}) </a:t>
             </a:r>
             <a:r>
-              <a:rPr lang="en-US" altLang="ja-JP" sz="2400" dirty="0" smtClean="0">
+              <a:rPr lang="en-US" altLang="ja-JP" sz="2400" dirty="0">
                 <a:sym typeface="Symbol"/>
               </a:rPr>
               <a:t></a:t>
             </a:r>
             <a:r>
-              <a:rPr lang="en-US" altLang="ja-JP" sz="2400" dirty="0" smtClean="0">
+              <a:rPr lang="en-US" altLang="ja-JP" sz="2400" dirty="0">
                 <a:sym typeface="Symbol" pitchFamily="18" charset="2"/>
               </a:rPr>
               <a:t> {w}</a:t>
@@ -5437,19 +5403,19 @@
           </a:p>
           <a:p>
             <a:r>
-              <a:rPr lang="en-US" altLang="ja-JP" sz="2400" dirty="0" smtClean="0">
+              <a:rPr lang="en-US" altLang="ja-JP" sz="2400" dirty="0">
                 <a:sym typeface="Symbol" pitchFamily="18" charset="2"/>
               </a:rPr>
               <a:t>                       = ({z} \ {z}) </a:t>
             </a:r>
             <a:r>
-              <a:rPr lang="en-US" altLang="ja-JP" sz="2400" dirty="0" smtClean="0">
+              <a:rPr lang="en-US" altLang="ja-JP" sz="2400" dirty="0">
                 <a:sym typeface="Symbol"/>
               </a:rPr>
               <a:t></a:t>
             </a:r>
             <a:r>
-              <a:rPr lang="en-US" altLang="ja-JP" sz="2400" dirty="0" smtClean="0">
+              <a:rPr lang="en-US" altLang="ja-JP" sz="2400" dirty="0">
                 <a:sym typeface="Symbol" pitchFamily="18" charset="2"/>
               </a:rPr>
               <a:t> {w}</a:t>
@@ -5457,19 +5423,19 @@
           </a:p>
           <a:p>
             <a:r>
-              <a:rPr lang="en-US" altLang="ja-JP" sz="2400" dirty="0" smtClean="0">
+              <a:rPr lang="en-US" altLang="ja-JP" sz="2400" dirty="0">
                 <a:sym typeface="Symbol" pitchFamily="18" charset="2"/>
               </a:rPr>
               <a:t>                       = { } </a:t>
             </a:r>
             <a:r>
-              <a:rPr lang="en-US" altLang="ja-JP" sz="2400" dirty="0" smtClean="0">
+              <a:rPr lang="en-US" altLang="ja-JP" sz="2400" dirty="0">
                 <a:sym typeface="Symbol"/>
               </a:rPr>
               <a:t></a:t>
             </a:r>
             <a:r>
-              <a:rPr lang="en-US" altLang="ja-JP" sz="2400" dirty="0" smtClean="0">
+              <a:rPr lang="en-US" altLang="ja-JP" sz="2400" dirty="0">
                 <a:sym typeface="Symbol" pitchFamily="18" charset="2"/>
               </a:rPr>
               <a:t> {w}</a:t>
@@ -5477,7 +5443,7 @@
           </a:p>
           <a:p>
             <a:r>
-              <a:rPr lang="en-US" altLang="ja-JP" sz="2400" dirty="0" smtClean="0">
+              <a:rPr lang="en-US" altLang="ja-JP" sz="2400" dirty="0">
                 <a:sym typeface="Symbol" pitchFamily="18" charset="2"/>
               </a:rPr>
               <a:t>                       = {w}</a:t>
@@ -5485,114 +5451,114 @@
           </a:p>
           <a:p>
             <a:r>
-              <a:rPr lang="ja-JP" altLang="en-US" sz="2400" dirty="0" smtClean="0">
+              <a:rPr lang="ja-JP" altLang="en-US" sz="2400" dirty="0">
                 <a:sym typeface="Symbol" pitchFamily="18" charset="2"/>
               </a:rPr>
               <a:t>（問２） ラムダ式 </a:t>
             </a:r>
             <a:r>
-              <a:rPr lang="en-US" altLang="ja-JP" sz="2400" dirty="0" smtClean="0">
+              <a:rPr lang="en-US" altLang="ja-JP" sz="2400" dirty="0">
                 <a:sym typeface="Symbol" pitchFamily="18" charset="2"/>
               </a:rPr>
               <a:t>(</a:t>
             </a:r>
             <a:r>
-              <a:rPr lang="en-US" altLang="ja-JP" sz="2400" dirty="0" err="1" smtClean="0">
+              <a:rPr lang="en-US" altLang="ja-JP" sz="2400" dirty="0" err="1">
                 <a:sym typeface="Symbol" pitchFamily="18" charset="2"/>
               </a:rPr>
               <a:t>λz</a:t>
             </a:r>
             <a:r>
-              <a:rPr lang="en-US" altLang="ja-JP" sz="2400" dirty="0" smtClean="0">
+              <a:rPr lang="en-US" altLang="ja-JP" sz="2400" dirty="0">
                 <a:sym typeface="Symbol" pitchFamily="18" charset="2"/>
               </a:rPr>
               <a:t>. z y) ((</a:t>
             </a:r>
             <a:r>
-              <a:rPr lang="en-US" altLang="ja-JP" sz="2400" dirty="0" err="1" smtClean="0">
+              <a:rPr lang="en-US" altLang="ja-JP" sz="2400" dirty="0" err="1">
                 <a:sym typeface="Symbol" pitchFamily="18" charset="2"/>
               </a:rPr>
               <a:t>λz</a:t>
             </a:r>
             <a:r>
-              <a:rPr lang="en-US" altLang="ja-JP" sz="2400" dirty="0" smtClean="0">
+              <a:rPr lang="en-US" altLang="ja-JP" sz="2400" dirty="0">
                 <a:sym typeface="Symbol" pitchFamily="18" charset="2"/>
               </a:rPr>
               <a:t>. z) w) </a:t>
             </a:r>
             <a:r>
-              <a:rPr lang="ja-JP" altLang="en-US" sz="2400" dirty="0" smtClean="0">
+              <a:rPr lang="ja-JP" altLang="en-US" sz="2400" dirty="0">
                 <a:sym typeface="Symbol" pitchFamily="18" charset="2"/>
               </a:rPr>
               <a:t>中の自由変数を求めよ。</a:t>
             </a:r>
-            <a:endParaRPr lang="en-US" altLang="ja-JP" sz="2400" dirty="0" smtClean="0">
+            <a:endParaRPr lang="en-US" altLang="ja-JP" sz="2400" dirty="0">
               <a:sym typeface="Symbol" pitchFamily="18" charset="2"/>
             </a:endParaRPr>
           </a:p>
           <a:p>
             <a:r>
-              <a:rPr lang="en-US" altLang="ja-JP" sz="2400" dirty="0" smtClean="0">
+              <a:rPr lang="en-US" altLang="ja-JP" sz="2400" dirty="0">
                 <a:sym typeface="Symbol" pitchFamily="18" charset="2"/>
               </a:rPr>
               <a:t>FV((</a:t>
             </a:r>
             <a:r>
-              <a:rPr lang="en-US" altLang="ja-JP" sz="2400" dirty="0" err="1" smtClean="0">
+              <a:rPr lang="en-US" altLang="ja-JP" sz="2400" dirty="0" err="1">
                 <a:sym typeface="Symbol" pitchFamily="18" charset="2"/>
               </a:rPr>
               <a:t>λz</a:t>
             </a:r>
             <a:r>
-              <a:rPr lang="en-US" altLang="ja-JP" sz="2400" dirty="0" smtClean="0">
+              <a:rPr lang="en-US" altLang="ja-JP" sz="2400" dirty="0">
                 <a:sym typeface="Symbol" pitchFamily="18" charset="2"/>
               </a:rPr>
               <a:t>. z y) ((</a:t>
             </a:r>
             <a:r>
-              <a:rPr lang="en-US" altLang="ja-JP" sz="2400" dirty="0" err="1" smtClean="0">
+              <a:rPr lang="en-US" altLang="ja-JP" sz="2400" dirty="0" err="1">
                 <a:sym typeface="Symbol" pitchFamily="18" charset="2"/>
               </a:rPr>
               <a:t>λz</a:t>
             </a:r>
             <a:r>
-              <a:rPr lang="en-US" altLang="ja-JP" sz="2400" dirty="0" smtClean="0">
+              <a:rPr lang="en-US" altLang="ja-JP" sz="2400" dirty="0">
                 <a:sym typeface="Symbol" pitchFamily="18" charset="2"/>
               </a:rPr>
               <a:t>. z) w)) = FV(</a:t>
             </a:r>
             <a:r>
-              <a:rPr lang="en-US" altLang="ja-JP" sz="2400" dirty="0" err="1" smtClean="0">
+              <a:rPr lang="en-US" altLang="ja-JP" sz="2400" dirty="0" err="1">
                 <a:sym typeface="Symbol" pitchFamily="18" charset="2"/>
               </a:rPr>
               <a:t>λz</a:t>
             </a:r>
             <a:r>
-              <a:rPr lang="en-US" altLang="ja-JP" sz="2400" dirty="0" smtClean="0">
+              <a:rPr lang="en-US" altLang="ja-JP" sz="2400" dirty="0">
                 <a:sym typeface="Symbol" pitchFamily="18" charset="2"/>
               </a:rPr>
               <a:t>. z y) </a:t>
             </a:r>
             <a:r>
-              <a:rPr lang="en-US" altLang="ja-JP" sz="2400" dirty="0" smtClean="0">
+              <a:rPr lang="en-US" altLang="ja-JP" sz="2400" dirty="0">
                 <a:sym typeface="Symbol"/>
               </a:rPr>
               <a:t> FV</a:t>
             </a:r>
             <a:r>
-              <a:rPr lang="en-US" altLang="ja-JP" sz="2400" dirty="0" smtClean="0">
+              <a:rPr lang="en-US" altLang="ja-JP" sz="2400" dirty="0">
                 <a:sym typeface="Symbol" pitchFamily="18" charset="2"/>
               </a:rPr>
               <a:t>((</a:t>
             </a:r>
             <a:r>
-              <a:rPr lang="en-US" altLang="ja-JP" sz="2400" dirty="0" err="1" smtClean="0">
+              <a:rPr lang="en-US" altLang="ja-JP" sz="2400" dirty="0" err="1">
                 <a:sym typeface="Symbol" pitchFamily="18" charset="2"/>
               </a:rPr>
               <a:t>λz</a:t>
             </a:r>
             <a:r>
-              <a:rPr lang="en-US" altLang="ja-JP" sz="2400" dirty="0" smtClean="0">
+              <a:rPr lang="en-US" altLang="ja-JP" sz="2400" dirty="0">
                 <a:sym typeface="Symbol" pitchFamily="18" charset="2"/>
               </a:rPr>
               <a:t>. z) w) </a:t>
@@ -5600,43 +5566,43 @@
           </a:p>
           <a:p>
             <a:r>
-              <a:rPr lang="en-US" altLang="ja-JP" sz="2400" dirty="0" smtClean="0">
+              <a:rPr lang="en-US" altLang="ja-JP" sz="2400" dirty="0">
                 <a:sym typeface="Symbol" pitchFamily="18" charset="2"/>
               </a:rPr>
               <a:t>                                        = (FV (z y) \ {z}) </a:t>
             </a:r>
             <a:r>
-              <a:rPr lang="en-US" altLang="ja-JP" sz="2400" dirty="0" smtClean="0">
+              <a:rPr lang="en-US" altLang="ja-JP" sz="2400" dirty="0">
                 <a:sym typeface="Symbol"/>
               </a:rPr>
               <a:t> (FV</a:t>
             </a:r>
             <a:r>
-              <a:rPr lang="en-US" altLang="ja-JP" sz="2400" dirty="0" smtClean="0">
+              <a:rPr lang="en-US" altLang="ja-JP" sz="2400" dirty="0">
                 <a:sym typeface="Symbol" pitchFamily="18" charset="2"/>
               </a:rPr>
               <a:t>(</a:t>
             </a:r>
             <a:r>
-              <a:rPr lang="en-US" altLang="ja-JP" sz="2400" dirty="0" err="1" smtClean="0">
+              <a:rPr lang="en-US" altLang="ja-JP" sz="2400" dirty="0" err="1">
                 <a:sym typeface="Symbol" pitchFamily="18" charset="2"/>
               </a:rPr>
               <a:t>λz</a:t>
             </a:r>
             <a:r>
-              <a:rPr lang="en-US" altLang="ja-JP" sz="2400" dirty="0" smtClean="0">
+              <a:rPr lang="en-US" altLang="ja-JP" sz="2400" dirty="0">
                 <a:sym typeface="Symbol" pitchFamily="18" charset="2"/>
               </a:rPr>
               <a:t>. z) </a:t>
             </a:r>
             <a:r>
-              <a:rPr lang="en-US" altLang="ja-JP" sz="2400" dirty="0" smtClean="0">
+              <a:rPr lang="en-US" altLang="ja-JP" sz="2400" dirty="0">
                 <a:sym typeface="Symbol"/>
               </a:rPr>
               <a:t> FV(</a:t>
             </a:r>
             <a:r>
-              <a:rPr lang="en-US" altLang="ja-JP" sz="2400" dirty="0" smtClean="0">
+              <a:rPr lang="en-US" altLang="ja-JP" sz="2400" dirty="0">
                 <a:sym typeface="Symbol" pitchFamily="18" charset="2"/>
               </a:rPr>
               <a:t>w))</a:t>
@@ -5644,31 +5610,31 @@
           </a:p>
           <a:p>
             <a:r>
-              <a:rPr lang="en-US" altLang="ja-JP" sz="2400" dirty="0" smtClean="0">
+              <a:rPr lang="en-US" altLang="ja-JP" sz="2400" dirty="0">
                 <a:sym typeface="Symbol" pitchFamily="18" charset="2"/>
               </a:rPr>
               <a:t>                                        = ((FV (z) </a:t>
             </a:r>
             <a:r>
-              <a:rPr lang="en-US" altLang="ja-JP" sz="2400" dirty="0" smtClean="0">
+              <a:rPr lang="en-US" altLang="ja-JP" sz="2400" dirty="0">
                 <a:sym typeface="Symbol"/>
               </a:rPr>
               <a:t> FV(y)) \ {z})  ((FV</a:t>
             </a:r>
             <a:r>
-              <a:rPr lang="en-US" altLang="ja-JP" sz="2400" dirty="0" smtClean="0">
+              <a:rPr lang="en-US" altLang="ja-JP" sz="2400" dirty="0">
                 <a:sym typeface="Symbol" pitchFamily="18" charset="2"/>
               </a:rPr>
               <a:t>(z) \ {z}) </a:t>
             </a:r>
             <a:r>
-              <a:rPr lang="en-US" altLang="ja-JP" sz="2400" dirty="0" smtClean="0">
+              <a:rPr lang="en-US" altLang="ja-JP" sz="2400" dirty="0">
                 <a:sym typeface="Symbol"/>
               </a:rPr>
               <a:t> {</a:t>
             </a:r>
             <a:r>
-              <a:rPr lang="en-US" altLang="ja-JP" sz="2400" dirty="0" smtClean="0">
+              <a:rPr lang="en-US" altLang="ja-JP" sz="2400" dirty="0">
                 <a:sym typeface="Symbol" pitchFamily="18" charset="2"/>
               </a:rPr>
               <a:t>w})</a:t>
@@ -5676,19 +5642,19 @@
           </a:p>
           <a:p>
             <a:r>
-              <a:rPr lang="en-US" altLang="ja-JP" sz="2400" dirty="0" smtClean="0">
+              <a:rPr lang="en-US" altLang="ja-JP" sz="2400" dirty="0">
                 <a:sym typeface="Symbol" pitchFamily="18" charset="2"/>
               </a:rPr>
               <a:t>                                        = (({z} </a:t>
             </a:r>
             <a:r>
-              <a:rPr lang="en-US" altLang="ja-JP" sz="2400" dirty="0" smtClean="0">
+              <a:rPr lang="en-US" altLang="ja-JP" sz="2400" dirty="0">
                 <a:sym typeface="Symbol"/>
               </a:rPr>
               <a:t> {y}) \ {z})  (({z} \ {z})  {</a:t>
             </a:r>
             <a:r>
-              <a:rPr lang="en-US" altLang="ja-JP" sz="2400" dirty="0" smtClean="0">
+              <a:rPr lang="en-US" altLang="ja-JP" sz="2400" dirty="0">
                 <a:sym typeface="Symbol" pitchFamily="18" charset="2"/>
               </a:rPr>
               <a:t>w})</a:t>
@@ -5696,31 +5662,31 @@
           </a:p>
           <a:p>
             <a:r>
-              <a:rPr lang="en-US" altLang="ja-JP" sz="2400" dirty="0" smtClean="0">
+              <a:rPr lang="en-US" altLang="ja-JP" sz="2400" dirty="0">
                 <a:sym typeface="Symbol" pitchFamily="18" charset="2"/>
               </a:rPr>
               <a:t>                                        = ({</a:t>
             </a:r>
             <a:r>
-              <a:rPr lang="en-US" altLang="ja-JP" sz="2400" dirty="0" err="1" smtClean="0">
+              <a:rPr lang="en-US" altLang="ja-JP" sz="2400" dirty="0" err="1">
                 <a:sym typeface="Symbol" pitchFamily="18" charset="2"/>
               </a:rPr>
               <a:t>z,y</a:t>
             </a:r>
             <a:r>
-              <a:rPr lang="en-US" altLang="ja-JP" sz="2400" dirty="0" smtClean="0">
+              <a:rPr lang="en-US" altLang="ja-JP" sz="2400" dirty="0">
                 <a:sym typeface="Symbol" pitchFamily="18" charset="2"/>
               </a:rPr>
               <a:t>} \ {z}) </a:t>
             </a:r>
             <a:r>
-              <a:rPr lang="en-US" altLang="ja-JP" sz="2400" dirty="0" smtClean="0">
+              <a:rPr lang="en-US" altLang="ja-JP" sz="2400" dirty="0">
                 <a:sym typeface="Symbol"/>
               </a:rPr>
               <a:t> ({ }  {</a:t>
             </a:r>
             <a:r>
-              <a:rPr lang="en-US" altLang="ja-JP" sz="2400" dirty="0" smtClean="0">
+              <a:rPr lang="en-US" altLang="ja-JP" sz="2400" dirty="0">
                 <a:sym typeface="Symbol" pitchFamily="18" charset="2"/>
               </a:rPr>
               <a:t>w})</a:t>
@@ -5728,13 +5694,13 @@
           </a:p>
           <a:p>
             <a:r>
-              <a:rPr lang="en-US" altLang="ja-JP" sz="2400" dirty="0" smtClean="0">
+              <a:rPr lang="en-US" altLang="ja-JP" sz="2400" dirty="0">
                 <a:sym typeface="Symbol" pitchFamily="18" charset="2"/>
               </a:rPr>
               <a:t>                                        = {y} </a:t>
             </a:r>
             <a:r>
-              <a:rPr lang="en-US" altLang="ja-JP" sz="2400" dirty="0" smtClean="0">
+              <a:rPr lang="en-US" altLang="ja-JP" sz="2400" dirty="0">
                 <a:sym typeface="Symbol"/>
               </a:rPr>
               <a:t> {w}</a:t>
@@ -5742,12 +5708,12 @@
           </a:p>
           <a:p>
             <a:r>
-              <a:rPr lang="en-US" altLang="ja-JP" sz="2400" dirty="0" smtClean="0">
+              <a:rPr lang="en-US" altLang="ja-JP" sz="2400" dirty="0">
                 <a:sym typeface="Symbol"/>
               </a:rPr>
               <a:t>                                        = {y, w}</a:t>
             </a:r>
-            <a:endParaRPr lang="en-US" altLang="ja-JP" sz="2400" dirty="0" smtClean="0">
+            <a:endParaRPr lang="en-US" altLang="ja-JP" sz="2400" dirty="0">
               <a:sym typeface="Symbol" pitchFamily="18" charset="2"/>
             </a:endParaRPr>
           </a:p>
@@ -5819,7 +5785,7 @@
               <a:defRPr/>
             </a:pPr>
             <a:r>
-              <a:rPr kumimoji="1" lang="ja-JP" altLang="en-US" sz="4400" b="0" i="0" u="none" strike="noStrike" kern="1200" cap="none" spc="0" normalizeH="0" baseline="0" noProof="0" dirty="0" smtClean="0">
+              <a:rPr kumimoji="1" lang="ja-JP" altLang="en-US" sz="4400" b="0" i="0" u="none" strike="noStrike" kern="1200" cap="none" spc="0" normalizeH="0" baseline="0" noProof="0" dirty="0">
                 <a:ln>
                   <a:noFill/>
                 </a:ln>
@@ -5862,60 +5828,48 @@
           <a:lstStyle/>
           <a:p>
             <a:r>
-              <a:rPr kumimoji="1" lang="ja-JP" altLang="en-US" sz="2800" dirty="0" smtClean="0">
+              <a:rPr kumimoji="1" lang="ja-JP" altLang="en-US" sz="2800" dirty="0">
                 <a:sym typeface="Symbol" pitchFamily="18" charset="2"/>
               </a:rPr>
               <a:t>（問１） 置換</a:t>
             </a:r>
             <a:r>
-              <a:rPr lang="en-US" altLang="ja-JP" sz="2800" dirty="0" smtClean="0">
+              <a:rPr lang="en-US" altLang="ja-JP" sz="2800" dirty="0">
                 <a:sym typeface="Symbol" pitchFamily="18" charset="2"/>
               </a:rPr>
               <a:t> (x y) [z/x] </a:t>
             </a:r>
             <a:r>
-              <a:rPr lang="ja-JP" altLang="en-US" sz="2800" dirty="0" smtClean="0">
-                <a:sym typeface="Symbol" pitchFamily="18" charset="2"/>
-              </a:rPr>
-              <a:t>を</a:t>
-            </a:r>
-            <a:r>
-              <a:rPr lang="ja-JP" altLang="en-US" sz="2800" dirty="0" smtClean="0">
-                <a:sym typeface="Symbol" pitchFamily="18" charset="2"/>
-              </a:rPr>
-              <a:t>求めよ</a:t>
-            </a:r>
-            <a:r>
-              <a:rPr lang="ja-JP" altLang="en-US" sz="2800" dirty="0" smtClean="0">
-                <a:sym typeface="Symbol" pitchFamily="18" charset="2"/>
-              </a:rPr>
-              <a:t>。</a:t>
-            </a:r>
-            <a:endParaRPr kumimoji="1" lang="en-US" altLang="ja-JP" sz="2800" dirty="0" smtClean="0">
+              <a:rPr lang="ja-JP" altLang="en-US" sz="2800" dirty="0">
+                <a:sym typeface="Symbol" pitchFamily="18" charset="2"/>
+              </a:rPr>
+              <a:t>を求めよ。</a:t>
+            </a:r>
+            <a:endParaRPr kumimoji="1" lang="en-US" altLang="ja-JP" sz="2800" dirty="0">
               <a:sym typeface="Symbol" pitchFamily="18" charset="2"/>
             </a:endParaRPr>
           </a:p>
           <a:p>
             <a:r>
-              <a:rPr lang="ja-JP" altLang="en-US" sz="2800" dirty="0" smtClean="0">
+              <a:rPr lang="ja-JP" altLang="en-US" sz="2800" dirty="0">
                 <a:sym typeface="Symbol" pitchFamily="18" charset="2"/>
               </a:rPr>
               <a:t>（問２） 置換 </a:t>
             </a:r>
             <a:r>
-              <a:rPr lang="en-US" altLang="ja-JP" sz="2800" dirty="0" smtClean="0">
+              <a:rPr lang="en-US" altLang="ja-JP" sz="2800" dirty="0">
                 <a:sym typeface="Symbol" pitchFamily="18" charset="2"/>
               </a:rPr>
               <a:t>(</a:t>
             </a:r>
             <a:r>
-              <a:rPr lang="en-US" altLang="ja-JP" sz="2800" dirty="0" err="1" smtClean="0">
+              <a:rPr lang="en-US" altLang="ja-JP" sz="2800" dirty="0" err="1">
                 <a:sym typeface="Symbol" pitchFamily="18" charset="2"/>
               </a:rPr>
               <a:t>λy</a:t>
             </a:r>
             <a:r>
-              <a:rPr lang="en-US" altLang="ja-JP" sz="2800" dirty="0" smtClean="0">
+              <a:rPr lang="en-US" altLang="ja-JP" sz="2800" dirty="0">
                 <a:sym typeface="Symbol" pitchFamily="18" charset="2"/>
               </a:rPr>
               <a:t>. x y) [z/x] </a:t>
@@ -5926,31 +5880,31 @@
               </a:rPr>
               <a:t>を求めよ。</a:t>
             </a:r>
-            <a:endParaRPr lang="en-US" altLang="ja-JP" sz="2800" dirty="0" smtClean="0">
+            <a:endParaRPr lang="en-US" altLang="ja-JP" sz="2800" dirty="0">
               <a:sym typeface="Symbol" pitchFamily="18" charset="2"/>
             </a:endParaRPr>
           </a:p>
           <a:p>
             <a:r>
-              <a:rPr lang="ja-JP" altLang="en-US" sz="2800" dirty="0" smtClean="0">
+              <a:rPr lang="ja-JP" altLang="en-US" sz="2800" dirty="0">
                 <a:sym typeface="Symbol" pitchFamily="18" charset="2"/>
               </a:rPr>
               <a:t>（問３） 置換 </a:t>
             </a:r>
             <a:r>
-              <a:rPr lang="en-US" altLang="ja-JP" sz="2800" dirty="0" smtClean="0">
+              <a:rPr lang="en-US" altLang="ja-JP" sz="2800" dirty="0">
                 <a:sym typeface="Symbol" pitchFamily="18" charset="2"/>
               </a:rPr>
               <a:t>(</a:t>
             </a:r>
             <a:r>
-              <a:rPr lang="en-US" altLang="ja-JP" sz="2800" dirty="0" err="1" smtClean="0">
+              <a:rPr lang="en-US" altLang="ja-JP" sz="2800" dirty="0" err="1">
                 <a:sym typeface="Symbol" pitchFamily="18" charset="2"/>
               </a:rPr>
               <a:t>λy</a:t>
             </a:r>
             <a:r>
-              <a:rPr lang="en-US" altLang="ja-JP" sz="2800" dirty="0" smtClean="0">
+              <a:rPr lang="en-US" altLang="ja-JP" sz="2800" dirty="0">
                 <a:sym typeface="Symbol" pitchFamily="18" charset="2"/>
               </a:rPr>
               <a:t>. x y) [y/x] </a:t>
@@ -5961,43 +5915,43 @@
               </a:rPr>
               <a:t>を求めよ。</a:t>
             </a:r>
-            <a:endParaRPr lang="en-US" altLang="ja-JP" sz="2800" dirty="0" smtClean="0">
+            <a:endParaRPr lang="en-US" altLang="ja-JP" sz="2800" dirty="0">
               <a:sym typeface="Symbol" pitchFamily="18" charset="2"/>
             </a:endParaRPr>
           </a:p>
           <a:p>
             <a:r>
-              <a:rPr lang="ja-JP" altLang="en-US" sz="2800" dirty="0" smtClean="0">
+              <a:rPr lang="ja-JP" altLang="en-US" sz="2800" dirty="0">
                 <a:sym typeface="Symbol" pitchFamily="18" charset="2"/>
               </a:rPr>
               <a:t>（問４） 置換</a:t>
             </a:r>
             <a:r>
-              <a:rPr lang="en-US" altLang="ja-JP" sz="2800" dirty="0" smtClean="0">
+              <a:rPr lang="en-US" altLang="ja-JP" sz="2800" dirty="0">
                 <a:sym typeface="Symbol" pitchFamily="18" charset="2"/>
               </a:rPr>
               <a:t> (</a:t>
             </a:r>
             <a:r>
-              <a:rPr lang="en-US" altLang="ja-JP" sz="2800" dirty="0" err="1" smtClean="0">
+              <a:rPr lang="en-US" altLang="ja-JP" sz="2800" dirty="0" err="1">
                 <a:sym typeface="Symbol" pitchFamily="18" charset="2"/>
               </a:rPr>
               <a:t>λy</a:t>
             </a:r>
             <a:r>
-              <a:rPr lang="en-US" altLang="ja-JP" sz="2800" dirty="0" smtClean="0">
+              <a:rPr lang="en-US" altLang="ja-JP" sz="2800" dirty="0">
                 <a:sym typeface="Symbol" pitchFamily="18" charset="2"/>
               </a:rPr>
               <a:t>. x y) [</a:t>
             </a:r>
             <a:r>
-              <a:rPr lang="en-US" altLang="ja-JP" sz="2800" dirty="0" err="1" smtClean="0">
+              <a:rPr lang="en-US" altLang="ja-JP" sz="2800" dirty="0" err="1">
                 <a:sym typeface="Symbol" pitchFamily="18" charset="2"/>
               </a:rPr>
               <a:t>λz</a:t>
             </a:r>
             <a:r>
-              <a:rPr lang="en-US" altLang="ja-JP" sz="2800" dirty="0" smtClean="0">
+              <a:rPr lang="en-US" altLang="ja-JP" sz="2800" dirty="0">
                 <a:sym typeface="Symbol" pitchFamily="18" charset="2"/>
               </a:rPr>
               <a:t>. z y/x] </a:t>
@@ -6008,7 +5962,7 @@
               </a:rPr>
               <a:t>を求めよ。</a:t>
             </a:r>
-            <a:endParaRPr lang="en-US" altLang="ja-JP" sz="2800" dirty="0" smtClean="0">
+            <a:endParaRPr lang="en-US" altLang="ja-JP" sz="2800" dirty="0">
               <a:sym typeface="Symbol" pitchFamily="18" charset="2"/>
             </a:endParaRPr>
           </a:p>
@@ -6085,7 +6039,7 @@
               <a:defRPr/>
             </a:pPr>
             <a:r>
-              <a:rPr kumimoji="1" lang="ja-JP" altLang="en-US" sz="4400" b="0" i="0" u="none" strike="noStrike" kern="1200" cap="none" spc="0" normalizeH="0" baseline="0" noProof="0" dirty="0" smtClean="0">
+              <a:rPr kumimoji="1" lang="ja-JP" altLang="en-US" sz="4400" b="0" i="0" u="none" strike="noStrike" kern="1200" cap="none" spc="0" normalizeH="0" baseline="0" noProof="0" dirty="0">
                 <a:ln>
                   <a:noFill/>
                 </a:ln>
@@ -6128,42 +6082,30 @@
           <a:lstStyle/>
           <a:p>
             <a:r>
-              <a:rPr kumimoji="1" lang="ja-JP" altLang="en-US" sz="2400" dirty="0" smtClean="0">
+              <a:rPr kumimoji="1" lang="ja-JP" altLang="en-US" sz="2400" dirty="0">
                 <a:sym typeface="Symbol" pitchFamily="18" charset="2"/>
               </a:rPr>
               <a:t>（問１） 置換</a:t>
             </a:r>
             <a:r>
-              <a:rPr lang="en-US" altLang="ja-JP" sz="2400" dirty="0" smtClean="0">
+              <a:rPr lang="en-US" altLang="ja-JP" sz="2400" dirty="0">
                 <a:sym typeface="Symbol" pitchFamily="18" charset="2"/>
               </a:rPr>
               <a:t> (x y) [z/x] </a:t>
             </a:r>
             <a:r>
-              <a:rPr lang="ja-JP" altLang="en-US" sz="2400" dirty="0" smtClean="0">
-                <a:sym typeface="Symbol" pitchFamily="18" charset="2"/>
-              </a:rPr>
-              <a:t>を</a:t>
-            </a:r>
-            <a:r>
-              <a:rPr lang="ja-JP" altLang="en-US" sz="2400" dirty="0" smtClean="0">
-                <a:sym typeface="Symbol" pitchFamily="18" charset="2"/>
-              </a:rPr>
-              <a:t>求めよ</a:t>
-            </a:r>
-            <a:r>
-              <a:rPr lang="ja-JP" altLang="en-US" sz="2400" dirty="0" smtClean="0">
-                <a:sym typeface="Symbol" pitchFamily="18" charset="2"/>
-              </a:rPr>
-              <a:t>。</a:t>
-            </a:r>
-            <a:endParaRPr lang="en-US" altLang="ja-JP" sz="2400" dirty="0" smtClean="0">
+              <a:rPr lang="ja-JP" altLang="en-US" sz="2400" dirty="0">
+                <a:sym typeface="Symbol" pitchFamily="18" charset="2"/>
+              </a:rPr>
+              <a:t>を求めよ。</a:t>
+            </a:r>
+            <a:endParaRPr lang="en-US" altLang="ja-JP" sz="2400" dirty="0">
               <a:sym typeface="Symbol" pitchFamily="18" charset="2"/>
             </a:endParaRPr>
           </a:p>
           <a:p>
             <a:r>
-              <a:rPr lang="en-US" altLang="ja-JP" sz="2400" dirty="0" smtClean="0">
+              <a:rPr lang="en-US" altLang="ja-JP" sz="2400" dirty="0">
                 <a:sym typeface="Symbol" pitchFamily="18" charset="2"/>
               </a:rPr>
               <a:t>(x y) [z/x] = (x [z/x]) (y [z/x])</a:t>
@@ -6171,36 +6113,36 @@
           </a:p>
           <a:p>
             <a:r>
-              <a:rPr lang="en-US" altLang="ja-JP" sz="2400" dirty="0" smtClean="0">
+              <a:rPr lang="en-US" altLang="ja-JP" sz="2400" dirty="0">
                 <a:sym typeface="Symbol" pitchFamily="18" charset="2"/>
               </a:rPr>
               <a:t>                  = z y</a:t>
             </a:r>
-            <a:endParaRPr kumimoji="1" lang="en-US" altLang="ja-JP" sz="2400" dirty="0" smtClean="0">
+            <a:endParaRPr kumimoji="1" lang="en-US" altLang="ja-JP" sz="2400" dirty="0">
               <a:sym typeface="Symbol" pitchFamily="18" charset="2"/>
             </a:endParaRPr>
           </a:p>
           <a:p>
             <a:r>
-              <a:rPr lang="ja-JP" altLang="en-US" sz="2400" dirty="0" smtClean="0">
+              <a:rPr lang="ja-JP" altLang="en-US" sz="2400" dirty="0">
                 <a:sym typeface="Symbol" pitchFamily="18" charset="2"/>
               </a:rPr>
               <a:t>（問２） 置換 </a:t>
             </a:r>
             <a:r>
-              <a:rPr lang="en-US" altLang="ja-JP" sz="2400" dirty="0" smtClean="0">
+              <a:rPr lang="en-US" altLang="ja-JP" sz="2400" dirty="0">
                 <a:sym typeface="Symbol" pitchFamily="18" charset="2"/>
               </a:rPr>
               <a:t>(</a:t>
             </a:r>
             <a:r>
-              <a:rPr lang="en-US" altLang="ja-JP" sz="2400" dirty="0" err="1" smtClean="0">
+              <a:rPr lang="en-US" altLang="ja-JP" sz="2400" dirty="0" err="1">
                 <a:sym typeface="Symbol" pitchFamily="18" charset="2"/>
               </a:rPr>
               <a:t>λy</a:t>
             </a:r>
             <a:r>
-              <a:rPr lang="en-US" altLang="ja-JP" sz="2400" dirty="0" smtClean="0">
+              <a:rPr lang="en-US" altLang="ja-JP" sz="2400" dirty="0">
                 <a:sym typeface="Symbol" pitchFamily="18" charset="2"/>
               </a:rPr>
               <a:t>. x y) [z/x] </a:t>
@@ -6211,37 +6153,37 @@
               </a:rPr>
               <a:t>を求めよ。</a:t>
             </a:r>
-            <a:endParaRPr lang="en-US" altLang="ja-JP" sz="2400" dirty="0" smtClean="0">
+            <a:endParaRPr lang="en-US" altLang="ja-JP" sz="2400" dirty="0">
               <a:sym typeface="Symbol" pitchFamily="18" charset="2"/>
             </a:endParaRPr>
           </a:p>
           <a:p>
             <a:r>
-              <a:rPr lang="en-US" altLang="ja-JP" sz="2400" dirty="0" smtClean="0">
+              <a:rPr lang="en-US" altLang="ja-JP" sz="2400" dirty="0">
                 <a:sym typeface="Symbol" pitchFamily="18" charset="2"/>
               </a:rPr>
               <a:t>(</a:t>
             </a:r>
             <a:r>
-              <a:rPr lang="en-US" altLang="ja-JP" sz="2400" dirty="0" err="1" smtClean="0">
+              <a:rPr lang="en-US" altLang="ja-JP" sz="2400" dirty="0" err="1">
                 <a:sym typeface="Symbol" pitchFamily="18" charset="2"/>
               </a:rPr>
               <a:t>λy</a:t>
             </a:r>
             <a:r>
-              <a:rPr lang="en-US" altLang="ja-JP" sz="2400" dirty="0" smtClean="0">
+              <a:rPr lang="en-US" altLang="ja-JP" sz="2400" dirty="0">
                 <a:sym typeface="Symbol" pitchFamily="18" charset="2"/>
               </a:rPr>
               <a:t>. x y) [z/x] = </a:t>
             </a:r>
             <a:r>
-              <a:rPr lang="en-US" altLang="ja-JP" sz="2400" dirty="0" err="1" smtClean="0">
+              <a:rPr lang="en-US" altLang="ja-JP" sz="2400" dirty="0" err="1">
                 <a:sym typeface="Symbol" pitchFamily="18" charset="2"/>
               </a:rPr>
               <a:t>λy</a:t>
             </a:r>
             <a:r>
-              <a:rPr lang="en-US" altLang="ja-JP" sz="2400" dirty="0" smtClean="0">
+              <a:rPr lang="en-US" altLang="ja-JP" sz="2400" dirty="0">
                 <a:sym typeface="Symbol" pitchFamily="18" charset="2"/>
               </a:rPr>
               <a:t>. ((x y) [z/x])</a:t>
@@ -6249,19 +6191,19 @@
           </a:p>
           <a:p>
             <a:r>
-              <a:rPr lang="en-US" altLang="ja-JP" sz="2400" dirty="0" smtClean="0">
+              <a:rPr lang="en-US" altLang="ja-JP" sz="2400" dirty="0">
                 <a:sym typeface="Symbol" pitchFamily="18" charset="2"/>
               </a:rPr>
               <a:t>                        = </a:t>
             </a:r>
             <a:r>
-              <a:rPr lang="en-US" altLang="ja-JP" sz="2400" dirty="0" err="1" smtClean="0">
+              <a:rPr lang="en-US" altLang="ja-JP" sz="2400" dirty="0" err="1">
                 <a:sym typeface="Symbol" pitchFamily="18" charset="2"/>
               </a:rPr>
               <a:t>λy</a:t>
             </a:r>
             <a:r>
-              <a:rPr lang="en-US" altLang="ja-JP" sz="2400" dirty="0" smtClean="0">
+              <a:rPr lang="en-US" altLang="ja-JP" sz="2400" dirty="0">
                 <a:sym typeface="Symbol" pitchFamily="18" charset="2"/>
               </a:rPr>
               <a:t>. ((x [z/x]) (y [z/x]))</a:t>
@@ -6269,54 +6211,54 @@
           </a:p>
           <a:p>
             <a:r>
-              <a:rPr lang="en-US" altLang="ja-JP" sz="2400" dirty="0" smtClean="0">
+              <a:rPr lang="en-US" altLang="ja-JP" sz="2400" dirty="0">
                 <a:sym typeface="Symbol" pitchFamily="18" charset="2"/>
               </a:rPr>
               <a:t>                        = </a:t>
             </a:r>
             <a:r>
-              <a:rPr lang="en-US" altLang="ja-JP" sz="2400" dirty="0" err="1" smtClean="0">
+              <a:rPr lang="en-US" altLang="ja-JP" sz="2400" dirty="0" err="1">
                 <a:sym typeface="Symbol" pitchFamily="18" charset="2"/>
               </a:rPr>
               <a:t>λy</a:t>
             </a:r>
             <a:r>
-              <a:rPr lang="en-US" altLang="ja-JP" sz="2400" dirty="0" smtClean="0">
+              <a:rPr lang="en-US" altLang="ja-JP" sz="2400" dirty="0">
                 <a:sym typeface="Symbol" pitchFamily="18" charset="2"/>
               </a:rPr>
               <a:t>. (z y)</a:t>
             </a:r>
             <a:r>
-              <a:rPr lang="ja-JP" altLang="en-US" sz="2400" dirty="0" smtClean="0">
+              <a:rPr lang="ja-JP" altLang="en-US" sz="2400" dirty="0">
                 <a:sym typeface="Symbol" pitchFamily="18" charset="2"/>
               </a:rPr>
               <a:t>     （括弧は省略可）</a:t>
             </a:r>
-            <a:endParaRPr lang="en-US" altLang="ja-JP" sz="2400" dirty="0" smtClean="0">
+            <a:endParaRPr lang="en-US" altLang="ja-JP" sz="2400" dirty="0">
               <a:sym typeface="Symbol" pitchFamily="18" charset="2"/>
             </a:endParaRPr>
           </a:p>
           <a:p>
             <a:r>
-              <a:rPr lang="ja-JP" altLang="en-US" sz="2400" dirty="0" smtClean="0">
+              <a:rPr lang="ja-JP" altLang="en-US" sz="2400" dirty="0">
                 <a:sym typeface="Symbol" pitchFamily="18" charset="2"/>
               </a:rPr>
               <a:t>（問３） 置換 </a:t>
             </a:r>
             <a:r>
-              <a:rPr lang="en-US" altLang="ja-JP" sz="2400" dirty="0" smtClean="0">
+              <a:rPr lang="en-US" altLang="ja-JP" sz="2400" dirty="0">
                 <a:sym typeface="Symbol" pitchFamily="18" charset="2"/>
               </a:rPr>
               <a:t>(</a:t>
             </a:r>
             <a:r>
-              <a:rPr lang="en-US" altLang="ja-JP" sz="2400" dirty="0" err="1" smtClean="0">
+              <a:rPr lang="en-US" altLang="ja-JP" sz="2400" dirty="0" err="1">
                 <a:sym typeface="Symbol" pitchFamily="18" charset="2"/>
               </a:rPr>
               <a:t>λy</a:t>
             </a:r>
             <a:r>
-              <a:rPr lang="en-US" altLang="ja-JP" sz="2400" dirty="0" smtClean="0">
+              <a:rPr lang="en-US" altLang="ja-JP" sz="2400" dirty="0">
                 <a:sym typeface="Symbol" pitchFamily="18" charset="2"/>
               </a:rPr>
               <a:t>. x y) [y/x] </a:t>
@@ -6327,37 +6269,37 @@
               </a:rPr>
               <a:t>を求めよ。</a:t>
             </a:r>
-            <a:endParaRPr lang="en-US" altLang="ja-JP" sz="2400" dirty="0" smtClean="0">
+            <a:endParaRPr lang="en-US" altLang="ja-JP" sz="2400" dirty="0">
               <a:sym typeface="Symbol" pitchFamily="18" charset="2"/>
             </a:endParaRPr>
           </a:p>
           <a:p>
             <a:r>
-              <a:rPr lang="en-US" altLang="ja-JP" sz="2400" dirty="0" smtClean="0">
+              <a:rPr lang="en-US" altLang="ja-JP" sz="2400" dirty="0">
                 <a:sym typeface="Symbol" pitchFamily="18" charset="2"/>
               </a:rPr>
               <a:t>(</a:t>
             </a:r>
             <a:r>
-              <a:rPr lang="en-US" altLang="ja-JP" sz="2400" dirty="0" err="1" smtClean="0">
+              <a:rPr lang="en-US" altLang="ja-JP" sz="2400" dirty="0" err="1">
                 <a:sym typeface="Symbol" pitchFamily="18" charset="2"/>
               </a:rPr>
               <a:t>λy</a:t>
             </a:r>
             <a:r>
-              <a:rPr lang="en-US" altLang="ja-JP" sz="2400" dirty="0" smtClean="0">
+              <a:rPr lang="en-US" altLang="ja-JP" sz="2400" dirty="0">
                 <a:sym typeface="Symbol" pitchFamily="18" charset="2"/>
               </a:rPr>
               <a:t>. x y) [y/x] = </a:t>
             </a:r>
             <a:r>
-              <a:rPr lang="en-US" altLang="ja-JP" sz="2400" dirty="0" err="1" smtClean="0">
+              <a:rPr lang="en-US" altLang="ja-JP" sz="2400" dirty="0" err="1">
                 <a:sym typeface="Symbol" pitchFamily="18" charset="2"/>
               </a:rPr>
               <a:t>λz</a:t>
             </a:r>
             <a:r>
-              <a:rPr lang="en-US" altLang="ja-JP" sz="2400" dirty="0" smtClean="0">
+              <a:rPr lang="en-US" altLang="ja-JP" sz="2400" dirty="0">
                 <a:sym typeface="Symbol" pitchFamily="18" charset="2"/>
               </a:rPr>
               <a:t>. (((x y) [z/y]) [y/x])</a:t>
@@ -6365,19 +6307,19 @@
           </a:p>
           <a:p>
             <a:r>
-              <a:rPr lang="en-US" altLang="ja-JP" sz="2400" dirty="0" smtClean="0">
+              <a:rPr lang="en-US" altLang="ja-JP" sz="2400" dirty="0">
                 <a:sym typeface="Symbol" pitchFamily="18" charset="2"/>
               </a:rPr>
               <a:t>                        = </a:t>
             </a:r>
             <a:r>
-              <a:rPr lang="en-US" altLang="ja-JP" sz="2400" dirty="0" err="1" smtClean="0">
+              <a:rPr lang="en-US" altLang="ja-JP" sz="2400" dirty="0" err="1">
                 <a:sym typeface="Symbol" pitchFamily="18" charset="2"/>
               </a:rPr>
               <a:t>λz</a:t>
             </a:r>
             <a:r>
-              <a:rPr lang="en-US" altLang="ja-JP" sz="2400" dirty="0" smtClean="0">
+              <a:rPr lang="en-US" altLang="ja-JP" sz="2400" dirty="0">
                 <a:sym typeface="Symbol" pitchFamily="18" charset="2"/>
               </a:rPr>
               <a:t>. (((x [z/y]) (y [z/y])) [y/x])</a:t>
@@ -6385,19 +6327,19 @@
           </a:p>
           <a:p>
             <a:r>
-              <a:rPr lang="en-US" altLang="ja-JP" sz="2400" dirty="0" smtClean="0">
+              <a:rPr lang="en-US" altLang="ja-JP" sz="2400" dirty="0">
                 <a:sym typeface="Symbol" pitchFamily="18" charset="2"/>
               </a:rPr>
               <a:t>                        = </a:t>
             </a:r>
             <a:r>
-              <a:rPr lang="en-US" altLang="ja-JP" sz="2400" dirty="0" err="1" smtClean="0">
+              <a:rPr lang="en-US" altLang="ja-JP" sz="2400" dirty="0" err="1">
                 <a:sym typeface="Symbol" pitchFamily="18" charset="2"/>
               </a:rPr>
               <a:t>λz</a:t>
             </a:r>
             <a:r>
-              <a:rPr lang="en-US" altLang="ja-JP" sz="2400" dirty="0" smtClean="0">
+              <a:rPr lang="en-US" altLang="ja-JP" sz="2400" dirty="0">
                 <a:sym typeface="Symbol" pitchFamily="18" charset="2"/>
               </a:rPr>
               <a:t>. ((x z) [y/x])</a:t>
@@ -6405,19 +6347,19 @@
           </a:p>
           <a:p>
             <a:r>
-              <a:rPr lang="en-US" altLang="ja-JP" sz="2400" dirty="0" smtClean="0">
+              <a:rPr lang="en-US" altLang="ja-JP" sz="2400" dirty="0">
                 <a:sym typeface="Symbol" pitchFamily="18" charset="2"/>
               </a:rPr>
               <a:t>                        = </a:t>
             </a:r>
             <a:r>
-              <a:rPr lang="en-US" altLang="ja-JP" sz="2400" dirty="0" err="1" smtClean="0">
+              <a:rPr lang="en-US" altLang="ja-JP" sz="2400" dirty="0" err="1">
                 <a:sym typeface="Symbol" pitchFamily="18" charset="2"/>
               </a:rPr>
               <a:t>λz</a:t>
             </a:r>
             <a:r>
-              <a:rPr lang="en-US" altLang="ja-JP" sz="2400" dirty="0" smtClean="0">
+              <a:rPr lang="en-US" altLang="ja-JP" sz="2400" dirty="0">
                 <a:sym typeface="Symbol" pitchFamily="18" charset="2"/>
               </a:rPr>
               <a:t>. ((x [y/x]) (z [y/x]))</a:t>
@@ -6425,30 +6367,30 @@
           </a:p>
           <a:p>
             <a:r>
-              <a:rPr lang="en-US" altLang="ja-JP" sz="2400" dirty="0" smtClean="0">
+              <a:rPr lang="en-US" altLang="ja-JP" sz="2400" dirty="0">
                 <a:sym typeface="Symbol" pitchFamily="18" charset="2"/>
               </a:rPr>
               <a:t>                        = </a:t>
             </a:r>
             <a:r>
-              <a:rPr lang="en-US" altLang="ja-JP" sz="2400" dirty="0" err="1" smtClean="0">
+              <a:rPr lang="en-US" altLang="ja-JP" sz="2400" dirty="0" err="1">
                 <a:sym typeface="Symbol" pitchFamily="18" charset="2"/>
               </a:rPr>
               <a:t>λz</a:t>
             </a:r>
             <a:r>
-              <a:rPr lang="en-US" altLang="ja-JP" sz="2400" dirty="0" smtClean="0">
+              <a:rPr lang="en-US" altLang="ja-JP" sz="2400" dirty="0">
                 <a:sym typeface="Symbol" pitchFamily="18" charset="2"/>
               </a:rPr>
               <a:t>. (y z)      </a:t>
             </a:r>
             <a:r>
-              <a:rPr lang="ja-JP" altLang="en-US" sz="2400" dirty="0" smtClean="0">
+              <a:rPr lang="ja-JP" altLang="en-US" sz="2400" dirty="0">
                 <a:sym typeface="Symbol" pitchFamily="18" charset="2"/>
               </a:rPr>
               <a:t>（括弧は省略可）</a:t>
             </a:r>
-            <a:endParaRPr lang="en-US" altLang="ja-JP" sz="2400" dirty="0" smtClean="0">
+            <a:endParaRPr lang="en-US" altLang="ja-JP" sz="2400" dirty="0">
               <a:sym typeface="Symbol" pitchFamily="18" charset="2"/>
             </a:endParaRPr>
           </a:p>
@@ -6520,7 +6462,7 @@
               <a:defRPr/>
             </a:pPr>
             <a:r>
-              <a:rPr kumimoji="1" lang="ja-JP" altLang="en-US" sz="4400" b="0" i="0" u="none" strike="noStrike" kern="1200" cap="none" spc="0" normalizeH="0" baseline="0" noProof="0" dirty="0" smtClean="0">
+              <a:rPr kumimoji="1" lang="ja-JP" altLang="en-US" sz="4400" b="0" i="0" u="none" strike="noStrike" kern="1200" cap="none" spc="0" normalizeH="0" baseline="0" noProof="0" dirty="0">
                 <a:ln>
                   <a:noFill/>
                 </a:ln>
@@ -6563,37 +6505,37 @@
           <a:lstStyle/>
           <a:p>
             <a:r>
-              <a:rPr lang="ja-JP" altLang="en-US" sz="2400" dirty="0" smtClean="0">
+              <a:rPr lang="ja-JP" altLang="en-US" sz="2400" dirty="0">
                 <a:sym typeface="Symbol" pitchFamily="18" charset="2"/>
               </a:rPr>
               <a:t>（問４） 置換</a:t>
             </a:r>
             <a:r>
-              <a:rPr lang="en-US" altLang="ja-JP" sz="2400" dirty="0" smtClean="0">
+              <a:rPr lang="en-US" altLang="ja-JP" sz="2400" dirty="0">
                 <a:sym typeface="Symbol" pitchFamily="18" charset="2"/>
               </a:rPr>
               <a:t> (</a:t>
             </a:r>
             <a:r>
-              <a:rPr lang="en-US" altLang="ja-JP" sz="2400" dirty="0" err="1" smtClean="0">
+              <a:rPr lang="en-US" altLang="ja-JP" sz="2400" dirty="0" err="1">
                 <a:sym typeface="Symbol" pitchFamily="18" charset="2"/>
               </a:rPr>
               <a:t>λy</a:t>
             </a:r>
             <a:r>
-              <a:rPr lang="en-US" altLang="ja-JP" sz="2400" dirty="0" smtClean="0">
+              <a:rPr lang="en-US" altLang="ja-JP" sz="2400" dirty="0">
                 <a:sym typeface="Symbol" pitchFamily="18" charset="2"/>
               </a:rPr>
               <a:t>. x y) [</a:t>
             </a:r>
             <a:r>
-              <a:rPr lang="en-US" altLang="ja-JP" sz="2400" dirty="0" err="1" smtClean="0">
+              <a:rPr lang="en-US" altLang="ja-JP" sz="2400" dirty="0" err="1">
                 <a:sym typeface="Symbol" pitchFamily="18" charset="2"/>
               </a:rPr>
               <a:t>λz</a:t>
             </a:r>
             <a:r>
-              <a:rPr lang="en-US" altLang="ja-JP" sz="2400" dirty="0" smtClean="0">
+              <a:rPr lang="en-US" altLang="ja-JP" sz="2400" dirty="0">
                 <a:sym typeface="Symbol" pitchFamily="18" charset="2"/>
               </a:rPr>
               <a:t>. z y/x] </a:t>
@@ -6604,61 +6546,61 @@
               </a:rPr>
               <a:t>を求めよ。</a:t>
             </a:r>
-            <a:endParaRPr lang="en-US" altLang="ja-JP" sz="2400" dirty="0" smtClean="0">
+            <a:endParaRPr lang="en-US" altLang="ja-JP" sz="2400" dirty="0">
               <a:sym typeface="Symbol" pitchFamily="18" charset="2"/>
             </a:endParaRPr>
           </a:p>
           <a:p>
             <a:r>
-              <a:rPr lang="en-US" altLang="ja-JP" sz="2400" dirty="0" smtClean="0">
+              <a:rPr lang="en-US" altLang="ja-JP" sz="2400" dirty="0">
                 <a:sym typeface="Symbol" pitchFamily="18" charset="2"/>
               </a:rPr>
               <a:t>(</a:t>
             </a:r>
             <a:r>
-              <a:rPr lang="en-US" altLang="ja-JP" sz="2400" dirty="0" err="1" smtClean="0">
+              <a:rPr lang="en-US" altLang="ja-JP" sz="2400" dirty="0" err="1">
                 <a:sym typeface="Symbol" pitchFamily="18" charset="2"/>
               </a:rPr>
               <a:t>λy</a:t>
             </a:r>
             <a:r>
-              <a:rPr lang="en-US" altLang="ja-JP" sz="2400" dirty="0" smtClean="0">
+              <a:rPr lang="en-US" altLang="ja-JP" sz="2400" dirty="0">
                 <a:sym typeface="Symbol" pitchFamily="18" charset="2"/>
               </a:rPr>
               <a:t>. x y) [</a:t>
             </a:r>
             <a:r>
-              <a:rPr lang="en-US" altLang="ja-JP" sz="2400" dirty="0" err="1" smtClean="0">
+              <a:rPr lang="en-US" altLang="ja-JP" sz="2400" dirty="0" err="1">
                 <a:sym typeface="Symbol" pitchFamily="18" charset="2"/>
               </a:rPr>
               <a:t>λz</a:t>
             </a:r>
             <a:r>
-              <a:rPr lang="en-US" altLang="ja-JP" sz="2400" dirty="0" smtClean="0">
+              <a:rPr lang="en-US" altLang="ja-JP" sz="2400" dirty="0">
                 <a:sym typeface="Symbol" pitchFamily="18" charset="2"/>
               </a:rPr>
               <a:t>. z y/x] = </a:t>
             </a:r>
             <a:r>
-              <a:rPr lang="en-US" altLang="ja-JP" sz="2400" dirty="0" err="1" smtClean="0">
+              <a:rPr lang="en-US" altLang="ja-JP" sz="2400" dirty="0" err="1">
                 <a:sym typeface="Symbol" pitchFamily="18" charset="2"/>
               </a:rPr>
               <a:t>λw</a:t>
             </a:r>
             <a:r>
-              <a:rPr lang="en-US" altLang="ja-JP" sz="2400" dirty="0" smtClean="0">
+              <a:rPr lang="en-US" altLang="ja-JP" sz="2400" dirty="0">
                 <a:sym typeface="Symbol" pitchFamily="18" charset="2"/>
               </a:rPr>
               <a:t>. (((x y) [w/y]) [</a:t>
             </a:r>
             <a:r>
-              <a:rPr lang="en-US" altLang="ja-JP" sz="2400" dirty="0" err="1" smtClean="0">
+              <a:rPr lang="en-US" altLang="ja-JP" sz="2400" dirty="0" err="1">
                 <a:sym typeface="Symbol" pitchFamily="18" charset="2"/>
               </a:rPr>
               <a:t>λz</a:t>
             </a:r>
             <a:r>
-              <a:rPr lang="en-US" altLang="ja-JP" sz="2400" dirty="0" smtClean="0">
+              <a:rPr lang="en-US" altLang="ja-JP" sz="2400" dirty="0">
                 <a:sym typeface="Symbol" pitchFamily="18" charset="2"/>
               </a:rPr>
               <a:t>. z y/x])</a:t>
@@ -6666,31 +6608,31 @@
           </a:p>
           <a:p>
             <a:r>
-              <a:rPr lang="en-US" altLang="ja-JP" sz="2400" dirty="0" smtClean="0">
+              <a:rPr lang="en-US" altLang="ja-JP" sz="2400" dirty="0">
                 <a:sym typeface="Symbol" pitchFamily="18" charset="2"/>
               </a:rPr>
               <a:t>                                 = </a:t>
             </a:r>
             <a:r>
-              <a:rPr lang="en-US" altLang="ja-JP" sz="2400" dirty="0" err="1" smtClean="0">
+              <a:rPr lang="en-US" altLang="ja-JP" sz="2400" dirty="0" err="1">
                 <a:sym typeface="Symbol" pitchFamily="18" charset="2"/>
               </a:rPr>
               <a:t>λw</a:t>
             </a:r>
             <a:r>
-              <a:rPr lang="en-US" altLang="ja-JP" sz="2400" dirty="0" smtClean="0">
+              <a:rPr lang="en-US" altLang="ja-JP" sz="2400" dirty="0">
                 <a:sym typeface="Symbol" pitchFamily="18" charset="2"/>
               </a:rPr>
               <a:t>. (((x [w/y]) (y [w/y])) [</a:t>
             </a:r>
             <a:r>
-              <a:rPr lang="en-US" altLang="ja-JP" sz="2400" dirty="0" err="1" smtClean="0">
+              <a:rPr lang="en-US" altLang="ja-JP" sz="2400" dirty="0" err="1">
                 <a:sym typeface="Symbol" pitchFamily="18" charset="2"/>
               </a:rPr>
               <a:t>λz</a:t>
             </a:r>
             <a:r>
-              <a:rPr lang="en-US" altLang="ja-JP" sz="2400" dirty="0" smtClean="0">
+              <a:rPr lang="en-US" altLang="ja-JP" sz="2400" dirty="0">
                 <a:sym typeface="Symbol" pitchFamily="18" charset="2"/>
               </a:rPr>
               <a:t>. z y/x])</a:t>
@@ -6698,31 +6640,31 @@
           </a:p>
           <a:p>
             <a:r>
-              <a:rPr lang="en-US" altLang="ja-JP" sz="2400" dirty="0" smtClean="0">
+              <a:rPr lang="en-US" altLang="ja-JP" sz="2400" dirty="0">
                 <a:sym typeface="Symbol" pitchFamily="18" charset="2"/>
               </a:rPr>
               <a:t>                                 = </a:t>
             </a:r>
             <a:r>
-              <a:rPr lang="en-US" altLang="ja-JP" sz="2400" dirty="0" err="1" smtClean="0">
+              <a:rPr lang="en-US" altLang="ja-JP" sz="2400" dirty="0" err="1">
                 <a:sym typeface="Symbol" pitchFamily="18" charset="2"/>
               </a:rPr>
               <a:t>λw</a:t>
             </a:r>
             <a:r>
-              <a:rPr lang="en-US" altLang="ja-JP" sz="2400" dirty="0" smtClean="0">
+              <a:rPr lang="en-US" altLang="ja-JP" sz="2400" dirty="0">
                 <a:sym typeface="Symbol" pitchFamily="18" charset="2"/>
               </a:rPr>
               <a:t>. ((x w) [</a:t>
             </a:r>
             <a:r>
-              <a:rPr lang="en-US" altLang="ja-JP" sz="2400" dirty="0" err="1" smtClean="0">
+              <a:rPr lang="en-US" altLang="ja-JP" sz="2400" dirty="0" err="1">
                 <a:sym typeface="Symbol" pitchFamily="18" charset="2"/>
               </a:rPr>
               <a:t>λz</a:t>
             </a:r>
             <a:r>
-              <a:rPr lang="en-US" altLang="ja-JP" sz="2400" dirty="0" smtClean="0">
+              <a:rPr lang="en-US" altLang="ja-JP" sz="2400" dirty="0">
                 <a:sym typeface="Symbol" pitchFamily="18" charset="2"/>
               </a:rPr>
               <a:t>. z y/x])</a:t>
@@ -6730,43 +6672,43 @@
           </a:p>
           <a:p>
             <a:r>
-              <a:rPr lang="en-US" altLang="ja-JP" sz="2400" dirty="0" smtClean="0">
+              <a:rPr lang="en-US" altLang="ja-JP" sz="2400" dirty="0">
                 <a:sym typeface="Symbol" pitchFamily="18" charset="2"/>
               </a:rPr>
               <a:t>                                 = </a:t>
             </a:r>
             <a:r>
-              <a:rPr lang="en-US" altLang="ja-JP" sz="2400" dirty="0" err="1" smtClean="0">
+              <a:rPr lang="en-US" altLang="ja-JP" sz="2400" dirty="0" err="1">
                 <a:sym typeface="Symbol" pitchFamily="18" charset="2"/>
               </a:rPr>
               <a:t>λw</a:t>
             </a:r>
             <a:r>
-              <a:rPr lang="en-US" altLang="ja-JP" sz="2400" dirty="0" smtClean="0">
+              <a:rPr lang="en-US" altLang="ja-JP" sz="2400" dirty="0">
                 <a:sym typeface="Symbol" pitchFamily="18" charset="2"/>
               </a:rPr>
               <a:t>. ((x [</a:t>
             </a:r>
             <a:r>
-              <a:rPr lang="en-US" altLang="ja-JP" sz="2400" dirty="0" err="1" smtClean="0">
+              <a:rPr lang="en-US" altLang="ja-JP" sz="2400" dirty="0" err="1">
                 <a:sym typeface="Symbol" pitchFamily="18" charset="2"/>
               </a:rPr>
               <a:t>λz</a:t>
             </a:r>
             <a:r>
-              <a:rPr lang="en-US" altLang="ja-JP" sz="2400" dirty="0" smtClean="0">
+              <a:rPr lang="en-US" altLang="ja-JP" sz="2400" dirty="0">
                 <a:sym typeface="Symbol" pitchFamily="18" charset="2"/>
               </a:rPr>
               <a:t>. z y/x]) (w [</a:t>
             </a:r>
             <a:r>
-              <a:rPr lang="en-US" altLang="ja-JP" sz="2400" dirty="0" err="1" smtClean="0">
+              <a:rPr lang="en-US" altLang="ja-JP" sz="2400" dirty="0" err="1">
                 <a:sym typeface="Symbol" pitchFamily="18" charset="2"/>
               </a:rPr>
               <a:t>λz</a:t>
             </a:r>
             <a:r>
-              <a:rPr lang="en-US" altLang="ja-JP" sz="2400" dirty="0" smtClean="0">
+              <a:rPr lang="en-US" altLang="ja-JP" sz="2400" dirty="0">
                 <a:sym typeface="Symbol" pitchFamily="18" charset="2"/>
               </a:rPr>
               <a:t>. z y/x]))</a:t>
@@ -6774,42 +6716,42 @@
           </a:p>
           <a:p>
             <a:r>
-              <a:rPr lang="en-US" altLang="ja-JP" sz="2400" dirty="0" smtClean="0">
+              <a:rPr lang="en-US" altLang="ja-JP" sz="2400" dirty="0">
                 <a:sym typeface="Symbol" pitchFamily="18" charset="2"/>
               </a:rPr>
               <a:t>                                 = </a:t>
             </a:r>
             <a:r>
-              <a:rPr lang="en-US" altLang="ja-JP" sz="2400" dirty="0" err="1" smtClean="0">
+              <a:rPr lang="en-US" altLang="ja-JP" sz="2400" dirty="0" err="1">
                 <a:sym typeface="Symbol" pitchFamily="18" charset="2"/>
               </a:rPr>
               <a:t>λw</a:t>
             </a:r>
             <a:r>
-              <a:rPr lang="en-US" altLang="ja-JP" sz="2400" dirty="0" smtClean="0">
+              <a:rPr lang="en-US" altLang="ja-JP" sz="2400" dirty="0">
                 <a:sym typeface="Symbol" pitchFamily="18" charset="2"/>
               </a:rPr>
               <a:t>. ((</a:t>
             </a:r>
             <a:r>
-              <a:rPr lang="en-US" altLang="ja-JP" sz="2400" dirty="0" err="1" smtClean="0">
+              <a:rPr lang="en-US" altLang="ja-JP" sz="2400" dirty="0" err="1">
                 <a:sym typeface="Symbol" pitchFamily="18" charset="2"/>
               </a:rPr>
               <a:t>λz</a:t>
             </a:r>
             <a:r>
-              <a:rPr lang="en-US" altLang="ja-JP" sz="2400" dirty="0" smtClean="0">
+              <a:rPr lang="en-US" altLang="ja-JP" sz="2400" dirty="0">
                 <a:sym typeface="Symbol" pitchFamily="18" charset="2"/>
               </a:rPr>
               <a:t>. z y) w)     </a:t>
             </a:r>
             <a:r>
-              <a:rPr lang="ja-JP" altLang="en-US" sz="2400" dirty="0" smtClean="0">
+              <a:rPr lang="ja-JP" altLang="en-US" sz="2400" dirty="0">
                 <a:sym typeface="Symbol" pitchFamily="18" charset="2"/>
               </a:rPr>
               <a:t>（外側の括弧は省略可）</a:t>
             </a:r>
-            <a:endParaRPr lang="en-US" altLang="ja-JP" sz="2400" dirty="0" smtClean="0">
+            <a:endParaRPr lang="en-US" altLang="ja-JP" sz="2400" dirty="0">
               <a:sym typeface="Symbol" pitchFamily="18" charset="2"/>
             </a:endParaRPr>
           </a:p>
@@ -6881,7 +6823,7 @@
               <a:defRPr/>
             </a:pPr>
             <a:r>
-              <a:rPr kumimoji="1" lang="ja-JP" altLang="en-US" sz="4400" b="0" i="0" u="none" strike="noStrike" kern="1200" cap="none" spc="0" normalizeH="0" baseline="0" noProof="0" dirty="0" smtClean="0">
+              <a:rPr kumimoji="1" lang="ja-JP" altLang="en-US" sz="4400" b="0" i="0" u="none" strike="noStrike" kern="1200" cap="none" spc="0" normalizeH="0" baseline="0" noProof="0" dirty="0">
                 <a:ln>
                   <a:noFill/>
                 </a:ln>
@@ -6924,223 +6866,187 @@
           <a:lstStyle/>
           <a:p>
             <a:r>
-              <a:rPr kumimoji="1" lang="ja-JP" altLang="en-US" sz="2800" dirty="0" smtClean="0"/>
+              <a:rPr kumimoji="1" lang="ja-JP" altLang="en-US" sz="2800" dirty="0"/>
               <a:t>（問１） ラムダ式 </a:t>
             </a:r>
             <a:r>
-              <a:rPr lang="en-US" altLang="ja-JP" sz="2800" dirty="0" smtClean="0">
+              <a:rPr lang="en-US" altLang="ja-JP" sz="2800" dirty="0">
                 <a:sym typeface="Symbol" pitchFamily="18" charset="2"/>
               </a:rPr>
               <a:t>(</a:t>
             </a:r>
             <a:r>
-              <a:rPr lang="en-US" altLang="ja-JP" sz="2800" dirty="0" err="1" smtClean="0">
+              <a:rPr lang="en-US" altLang="ja-JP" sz="2800" dirty="0" err="1">
                 <a:sym typeface="Symbol" pitchFamily="18" charset="2"/>
               </a:rPr>
               <a:t>λx</a:t>
             </a:r>
             <a:r>
-              <a:rPr lang="en-US" altLang="ja-JP" sz="2800" dirty="0" smtClean="0">
+              <a:rPr lang="en-US" altLang="ja-JP" sz="2800" dirty="0">
                 <a:sym typeface="Symbol" pitchFamily="18" charset="2"/>
               </a:rPr>
               <a:t>. x</a:t>
             </a:r>
             <a:r>
-              <a:rPr lang="ja-JP" altLang="en-US" sz="2800" dirty="0" smtClean="0">
+              <a:rPr lang="ja-JP" altLang="en-US" sz="2800" dirty="0">
                 <a:sym typeface="Symbol" pitchFamily="18" charset="2"/>
               </a:rPr>
               <a:t> </a:t>
             </a:r>
             <a:r>
-              <a:rPr lang="en-US" altLang="ja-JP" sz="2800" dirty="0" smtClean="0">
+              <a:rPr lang="en-US" altLang="ja-JP" sz="2800" dirty="0">
                 <a:sym typeface="Symbol" pitchFamily="18" charset="2"/>
               </a:rPr>
               <a:t>y) (</a:t>
             </a:r>
             <a:r>
-              <a:rPr lang="en-US" altLang="ja-JP" sz="2800" dirty="0" err="1" smtClean="0">
+              <a:rPr lang="en-US" altLang="ja-JP" sz="2800" dirty="0" err="1">
                 <a:sym typeface="Symbol" pitchFamily="18" charset="2"/>
               </a:rPr>
               <a:t>λz</a:t>
             </a:r>
             <a:r>
-              <a:rPr lang="en-US" altLang="ja-JP" sz="2800" dirty="0" smtClean="0">
+              <a:rPr lang="en-US" altLang="ja-JP" sz="2800" dirty="0">
                 <a:sym typeface="Symbol" pitchFamily="18" charset="2"/>
               </a:rPr>
               <a:t>. z) </a:t>
             </a:r>
             <a:r>
-              <a:rPr lang="ja-JP" altLang="en-US" sz="2800" dirty="0" smtClean="0">
+              <a:rPr lang="ja-JP" altLang="en-US" sz="2800" dirty="0">
                 <a:sym typeface="Symbol" pitchFamily="18" charset="2"/>
               </a:rPr>
               <a:t>に</a:t>
             </a:r>
             <a:r>
-              <a:rPr lang="en-US" altLang="ja-JP" sz="2800" dirty="0" smtClean="0">
+              <a:rPr lang="en-US" altLang="ja-JP" sz="2800" dirty="0">
                 <a:sym typeface="Symbol" pitchFamily="18" charset="2"/>
               </a:rPr>
               <a:t>β</a:t>
             </a:r>
             <a:r>
-              <a:rPr lang="ja-JP" altLang="en-US" sz="2800" dirty="0" smtClean="0">
-                <a:sym typeface="Symbol" pitchFamily="18" charset="2"/>
-              </a:rPr>
-              <a:t>変換</a:t>
-            </a:r>
-            <a:r>
-              <a:rPr lang="ja-JP" altLang="en-US" sz="2800" dirty="0" smtClean="0">
-                <a:sym typeface="Symbol" pitchFamily="18" charset="2"/>
-              </a:rPr>
-              <a:t>を</a:t>
-            </a:r>
-            <a:r>
-              <a:rPr lang="en-US" altLang="ja-JP" sz="2800" dirty="0" smtClean="0">
+              <a:rPr lang="ja-JP" altLang="en-US" sz="2800" dirty="0">
+                <a:sym typeface="Symbol" pitchFamily="18" charset="2"/>
+              </a:rPr>
+              <a:t>変換を</a:t>
+            </a:r>
+            <a:r>
+              <a:rPr lang="en-US" altLang="ja-JP" sz="2800" dirty="0">
                 <a:sym typeface="Symbol" pitchFamily="18" charset="2"/>
               </a:rPr>
               <a:t>1</a:t>
             </a:r>
             <a:r>
-              <a:rPr lang="ja-JP" altLang="en-US" sz="2800" dirty="0" smtClean="0">
-                <a:sym typeface="Symbol" pitchFamily="18" charset="2"/>
-              </a:rPr>
-              <a:t>回</a:t>
-            </a:r>
-            <a:r>
-              <a:rPr lang="ja-JP" altLang="en-US" sz="2800" dirty="0" smtClean="0">
-                <a:sym typeface="Symbol" pitchFamily="18" charset="2"/>
-              </a:rPr>
-              <a:t>適用</a:t>
-            </a:r>
-            <a:r>
-              <a:rPr lang="ja-JP" altLang="en-US" sz="2800" dirty="0" smtClean="0">
-                <a:sym typeface="Symbol" pitchFamily="18" charset="2"/>
-              </a:rPr>
-              <a:t>せよ。</a:t>
-            </a:r>
-            <a:endParaRPr lang="en-US" altLang="ja-JP" sz="2800" dirty="0" smtClean="0">
+              <a:rPr lang="ja-JP" altLang="en-US" sz="2800" dirty="0">
+                <a:sym typeface="Symbol" pitchFamily="18" charset="2"/>
+              </a:rPr>
+              <a:t>回適用せよ。</a:t>
+            </a:r>
+            <a:endParaRPr lang="en-US" altLang="ja-JP" sz="2800" dirty="0">
               <a:sym typeface="Symbol" pitchFamily="18" charset="2"/>
             </a:endParaRPr>
           </a:p>
           <a:p>
             <a:r>
-              <a:rPr kumimoji="1" lang="ja-JP" altLang="en-US" sz="2800" dirty="0" smtClean="0">
+              <a:rPr kumimoji="1" lang="ja-JP" altLang="en-US" sz="2800" dirty="0">
                 <a:sym typeface="Symbol" pitchFamily="18" charset="2"/>
               </a:rPr>
               <a:t>（問２） ラムダ式 </a:t>
             </a:r>
             <a:r>
-              <a:rPr lang="en-US" altLang="ja-JP" sz="2800" dirty="0" smtClean="0">
+              <a:rPr lang="en-US" altLang="ja-JP" sz="2800" dirty="0">
                 <a:sym typeface="Symbol" pitchFamily="18" charset="2"/>
               </a:rPr>
               <a:t>(</a:t>
             </a:r>
             <a:r>
-              <a:rPr kumimoji="1" lang="en-US" altLang="ja-JP" sz="2800" dirty="0" err="1" smtClean="0">
+              <a:rPr kumimoji="1" lang="en-US" altLang="ja-JP" sz="2800" dirty="0" err="1">
                 <a:sym typeface="Symbol" pitchFamily="18" charset="2"/>
               </a:rPr>
               <a:t>λx</a:t>
             </a:r>
             <a:r>
-              <a:rPr kumimoji="1" lang="en-US" altLang="ja-JP" sz="2800" dirty="0" smtClean="0">
+              <a:rPr kumimoji="1" lang="en-US" altLang="ja-JP" sz="2800" dirty="0">
                 <a:sym typeface="Symbol" pitchFamily="18" charset="2"/>
               </a:rPr>
               <a:t>. (</a:t>
             </a:r>
             <a:r>
-              <a:rPr kumimoji="1" lang="en-US" altLang="ja-JP" sz="2800" dirty="0" err="1" smtClean="0">
+              <a:rPr kumimoji="1" lang="en-US" altLang="ja-JP" sz="2800" dirty="0" err="1">
                 <a:sym typeface="Symbol" pitchFamily="18" charset="2"/>
               </a:rPr>
               <a:t>λy</a:t>
             </a:r>
             <a:r>
-              <a:rPr kumimoji="1" lang="en-US" altLang="ja-JP" sz="2800" dirty="0" smtClean="0">
+              <a:rPr kumimoji="1" lang="en-US" altLang="ja-JP" sz="2800" dirty="0">
                 <a:sym typeface="Symbol" pitchFamily="18" charset="2"/>
               </a:rPr>
               <a:t>. x </a:t>
             </a:r>
             <a:r>
-              <a:rPr lang="en-US" altLang="ja-JP" sz="2800" dirty="0" smtClean="0">
+              <a:rPr lang="en-US" altLang="ja-JP" sz="2800" dirty="0">
                 <a:sym typeface="Symbol" pitchFamily="18" charset="2"/>
               </a:rPr>
               <a:t>y</a:t>
             </a:r>
             <a:r>
-              <a:rPr kumimoji="1" lang="en-US" altLang="ja-JP" sz="2800" dirty="0" smtClean="0">
+              <a:rPr kumimoji="1" lang="en-US" altLang="ja-JP" sz="2800" dirty="0">
                 <a:sym typeface="Symbol" pitchFamily="18" charset="2"/>
               </a:rPr>
               <a:t>)) (</a:t>
             </a:r>
             <a:r>
-              <a:rPr kumimoji="1" lang="en-US" altLang="ja-JP" sz="2800" dirty="0" err="1" smtClean="0">
+              <a:rPr kumimoji="1" lang="en-US" altLang="ja-JP" sz="2800" dirty="0" err="1">
                 <a:sym typeface="Symbol" pitchFamily="18" charset="2"/>
               </a:rPr>
               <a:t>λz</a:t>
             </a:r>
             <a:r>
-              <a:rPr kumimoji="1" lang="en-US" altLang="ja-JP" sz="2800" dirty="0" smtClean="0">
+              <a:rPr kumimoji="1" lang="en-US" altLang="ja-JP" sz="2800" dirty="0">
                 <a:sym typeface="Symbol" pitchFamily="18" charset="2"/>
               </a:rPr>
               <a:t>. </a:t>
             </a:r>
             <a:r>
-              <a:rPr lang="en-US" altLang="ja-JP" sz="2800" dirty="0" smtClean="0">
+              <a:rPr lang="en-US" altLang="ja-JP" sz="2800" dirty="0">
                 <a:sym typeface="Symbol" pitchFamily="18" charset="2"/>
               </a:rPr>
               <a:t>y z</a:t>
             </a:r>
             <a:r>
-              <a:rPr kumimoji="1" lang="en-US" altLang="ja-JP" sz="2800" dirty="0" smtClean="0">
+              <a:rPr kumimoji="1" lang="en-US" altLang="ja-JP" sz="2800" dirty="0">
                 <a:sym typeface="Symbol" pitchFamily="18" charset="2"/>
               </a:rPr>
               <a:t>) </a:t>
             </a:r>
             <a:r>
-              <a:rPr kumimoji="1" lang="ja-JP" altLang="en-US" sz="2800" dirty="0" smtClean="0">
+              <a:rPr kumimoji="1" lang="ja-JP" altLang="en-US" sz="2800" dirty="0">
                 <a:sym typeface="Symbol" pitchFamily="18" charset="2"/>
               </a:rPr>
               <a:t>に</a:t>
             </a:r>
             <a:r>
-              <a:rPr kumimoji="1" lang="en-US" altLang="ja-JP" sz="2800" dirty="0" smtClean="0">
+              <a:rPr kumimoji="1" lang="en-US" altLang="ja-JP" sz="2800" dirty="0">
                 <a:sym typeface="Symbol" pitchFamily="18" charset="2"/>
               </a:rPr>
               <a:t>β</a:t>
             </a:r>
             <a:r>
-              <a:rPr kumimoji="1" lang="ja-JP" altLang="en-US" sz="2800" dirty="0" smtClean="0">
-                <a:sym typeface="Symbol" pitchFamily="18" charset="2"/>
-              </a:rPr>
-              <a:t>変換</a:t>
-            </a:r>
-            <a:r>
-              <a:rPr kumimoji="1" lang="ja-JP" altLang="en-US" sz="2800" dirty="0" smtClean="0">
-                <a:sym typeface="Symbol" pitchFamily="18" charset="2"/>
-              </a:rPr>
-              <a:t>を</a:t>
-            </a:r>
-            <a:r>
-              <a:rPr kumimoji="1" lang="en-US" altLang="ja-JP" sz="2800" dirty="0" smtClean="0">
+              <a:rPr kumimoji="1" lang="ja-JP" altLang="en-US" sz="2800" dirty="0">
+                <a:sym typeface="Symbol" pitchFamily="18" charset="2"/>
+              </a:rPr>
+              <a:t>変換を</a:t>
+            </a:r>
+            <a:r>
+              <a:rPr kumimoji="1" lang="en-US" altLang="ja-JP" sz="2800" dirty="0">
                 <a:sym typeface="Symbol" pitchFamily="18" charset="2"/>
               </a:rPr>
               <a:t>1</a:t>
             </a:r>
             <a:r>
-              <a:rPr kumimoji="1" lang="ja-JP" altLang="en-US" sz="2800" dirty="0" smtClean="0">
-                <a:sym typeface="Symbol" pitchFamily="18" charset="2"/>
-              </a:rPr>
-              <a:t>回</a:t>
-            </a:r>
-            <a:r>
-              <a:rPr kumimoji="1" lang="ja-JP" altLang="en-US" sz="2800" dirty="0" smtClean="0">
-                <a:sym typeface="Symbol" pitchFamily="18" charset="2"/>
-              </a:rPr>
-              <a:t>適用</a:t>
-            </a:r>
-            <a:r>
-              <a:rPr kumimoji="1" lang="ja-JP" altLang="en-US" sz="2800" dirty="0" smtClean="0">
-                <a:sym typeface="Symbol" pitchFamily="18" charset="2"/>
-              </a:rPr>
-              <a:t>せよ。</a:t>
+              <a:rPr kumimoji="1" lang="ja-JP" altLang="en-US" sz="2800" dirty="0">
+                <a:sym typeface="Symbol" pitchFamily="18" charset="2"/>
+              </a:rPr>
+              <a:t>回適用せよ。</a:t>
             </a:r>
             <a:endParaRPr kumimoji="1" lang="ja-JP" altLang="en-US" sz="2800" dirty="0"/>
           </a:p>
@@ -7217,7 +7123,7 @@
               <a:defRPr/>
             </a:pPr>
             <a:r>
-              <a:rPr kumimoji="1" lang="ja-JP" altLang="en-US" sz="4400" b="0" i="0" u="none" strike="noStrike" kern="1200" cap="none" spc="0" normalizeH="0" baseline="0" noProof="0" dirty="0" smtClean="0">
+              <a:rPr kumimoji="1" lang="ja-JP" altLang="en-US" sz="4400" b="0" i="0" u="none" strike="noStrike" kern="1200" cap="none" spc="0" normalizeH="0" baseline="0" noProof="0" dirty="0">
                 <a:ln>
                   <a:noFill/>
                 </a:ln>
@@ -7260,160 +7166,142 @@
           <a:lstStyle/>
           <a:p>
             <a:r>
-              <a:rPr kumimoji="1" lang="ja-JP" altLang="en-US" sz="2400" dirty="0" smtClean="0"/>
+              <a:rPr kumimoji="1" lang="ja-JP" altLang="en-US" sz="2400" dirty="0"/>
               <a:t>（問１） ラムダ式 </a:t>
             </a:r>
             <a:r>
-              <a:rPr lang="en-US" altLang="ja-JP" sz="2400" dirty="0" smtClean="0">
+              <a:rPr lang="en-US" altLang="ja-JP" sz="2400" dirty="0">
                 <a:sym typeface="Symbol" pitchFamily="18" charset="2"/>
               </a:rPr>
               <a:t>(</a:t>
             </a:r>
             <a:r>
-              <a:rPr lang="en-US" altLang="ja-JP" sz="2400" dirty="0" err="1" smtClean="0">
+              <a:rPr lang="en-US" altLang="ja-JP" sz="2400" dirty="0" err="1">
                 <a:sym typeface="Symbol" pitchFamily="18" charset="2"/>
               </a:rPr>
               <a:t>λx</a:t>
             </a:r>
             <a:r>
-              <a:rPr lang="en-US" altLang="ja-JP" sz="2400" dirty="0" smtClean="0">
+              <a:rPr lang="en-US" altLang="ja-JP" sz="2400" dirty="0">
                 <a:sym typeface="Symbol" pitchFamily="18" charset="2"/>
               </a:rPr>
               <a:t>. x</a:t>
             </a:r>
             <a:r>
-              <a:rPr lang="ja-JP" altLang="en-US" sz="2400" dirty="0" smtClean="0">
+              <a:rPr lang="ja-JP" altLang="en-US" sz="2400" dirty="0">
                 <a:sym typeface="Symbol" pitchFamily="18" charset="2"/>
               </a:rPr>
               <a:t> </a:t>
             </a:r>
             <a:r>
-              <a:rPr lang="en-US" altLang="ja-JP" sz="2400" dirty="0" smtClean="0">
+              <a:rPr lang="en-US" altLang="ja-JP" sz="2400" dirty="0">
                 <a:sym typeface="Symbol" pitchFamily="18" charset="2"/>
               </a:rPr>
               <a:t>y) (</a:t>
             </a:r>
             <a:r>
-              <a:rPr lang="en-US" altLang="ja-JP" sz="2400" dirty="0" err="1" smtClean="0">
+              <a:rPr lang="en-US" altLang="ja-JP" sz="2400" dirty="0" err="1">
                 <a:sym typeface="Symbol" pitchFamily="18" charset="2"/>
               </a:rPr>
               <a:t>λz</a:t>
             </a:r>
             <a:r>
-              <a:rPr lang="en-US" altLang="ja-JP" sz="2400" dirty="0" smtClean="0">
+              <a:rPr lang="en-US" altLang="ja-JP" sz="2400" dirty="0">
                 <a:sym typeface="Symbol" pitchFamily="18" charset="2"/>
               </a:rPr>
               <a:t>. z) </a:t>
             </a:r>
             <a:r>
-              <a:rPr lang="ja-JP" altLang="en-US" sz="2400" dirty="0" smtClean="0">
+              <a:rPr lang="ja-JP" altLang="en-US" sz="2400" dirty="0">
                 <a:sym typeface="Symbol" pitchFamily="18" charset="2"/>
               </a:rPr>
               <a:t>に</a:t>
             </a:r>
             <a:r>
-              <a:rPr lang="en-US" altLang="ja-JP" sz="2400" dirty="0" smtClean="0">
+              <a:rPr lang="en-US" altLang="ja-JP" sz="2400" dirty="0">
                 <a:sym typeface="Symbol" pitchFamily="18" charset="2"/>
               </a:rPr>
               <a:t>β</a:t>
             </a:r>
             <a:r>
-              <a:rPr lang="ja-JP" altLang="en-US" sz="2400" dirty="0" smtClean="0">
-                <a:sym typeface="Symbol" pitchFamily="18" charset="2"/>
-              </a:rPr>
-              <a:t>変換</a:t>
-            </a:r>
-            <a:r>
-              <a:rPr lang="ja-JP" altLang="en-US" sz="2400" dirty="0" smtClean="0">
-                <a:sym typeface="Symbol" pitchFamily="18" charset="2"/>
-              </a:rPr>
-              <a:t>を</a:t>
-            </a:r>
-            <a:r>
-              <a:rPr lang="en-US" altLang="ja-JP" sz="2400" dirty="0" smtClean="0">
+              <a:rPr lang="ja-JP" altLang="en-US" sz="2400" dirty="0">
+                <a:sym typeface="Symbol" pitchFamily="18" charset="2"/>
+              </a:rPr>
+              <a:t>変換を</a:t>
+            </a:r>
+            <a:r>
+              <a:rPr lang="en-US" altLang="ja-JP" sz="2400" dirty="0">
                 <a:sym typeface="Symbol" pitchFamily="18" charset="2"/>
               </a:rPr>
               <a:t>1</a:t>
             </a:r>
             <a:r>
-              <a:rPr lang="ja-JP" altLang="en-US" sz="2400" dirty="0" smtClean="0">
-                <a:sym typeface="Symbol" pitchFamily="18" charset="2"/>
-              </a:rPr>
-              <a:t>回</a:t>
-            </a:r>
-            <a:r>
-              <a:rPr lang="ja-JP" altLang="en-US" sz="2400" dirty="0" smtClean="0">
-                <a:sym typeface="Symbol" pitchFamily="18" charset="2"/>
-              </a:rPr>
-              <a:t>適用</a:t>
-            </a:r>
-            <a:r>
-              <a:rPr lang="ja-JP" altLang="en-US" sz="2400" dirty="0" smtClean="0">
-                <a:sym typeface="Symbol" pitchFamily="18" charset="2"/>
-              </a:rPr>
-              <a:t>せよ。</a:t>
-            </a:r>
-            <a:endParaRPr lang="en-US" altLang="ja-JP" sz="2400" dirty="0" smtClean="0">
+              <a:rPr lang="ja-JP" altLang="en-US" sz="2400" dirty="0">
+                <a:sym typeface="Symbol" pitchFamily="18" charset="2"/>
+              </a:rPr>
+              <a:t>回適用せよ。</a:t>
+            </a:r>
+            <a:endParaRPr lang="en-US" altLang="ja-JP" sz="2400" dirty="0">
               <a:sym typeface="Symbol" pitchFamily="18" charset="2"/>
             </a:endParaRPr>
           </a:p>
           <a:p>
             <a:r>
-              <a:rPr lang="en-US" altLang="ja-JP" sz="2400" dirty="0" smtClean="0">
+              <a:rPr lang="en-US" altLang="ja-JP" sz="2400" dirty="0">
                 <a:sym typeface="Symbol" pitchFamily="18" charset="2"/>
               </a:rPr>
               <a:t>(</a:t>
             </a:r>
             <a:r>
-              <a:rPr lang="en-US" altLang="ja-JP" sz="2400" dirty="0" err="1" smtClean="0">
+              <a:rPr lang="en-US" altLang="ja-JP" sz="2400" dirty="0" err="1">
                 <a:sym typeface="Symbol" pitchFamily="18" charset="2"/>
               </a:rPr>
               <a:t>λx</a:t>
             </a:r>
             <a:r>
-              <a:rPr lang="en-US" altLang="ja-JP" sz="2400" dirty="0" smtClean="0">
+              <a:rPr lang="en-US" altLang="ja-JP" sz="2400" dirty="0">
                 <a:sym typeface="Symbol" pitchFamily="18" charset="2"/>
               </a:rPr>
               <a:t>. x</a:t>
             </a:r>
             <a:r>
-              <a:rPr lang="ja-JP" altLang="en-US" sz="2400" dirty="0" smtClean="0">
+              <a:rPr lang="ja-JP" altLang="en-US" sz="2400" dirty="0">
                 <a:sym typeface="Symbol" pitchFamily="18" charset="2"/>
               </a:rPr>
               <a:t> </a:t>
             </a:r>
             <a:r>
-              <a:rPr lang="en-US" altLang="ja-JP" sz="2400" dirty="0" smtClean="0">
+              <a:rPr lang="en-US" altLang="ja-JP" sz="2400" dirty="0">
                 <a:sym typeface="Symbol" pitchFamily="18" charset="2"/>
               </a:rPr>
               <a:t>y) (</a:t>
             </a:r>
             <a:r>
-              <a:rPr lang="en-US" altLang="ja-JP" sz="2400" dirty="0" err="1" smtClean="0">
+              <a:rPr lang="en-US" altLang="ja-JP" sz="2400" dirty="0" err="1">
                 <a:sym typeface="Symbol" pitchFamily="18" charset="2"/>
               </a:rPr>
               <a:t>λz</a:t>
             </a:r>
             <a:r>
-              <a:rPr lang="en-US" altLang="ja-JP" sz="2400" dirty="0" smtClean="0">
+              <a:rPr lang="en-US" altLang="ja-JP" sz="2400" dirty="0">
                 <a:sym typeface="Symbol" pitchFamily="18" charset="2"/>
               </a:rPr>
               <a:t>. z) </a:t>
             </a:r>
             <a:r>
-              <a:rPr lang="en-US" altLang="ja-JP" sz="2400" dirty="0" smtClean="0">
+              <a:rPr lang="en-US" altLang="ja-JP" sz="2400" dirty="0">
                 <a:sym typeface="Symbol"/>
               </a:rPr>
               <a:t> (x y) [</a:t>
             </a:r>
             <a:r>
-              <a:rPr lang="en-US" altLang="ja-JP" sz="2400" dirty="0" err="1" smtClean="0">
+              <a:rPr lang="en-US" altLang="ja-JP" sz="2400" dirty="0" err="1">
                 <a:sym typeface="Symbol" pitchFamily="18" charset="2"/>
               </a:rPr>
               <a:t>λz</a:t>
             </a:r>
             <a:r>
-              <a:rPr lang="en-US" altLang="ja-JP" sz="2400" dirty="0" smtClean="0">
+              <a:rPr lang="en-US" altLang="ja-JP" sz="2400" dirty="0">
                 <a:sym typeface="Symbol" pitchFamily="18" charset="2"/>
               </a:rPr>
               <a:t>. z/x]</a:t>
@@ -7421,321 +7309,303 @@
           </a:p>
           <a:p>
             <a:r>
-              <a:rPr lang="en-US" altLang="ja-JP" sz="2400" dirty="0" smtClean="0">
+              <a:rPr lang="en-US" altLang="ja-JP" sz="2400" dirty="0">
                 <a:sym typeface="Symbol" pitchFamily="18" charset="2"/>
               </a:rPr>
               <a:t>                           = </a:t>
             </a:r>
             <a:r>
-              <a:rPr lang="en-US" altLang="ja-JP" sz="2400" dirty="0" smtClean="0">
+              <a:rPr lang="en-US" altLang="ja-JP" sz="2400" dirty="0">
                 <a:sym typeface="Symbol"/>
               </a:rPr>
               <a:t>(x [</a:t>
             </a:r>
             <a:r>
-              <a:rPr lang="en-US" altLang="ja-JP" sz="2400" dirty="0" err="1" smtClean="0">
+              <a:rPr lang="en-US" altLang="ja-JP" sz="2400" dirty="0" err="1">
                 <a:sym typeface="Symbol" pitchFamily="18" charset="2"/>
               </a:rPr>
               <a:t>λz</a:t>
             </a:r>
             <a:r>
-              <a:rPr lang="en-US" altLang="ja-JP" sz="2400" dirty="0" smtClean="0">
+              <a:rPr lang="en-US" altLang="ja-JP" sz="2400" dirty="0">
                 <a:sym typeface="Symbol" pitchFamily="18" charset="2"/>
               </a:rPr>
               <a:t>. z/x]) (</a:t>
             </a:r>
             <a:r>
-              <a:rPr lang="en-US" altLang="ja-JP" sz="2400" dirty="0" smtClean="0">
+              <a:rPr lang="en-US" altLang="ja-JP" sz="2400" dirty="0">
                 <a:sym typeface="Symbol"/>
               </a:rPr>
               <a:t>y [</a:t>
             </a:r>
             <a:r>
-              <a:rPr lang="en-US" altLang="ja-JP" sz="2400" dirty="0" err="1" smtClean="0">
+              <a:rPr lang="en-US" altLang="ja-JP" sz="2400" dirty="0" err="1">
                 <a:sym typeface="Symbol" pitchFamily="18" charset="2"/>
               </a:rPr>
               <a:t>λz</a:t>
             </a:r>
             <a:r>
-              <a:rPr lang="en-US" altLang="ja-JP" sz="2400" dirty="0" smtClean="0">
+              <a:rPr lang="en-US" altLang="ja-JP" sz="2400" dirty="0">
                 <a:sym typeface="Symbol" pitchFamily="18" charset="2"/>
               </a:rPr>
               <a:t>. z/x]</a:t>
             </a:r>
             <a:r>
-              <a:rPr lang="en-US" altLang="ja-JP" sz="2400" dirty="0" smtClean="0">
+              <a:rPr lang="en-US" altLang="ja-JP" sz="2400" dirty="0">
                 <a:sym typeface="Symbol"/>
               </a:rPr>
               <a:t>)</a:t>
             </a:r>
-            <a:endParaRPr lang="en-US" altLang="ja-JP" sz="2400" dirty="0" smtClean="0">
+            <a:endParaRPr lang="en-US" altLang="ja-JP" sz="2400" dirty="0">
               <a:sym typeface="Symbol" pitchFamily="18" charset="2"/>
             </a:endParaRPr>
           </a:p>
           <a:p>
             <a:r>
-              <a:rPr lang="en-US" altLang="ja-JP" sz="2400" dirty="0" smtClean="0">
+              <a:rPr lang="en-US" altLang="ja-JP" sz="2400" dirty="0">
                 <a:sym typeface="Symbol" pitchFamily="18" charset="2"/>
               </a:rPr>
               <a:t>                           = </a:t>
             </a:r>
             <a:r>
-              <a:rPr lang="en-US" altLang="ja-JP" sz="2400" dirty="0" smtClean="0">
+              <a:rPr lang="en-US" altLang="ja-JP" sz="2400" dirty="0">
                 <a:sym typeface="Symbol"/>
               </a:rPr>
               <a:t>(</a:t>
             </a:r>
             <a:r>
-              <a:rPr lang="en-US" altLang="ja-JP" sz="2400" dirty="0" err="1" smtClean="0">
+              <a:rPr lang="en-US" altLang="ja-JP" sz="2400" dirty="0" err="1">
                 <a:sym typeface="Symbol" pitchFamily="18" charset="2"/>
               </a:rPr>
               <a:t>λz</a:t>
             </a:r>
             <a:r>
-              <a:rPr lang="en-US" altLang="ja-JP" sz="2400" dirty="0" smtClean="0">
+              <a:rPr lang="en-US" altLang="ja-JP" sz="2400" dirty="0">
                 <a:sym typeface="Symbol" pitchFamily="18" charset="2"/>
               </a:rPr>
               <a:t>. z) </a:t>
             </a:r>
             <a:r>
-              <a:rPr lang="en-US" altLang="ja-JP" sz="2400" dirty="0" smtClean="0">
+              <a:rPr lang="en-US" altLang="ja-JP" sz="2400" dirty="0">
                 <a:sym typeface="Symbol"/>
               </a:rPr>
               <a:t>y</a:t>
             </a:r>
             <a:r>
-              <a:rPr lang="ja-JP" altLang="en-US" sz="2400" dirty="0" smtClean="0">
+              <a:rPr lang="ja-JP" altLang="en-US" sz="2400" dirty="0">
                 <a:sym typeface="Symbol"/>
               </a:rPr>
               <a:t>    </a:t>
             </a:r>
-            <a:endParaRPr lang="en-US" altLang="ja-JP" sz="2400" dirty="0" smtClean="0">
+            <a:endParaRPr lang="en-US" altLang="ja-JP" sz="2400" dirty="0">
               <a:sym typeface="Symbol"/>
             </a:endParaRPr>
           </a:p>
           <a:p>
             <a:r>
-              <a:rPr lang="ja-JP" altLang="en-US" sz="2400" dirty="0" smtClean="0">
+              <a:rPr lang="ja-JP" altLang="en-US" sz="2400" dirty="0">
                 <a:sym typeface="Symbol"/>
               </a:rPr>
               <a:t>                            （さらにもう一度</a:t>
             </a:r>
             <a:r>
-              <a:rPr lang="en-US" altLang="ja-JP" sz="2400" dirty="0" smtClean="0">
+              <a:rPr lang="en-US" altLang="ja-JP" sz="2400" dirty="0">
                 <a:sym typeface="Symbol"/>
               </a:rPr>
               <a:t>β</a:t>
             </a:r>
             <a:r>
-              <a:rPr lang="ja-JP" altLang="en-US" sz="2400" dirty="0" smtClean="0">
+              <a:rPr lang="ja-JP" altLang="en-US" sz="2400" dirty="0">
                 <a:sym typeface="Symbol"/>
               </a:rPr>
               <a:t>変換は適用可能）</a:t>
             </a:r>
-            <a:endParaRPr lang="en-US" altLang="ja-JP" sz="2400" dirty="0" smtClean="0">
+            <a:endParaRPr lang="en-US" altLang="ja-JP" sz="2400" dirty="0">
               <a:sym typeface="Symbol" pitchFamily="18" charset="2"/>
             </a:endParaRPr>
           </a:p>
           <a:p>
             <a:r>
-              <a:rPr kumimoji="1" lang="ja-JP" altLang="en-US" sz="2400" dirty="0" smtClean="0">
+              <a:rPr kumimoji="1" lang="ja-JP" altLang="en-US" sz="2400" dirty="0">
                 <a:sym typeface="Symbol" pitchFamily="18" charset="2"/>
               </a:rPr>
               <a:t>（問２） ラムダ式 </a:t>
             </a:r>
             <a:r>
-              <a:rPr lang="en-US" altLang="ja-JP" sz="2400" dirty="0" smtClean="0">
+              <a:rPr lang="en-US" altLang="ja-JP" sz="2400" dirty="0">
                 <a:sym typeface="Symbol" pitchFamily="18" charset="2"/>
               </a:rPr>
               <a:t>(</a:t>
             </a:r>
             <a:r>
-              <a:rPr kumimoji="1" lang="en-US" altLang="ja-JP" sz="2400" dirty="0" err="1" smtClean="0">
+              <a:rPr kumimoji="1" lang="en-US" altLang="ja-JP" sz="2400" dirty="0" err="1">
                 <a:sym typeface="Symbol" pitchFamily="18" charset="2"/>
               </a:rPr>
               <a:t>λx</a:t>
             </a:r>
             <a:r>
-              <a:rPr kumimoji="1" lang="en-US" altLang="ja-JP" sz="2400" dirty="0" smtClean="0">
+              <a:rPr kumimoji="1" lang="en-US" altLang="ja-JP" sz="2400" dirty="0">
                 <a:sym typeface="Symbol" pitchFamily="18" charset="2"/>
               </a:rPr>
               <a:t>. (</a:t>
             </a:r>
             <a:r>
-              <a:rPr kumimoji="1" lang="en-US" altLang="ja-JP" sz="2400" dirty="0" err="1" smtClean="0">
+              <a:rPr kumimoji="1" lang="en-US" altLang="ja-JP" sz="2400" dirty="0" err="1">
                 <a:sym typeface="Symbol" pitchFamily="18" charset="2"/>
               </a:rPr>
               <a:t>λy</a:t>
             </a:r>
             <a:r>
-              <a:rPr kumimoji="1" lang="en-US" altLang="ja-JP" sz="2400" dirty="0" smtClean="0">
+              <a:rPr kumimoji="1" lang="en-US" altLang="ja-JP" sz="2400" dirty="0">
                 <a:sym typeface="Symbol" pitchFamily="18" charset="2"/>
               </a:rPr>
               <a:t>. x </a:t>
             </a:r>
             <a:r>
-              <a:rPr lang="en-US" altLang="ja-JP" sz="2400" dirty="0" smtClean="0">
+              <a:rPr lang="en-US" altLang="ja-JP" sz="2400" dirty="0">
                 <a:sym typeface="Symbol" pitchFamily="18" charset="2"/>
               </a:rPr>
               <a:t>y</a:t>
             </a:r>
             <a:r>
-              <a:rPr kumimoji="1" lang="en-US" altLang="ja-JP" sz="2400" dirty="0" smtClean="0">
+              <a:rPr kumimoji="1" lang="en-US" altLang="ja-JP" sz="2400" dirty="0">
                 <a:sym typeface="Symbol" pitchFamily="18" charset="2"/>
               </a:rPr>
               <a:t>)) (</a:t>
             </a:r>
             <a:r>
-              <a:rPr kumimoji="1" lang="en-US" altLang="ja-JP" sz="2400" dirty="0" err="1" smtClean="0">
+              <a:rPr kumimoji="1" lang="en-US" altLang="ja-JP" sz="2400" dirty="0" err="1">
                 <a:sym typeface="Symbol" pitchFamily="18" charset="2"/>
               </a:rPr>
               <a:t>λz</a:t>
             </a:r>
             <a:r>
-              <a:rPr kumimoji="1" lang="en-US" altLang="ja-JP" sz="2400" dirty="0" smtClean="0">
+              <a:rPr kumimoji="1" lang="en-US" altLang="ja-JP" sz="2400" dirty="0">
                 <a:sym typeface="Symbol" pitchFamily="18" charset="2"/>
               </a:rPr>
               <a:t>. </a:t>
             </a:r>
             <a:r>
-              <a:rPr lang="en-US" altLang="ja-JP" sz="2400" dirty="0" smtClean="0">
+              <a:rPr lang="en-US" altLang="ja-JP" sz="2400" dirty="0">
                 <a:sym typeface="Symbol" pitchFamily="18" charset="2"/>
               </a:rPr>
               <a:t>y z</a:t>
             </a:r>
             <a:r>
-              <a:rPr kumimoji="1" lang="en-US" altLang="ja-JP" sz="2400" dirty="0" smtClean="0">
+              <a:rPr kumimoji="1" lang="en-US" altLang="ja-JP" sz="2400" dirty="0">
                 <a:sym typeface="Symbol" pitchFamily="18" charset="2"/>
               </a:rPr>
               <a:t>) </a:t>
             </a:r>
             <a:r>
-              <a:rPr kumimoji="1" lang="ja-JP" altLang="en-US" sz="2400" dirty="0" smtClean="0">
+              <a:rPr kumimoji="1" lang="ja-JP" altLang="en-US" sz="2400" dirty="0">
                 <a:sym typeface="Symbol" pitchFamily="18" charset="2"/>
               </a:rPr>
               <a:t>に</a:t>
             </a:r>
             <a:r>
-              <a:rPr kumimoji="1" lang="en-US" altLang="ja-JP" sz="2400" dirty="0" smtClean="0">
+              <a:rPr kumimoji="1" lang="en-US" altLang="ja-JP" sz="2400" dirty="0">
                 <a:sym typeface="Symbol" pitchFamily="18" charset="2"/>
               </a:rPr>
               <a:t>β</a:t>
             </a:r>
             <a:r>
-              <a:rPr kumimoji="1" lang="ja-JP" altLang="en-US" sz="2400" dirty="0" smtClean="0">
-                <a:sym typeface="Symbol" pitchFamily="18" charset="2"/>
-              </a:rPr>
-              <a:t>変換</a:t>
-            </a:r>
-            <a:r>
-              <a:rPr kumimoji="1" lang="ja-JP" altLang="en-US" sz="2400" dirty="0" smtClean="0">
-                <a:sym typeface="Symbol" pitchFamily="18" charset="2"/>
-              </a:rPr>
-              <a:t>を</a:t>
-            </a:r>
-            <a:r>
-              <a:rPr kumimoji="1" lang="en-US" altLang="ja-JP" sz="2400" dirty="0" smtClean="0">
+              <a:rPr kumimoji="1" lang="ja-JP" altLang="en-US" sz="2400" dirty="0">
+                <a:sym typeface="Symbol" pitchFamily="18" charset="2"/>
+              </a:rPr>
+              <a:t>変換を</a:t>
+            </a:r>
+            <a:r>
+              <a:rPr kumimoji="1" lang="en-US" altLang="ja-JP" sz="2400" dirty="0">
                 <a:sym typeface="Symbol" pitchFamily="18" charset="2"/>
               </a:rPr>
               <a:t>1</a:t>
             </a:r>
             <a:r>
-              <a:rPr kumimoji="1" lang="ja-JP" altLang="en-US" sz="2400" dirty="0" smtClean="0">
-                <a:sym typeface="Symbol" pitchFamily="18" charset="2"/>
-              </a:rPr>
-              <a:t>回</a:t>
-            </a:r>
-            <a:r>
-              <a:rPr kumimoji="1" lang="ja-JP" altLang="en-US" sz="2400" dirty="0" smtClean="0">
-                <a:sym typeface="Symbol" pitchFamily="18" charset="2"/>
-              </a:rPr>
-              <a:t>適用</a:t>
-            </a:r>
-            <a:r>
-              <a:rPr kumimoji="1" lang="ja-JP" altLang="en-US" sz="2400" dirty="0" smtClean="0">
-                <a:sym typeface="Symbol" pitchFamily="18" charset="2"/>
-              </a:rPr>
-              <a:t>せよ。</a:t>
-            </a:r>
-            <a:endParaRPr kumimoji="1" lang="en-US" altLang="ja-JP" sz="2400" dirty="0" smtClean="0">
+              <a:rPr kumimoji="1" lang="ja-JP" altLang="en-US" sz="2400" dirty="0">
+                <a:sym typeface="Symbol" pitchFamily="18" charset="2"/>
+              </a:rPr>
+              <a:t>回適用せよ。</a:t>
+            </a:r>
+            <a:endParaRPr kumimoji="1" lang="en-US" altLang="ja-JP" sz="2400" dirty="0">
               <a:sym typeface="Symbol" pitchFamily="18" charset="2"/>
             </a:endParaRPr>
           </a:p>
           <a:p>
             <a:r>
-              <a:rPr lang="en-US" altLang="ja-JP" sz="2400" dirty="0" smtClean="0">
+              <a:rPr lang="en-US" altLang="ja-JP" sz="2400" dirty="0">
                 <a:sym typeface="Symbol" pitchFamily="18" charset="2"/>
               </a:rPr>
               <a:t>(</a:t>
             </a:r>
             <a:r>
-              <a:rPr lang="en-US" altLang="ja-JP" sz="2400" dirty="0" err="1" smtClean="0">
+              <a:rPr lang="en-US" altLang="ja-JP" sz="2400" dirty="0" err="1">
                 <a:sym typeface="Symbol" pitchFamily="18" charset="2"/>
               </a:rPr>
               <a:t>λx</a:t>
             </a:r>
             <a:r>
-              <a:rPr lang="en-US" altLang="ja-JP" sz="2400" dirty="0" smtClean="0">
+              <a:rPr lang="en-US" altLang="ja-JP" sz="2400" dirty="0">
                 <a:sym typeface="Symbol" pitchFamily="18" charset="2"/>
               </a:rPr>
               <a:t>. (</a:t>
             </a:r>
             <a:r>
-              <a:rPr lang="en-US" altLang="ja-JP" sz="2400" dirty="0" err="1" smtClean="0">
+              <a:rPr lang="en-US" altLang="ja-JP" sz="2400" dirty="0" err="1">
                 <a:sym typeface="Symbol" pitchFamily="18" charset="2"/>
               </a:rPr>
               <a:t>λy</a:t>
             </a:r>
             <a:r>
-              <a:rPr lang="en-US" altLang="ja-JP" sz="2400" dirty="0" smtClean="0">
+              <a:rPr lang="en-US" altLang="ja-JP" sz="2400" dirty="0">
                 <a:sym typeface="Symbol" pitchFamily="18" charset="2"/>
               </a:rPr>
               <a:t>. x y)) (</a:t>
             </a:r>
             <a:r>
-              <a:rPr lang="en-US" altLang="ja-JP" sz="2400" dirty="0" err="1" smtClean="0">
+              <a:rPr lang="en-US" altLang="ja-JP" sz="2400" dirty="0" err="1">
                 <a:sym typeface="Symbol" pitchFamily="18" charset="2"/>
               </a:rPr>
               <a:t>λz</a:t>
             </a:r>
             <a:r>
-              <a:rPr lang="en-US" altLang="ja-JP" sz="2400" dirty="0" smtClean="0">
+              <a:rPr lang="en-US" altLang="ja-JP" sz="2400" dirty="0">
                 <a:sym typeface="Symbol" pitchFamily="18" charset="2"/>
               </a:rPr>
               <a:t>. y z) </a:t>
             </a:r>
             <a:r>
-              <a:rPr lang="en-US" altLang="ja-JP" sz="2400" dirty="0" smtClean="0">
+              <a:rPr lang="en-US" altLang="ja-JP" sz="2400" dirty="0">
                 <a:sym typeface="Symbol"/>
               </a:rPr>
               <a:t></a:t>
             </a:r>
             <a:r>
-              <a:rPr lang="en-US" altLang="ja-JP" sz="2400" dirty="0" smtClean="0">
+              <a:rPr lang="en-US" altLang="ja-JP" sz="2400" dirty="0">
                 <a:sym typeface="Symbol" pitchFamily="18" charset="2"/>
               </a:rPr>
               <a:t> (</a:t>
             </a:r>
             <a:r>
-              <a:rPr lang="en-US" altLang="ja-JP" sz="2400" dirty="0" err="1" smtClean="0">
+              <a:rPr lang="en-US" altLang="ja-JP" sz="2400" dirty="0" err="1">
                 <a:sym typeface="Symbol" pitchFamily="18" charset="2"/>
               </a:rPr>
               <a:t>λy</a:t>
             </a:r>
             <a:r>
-              <a:rPr lang="en-US" altLang="ja-JP" sz="2400" dirty="0" smtClean="0">
+              <a:rPr lang="en-US" altLang="ja-JP" sz="2400" dirty="0">
                 <a:sym typeface="Symbol" pitchFamily="18" charset="2"/>
               </a:rPr>
               <a:t>. x y) [</a:t>
             </a:r>
             <a:r>
-              <a:rPr lang="en-US" altLang="ja-JP" sz="2400" dirty="0" err="1" smtClean="0">
+              <a:rPr lang="en-US" altLang="ja-JP" sz="2400" dirty="0" err="1">
                 <a:sym typeface="Symbol" pitchFamily="18" charset="2"/>
               </a:rPr>
               <a:t>λz</a:t>
             </a:r>
             <a:r>
-              <a:rPr lang="en-US" altLang="ja-JP" sz="2400" dirty="0" smtClean="0">
+              <a:rPr lang="en-US" altLang="ja-JP" sz="2400" dirty="0">
                 <a:sym typeface="Symbol" pitchFamily="18" charset="2"/>
               </a:rPr>
               <a:t>. y z/x]</a:t>
@@ -7743,31 +7613,31 @@
           </a:p>
           <a:p>
             <a:r>
-              <a:rPr kumimoji="1" lang="en-US" altLang="ja-JP" sz="2400" dirty="0" smtClean="0">
+              <a:rPr kumimoji="1" lang="en-US" altLang="ja-JP" sz="2400" dirty="0">
                 <a:sym typeface="Symbol" pitchFamily="18" charset="2"/>
               </a:rPr>
               <a:t>                                       =  </a:t>
             </a:r>
             <a:r>
-              <a:rPr lang="en-US" altLang="ja-JP" sz="2400" dirty="0" err="1" smtClean="0">
+              <a:rPr lang="en-US" altLang="ja-JP" sz="2400" dirty="0" err="1">
                 <a:sym typeface="Symbol" pitchFamily="18" charset="2"/>
               </a:rPr>
               <a:t>λz</a:t>
             </a:r>
             <a:r>
-              <a:rPr lang="en-US" altLang="ja-JP" sz="2400" dirty="0" smtClean="0">
+              <a:rPr lang="en-US" altLang="ja-JP" sz="2400" dirty="0">
                 <a:sym typeface="Symbol" pitchFamily="18" charset="2"/>
               </a:rPr>
               <a:t>. (((x y) [z/y]) [</a:t>
             </a:r>
             <a:r>
-              <a:rPr lang="en-US" altLang="ja-JP" sz="2400" dirty="0" err="1" smtClean="0">
+              <a:rPr lang="en-US" altLang="ja-JP" sz="2400" dirty="0" err="1">
                 <a:sym typeface="Symbol" pitchFamily="18" charset="2"/>
               </a:rPr>
               <a:t>λz</a:t>
             </a:r>
             <a:r>
-              <a:rPr lang="en-US" altLang="ja-JP" sz="2400" dirty="0" smtClean="0">
+              <a:rPr lang="en-US" altLang="ja-JP" sz="2400" dirty="0">
                 <a:sym typeface="Symbol" pitchFamily="18" charset="2"/>
               </a:rPr>
               <a:t>. y z/x])</a:t>
@@ -7775,31 +7645,31 @@
           </a:p>
           <a:p>
             <a:r>
-              <a:rPr kumimoji="1" lang="en-US" altLang="ja-JP" sz="2400" dirty="0" smtClean="0">
+              <a:rPr kumimoji="1" lang="en-US" altLang="ja-JP" sz="2400" dirty="0">
                 <a:sym typeface="Symbol" pitchFamily="18" charset="2"/>
               </a:rPr>
               <a:t>                                       =  </a:t>
             </a:r>
             <a:r>
-              <a:rPr lang="en-US" altLang="ja-JP" sz="2400" dirty="0" err="1" smtClean="0">
+              <a:rPr lang="en-US" altLang="ja-JP" sz="2400" dirty="0" err="1">
                 <a:sym typeface="Symbol" pitchFamily="18" charset="2"/>
               </a:rPr>
               <a:t>λz</a:t>
             </a:r>
             <a:r>
-              <a:rPr lang="en-US" altLang="ja-JP" sz="2400" dirty="0" smtClean="0">
+              <a:rPr lang="en-US" altLang="ja-JP" sz="2400" dirty="0">
                 <a:sym typeface="Symbol" pitchFamily="18" charset="2"/>
               </a:rPr>
               <a:t>. (((x [z/y]) (y [z/y])) [</a:t>
             </a:r>
             <a:r>
-              <a:rPr lang="en-US" altLang="ja-JP" sz="2400" dirty="0" err="1" smtClean="0">
+              <a:rPr lang="en-US" altLang="ja-JP" sz="2400" dirty="0" err="1">
                 <a:sym typeface="Symbol" pitchFamily="18" charset="2"/>
               </a:rPr>
               <a:t>λz</a:t>
             </a:r>
             <a:r>
-              <a:rPr lang="en-US" altLang="ja-JP" sz="2400" dirty="0" smtClean="0">
+              <a:rPr lang="en-US" altLang="ja-JP" sz="2400" dirty="0">
                 <a:sym typeface="Symbol" pitchFamily="18" charset="2"/>
               </a:rPr>
               <a:t>. y z/x])</a:t>
@@ -7807,31 +7677,31 @@
           </a:p>
           <a:p>
             <a:r>
-              <a:rPr kumimoji="1" lang="en-US" altLang="ja-JP" sz="2400" dirty="0" smtClean="0">
+              <a:rPr kumimoji="1" lang="en-US" altLang="ja-JP" sz="2400" dirty="0">
                 <a:sym typeface="Symbol" pitchFamily="18" charset="2"/>
               </a:rPr>
               <a:t>                                       =  </a:t>
             </a:r>
             <a:r>
-              <a:rPr lang="en-US" altLang="ja-JP" sz="2400" dirty="0" err="1" smtClean="0">
+              <a:rPr lang="en-US" altLang="ja-JP" sz="2400" dirty="0" err="1">
                 <a:sym typeface="Symbol" pitchFamily="18" charset="2"/>
               </a:rPr>
               <a:t>λz</a:t>
             </a:r>
             <a:r>
-              <a:rPr lang="en-US" altLang="ja-JP" sz="2400" dirty="0" smtClean="0">
+              <a:rPr lang="en-US" altLang="ja-JP" sz="2400" dirty="0">
                 <a:sym typeface="Symbol" pitchFamily="18" charset="2"/>
               </a:rPr>
               <a:t>. ((x z) [</a:t>
             </a:r>
             <a:r>
-              <a:rPr lang="en-US" altLang="ja-JP" sz="2400" dirty="0" err="1" smtClean="0">
+              <a:rPr lang="en-US" altLang="ja-JP" sz="2400" dirty="0" err="1">
                 <a:sym typeface="Symbol" pitchFamily="18" charset="2"/>
               </a:rPr>
               <a:t>λz</a:t>
             </a:r>
             <a:r>
-              <a:rPr lang="en-US" altLang="ja-JP" sz="2400" dirty="0" smtClean="0">
+              <a:rPr lang="en-US" altLang="ja-JP" sz="2400" dirty="0">
                 <a:sym typeface="Symbol" pitchFamily="18" charset="2"/>
               </a:rPr>
               <a:t>. y z/x])</a:t>
@@ -7839,43 +7709,43 @@
           </a:p>
           <a:p>
             <a:r>
-              <a:rPr kumimoji="1" lang="en-US" altLang="ja-JP" sz="2400" dirty="0" smtClean="0">
+              <a:rPr kumimoji="1" lang="en-US" altLang="ja-JP" sz="2400" dirty="0">
                 <a:sym typeface="Symbol" pitchFamily="18" charset="2"/>
               </a:rPr>
               <a:t>                                       =  </a:t>
             </a:r>
             <a:r>
-              <a:rPr lang="en-US" altLang="ja-JP" sz="2400" dirty="0" err="1" smtClean="0">
+              <a:rPr lang="en-US" altLang="ja-JP" sz="2400" dirty="0" err="1">
                 <a:sym typeface="Symbol" pitchFamily="18" charset="2"/>
               </a:rPr>
               <a:t>λz</a:t>
             </a:r>
             <a:r>
-              <a:rPr lang="en-US" altLang="ja-JP" sz="2400" dirty="0" smtClean="0">
+              <a:rPr lang="en-US" altLang="ja-JP" sz="2400" dirty="0">
                 <a:sym typeface="Symbol" pitchFamily="18" charset="2"/>
               </a:rPr>
               <a:t>. ((x [</a:t>
             </a:r>
             <a:r>
-              <a:rPr lang="en-US" altLang="ja-JP" sz="2400" dirty="0" err="1" smtClean="0">
+              <a:rPr lang="en-US" altLang="ja-JP" sz="2400" dirty="0" err="1">
                 <a:sym typeface="Symbol" pitchFamily="18" charset="2"/>
               </a:rPr>
               <a:t>λz</a:t>
             </a:r>
             <a:r>
-              <a:rPr lang="en-US" altLang="ja-JP" sz="2400" dirty="0" smtClean="0">
+              <a:rPr lang="en-US" altLang="ja-JP" sz="2400" dirty="0">
                 <a:sym typeface="Symbol" pitchFamily="18" charset="2"/>
               </a:rPr>
               <a:t>. y z/x]) (z [</a:t>
             </a:r>
             <a:r>
-              <a:rPr lang="en-US" altLang="ja-JP" sz="2400" dirty="0" err="1" smtClean="0">
+              <a:rPr lang="en-US" altLang="ja-JP" sz="2400" dirty="0" err="1">
                 <a:sym typeface="Symbol" pitchFamily="18" charset="2"/>
               </a:rPr>
               <a:t>λz</a:t>
             </a:r>
             <a:r>
-              <a:rPr lang="en-US" altLang="ja-JP" sz="2400" dirty="0" smtClean="0">
+              <a:rPr lang="en-US" altLang="ja-JP" sz="2400" dirty="0">
                 <a:sym typeface="Symbol" pitchFamily="18" charset="2"/>
               </a:rPr>
               <a:t>. y z/x]))</a:t>
@@ -7883,66 +7753,66 @@
           </a:p>
           <a:p>
             <a:r>
-              <a:rPr lang="en-US" altLang="ja-JP" sz="2400" dirty="0" smtClean="0">
+              <a:rPr lang="en-US" altLang="ja-JP" sz="2400" dirty="0">
                 <a:sym typeface="Symbol" pitchFamily="18" charset="2"/>
               </a:rPr>
               <a:t>                                       =  </a:t>
             </a:r>
             <a:r>
-              <a:rPr lang="en-US" altLang="ja-JP" sz="2400" dirty="0" err="1" smtClean="0">
+              <a:rPr lang="en-US" altLang="ja-JP" sz="2400" dirty="0" err="1">
                 <a:sym typeface="Symbol" pitchFamily="18" charset="2"/>
               </a:rPr>
               <a:t>λz</a:t>
             </a:r>
             <a:r>
-              <a:rPr lang="en-US" altLang="ja-JP" sz="2400" dirty="0" smtClean="0">
+              <a:rPr lang="en-US" altLang="ja-JP" sz="2400" dirty="0">
                 <a:sym typeface="Symbol" pitchFamily="18" charset="2"/>
               </a:rPr>
               <a:t>. ((</a:t>
             </a:r>
             <a:r>
-              <a:rPr lang="en-US" altLang="ja-JP" sz="2400" dirty="0" err="1" smtClean="0">
+              <a:rPr lang="en-US" altLang="ja-JP" sz="2400" dirty="0" err="1">
                 <a:sym typeface="Symbol" pitchFamily="18" charset="2"/>
               </a:rPr>
               <a:t>λz</a:t>
             </a:r>
             <a:r>
-              <a:rPr lang="en-US" altLang="ja-JP" sz="2400" dirty="0" smtClean="0">
+              <a:rPr lang="en-US" altLang="ja-JP" sz="2400" dirty="0">
                 <a:sym typeface="Symbol" pitchFamily="18" charset="2"/>
               </a:rPr>
               <a:t>. y z) z) </a:t>
             </a:r>
             <a:r>
-              <a:rPr lang="ja-JP" altLang="en-US" sz="2400" dirty="0" smtClean="0">
+              <a:rPr lang="ja-JP" altLang="en-US" sz="2400" dirty="0">
                 <a:sym typeface="Symbol" pitchFamily="18" charset="2"/>
               </a:rPr>
               <a:t>（外側の括弧は省略可）</a:t>
             </a:r>
-            <a:endParaRPr lang="en-US" altLang="ja-JP" sz="2400" dirty="0" smtClean="0">
+            <a:endParaRPr lang="en-US" altLang="ja-JP" sz="2400" dirty="0">
               <a:sym typeface="Symbol" pitchFamily="18" charset="2"/>
             </a:endParaRPr>
           </a:p>
           <a:p>
             <a:r>
-              <a:rPr lang="ja-JP" altLang="en-US" sz="2400" dirty="0" smtClean="0">
+              <a:rPr lang="ja-JP" altLang="en-US" sz="2400" dirty="0">
                 <a:sym typeface="Symbol"/>
               </a:rPr>
               <a:t>                                      （さらにもう一度</a:t>
             </a:r>
             <a:r>
-              <a:rPr lang="en-US" altLang="ja-JP" sz="2400" dirty="0" smtClean="0">
+              <a:rPr lang="en-US" altLang="ja-JP" sz="2400" dirty="0">
                 <a:sym typeface="Symbol"/>
               </a:rPr>
               <a:t>β</a:t>
             </a:r>
             <a:r>
-              <a:rPr lang="ja-JP" altLang="en-US" sz="2400" dirty="0" smtClean="0">
+              <a:rPr lang="ja-JP" altLang="en-US" sz="2400" dirty="0">
                 <a:sym typeface="Symbol"/>
               </a:rPr>
               <a:t>変換は適用可能）</a:t>
             </a:r>
             <a:r>
-              <a:rPr kumimoji="1" lang="en-US" altLang="ja-JP" sz="2400" dirty="0" smtClean="0">
+              <a:rPr kumimoji="1" lang="en-US" altLang="ja-JP" sz="2400" dirty="0">
                 <a:sym typeface="Symbol" pitchFamily="18" charset="2"/>
               </a:rPr>
               <a:t>        </a:t>
@@ -7992,7 +7862,7 @@
           <a:lstStyle/>
           <a:p>
             <a:r>
-              <a:rPr lang="ja-JP" altLang="en-US" dirty="0" smtClean="0">
+              <a:rPr lang="ja-JP" altLang="en-US" dirty="0">
                 <a:sym typeface="Symbol" pitchFamily="18" charset="2"/>
               </a:rPr>
               <a:t>練習問題４</a:t>
@@ -8022,58 +7892,57 @@
           <a:lstStyle/>
           <a:p>
             <a:r>
-              <a:rPr lang="ja-JP" altLang="en-US" sz="2800" dirty="0" smtClean="0"/>
+              <a:rPr lang="ja-JP" altLang="en-US" sz="2800" dirty="0"/>
               <a:t>ラムダ式 </a:t>
             </a:r>
             <a:r>
-              <a:rPr lang="en-US" altLang="ja-JP" sz="2800" dirty="0" smtClean="0"/>
+              <a:rPr lang="en-US" altLang="ja-JP" sz="2800" dirty="0"/>
               <a:t>(</a:t>
             </a:r>
             <a:r>
-              <a:rPr lang="en-US" altLang="ja-JP" sz="2800" dirty="0" err="1" smtClean="0"/>
+              <a:rPr lang="en-US" altLang="ja-JP" sz="2800" dirty="0" err="1"/>
               <a:t>λx</a:t>
             </a:r>
             <a:r>
-              <a:rPr lang="en-US" altLang="ja-JP" sz="2800" dirty="0" smtClean="0"/>
+              <a:rPr lang="en-US" altLang="ja-JP" sz="2800" dirty="0"/>
               <a:t>. </a:t>
             </a:r>
             <a:r>
-              <a:rPr lang="en-US" altLang="ja-JP" sz="2800" dirty="0" err="1" smtClean="0"/>
+              <a:rPr lang="en-US" altLang="ja-JP" sz="2800" dirty="0" err="1"/>
               <a:t>λy</a:t>
             </a:r>
             <a:r>
-              <a:rPr lang="en-US" altLang="ja-JP" sz="2800" dirty="0" smtClean="0"/>
+              <a:rPr lang="en-US" altLang="ja-JP" sz="2800" dirty="0"/>
               <a:t>. x y)  (</a:t>
             </a:r>
             <a:r>
-              <a:rPr lang="en-US" altLang="ja-JP" sz="2800" dirty="0" err="1" smtClean="0"/>
+              <a:rPr lang="en-US" altLang="ja-JP" sz="2800" dirty="0" err="1"/>
               <a:t>λz</a:t>
             </a:r>
             <a:r>
-              <a:rPr lang="en-US" altLang="ja-JP" sz="2800" dirty="0" smtClean="0"/>
+              <a:rPr lang="en-US" altLang="ja-JP" sz="2800" dirty="0"/>
               <a:t>. z) w </a:t>
             </a:r>
             <a:r>
-              <a:rPr lang="ja-JP" altLang="en-US" sz="2800" dirty="0" smtClean="0"/>
+              <a:rPr lang="ja-JP" altLang="en-US" sz="2800" dirty="0"/>
               <a:t>は、何度か</a:t>
             </a:r>
             <a:r>
-              <a:rPr lang="en-US" altLang="ja-JP" sz="2800" dirty="0" smtClean="0"/>
+              <a:rPr lang="en-US" altLang="ja-JP" sz="2800" dirty="0"/>
               <a:t>β</a:t>
             </a:r>
             <a:r>
-              <a:rPr lang="ja-JP" altLang="en-US" sz="2800" dirty="0" smtClean="0"/>
+              <a:rPr lang="ja-JP" altLang="en-US" sz="2800" dirty="0"/>
               <a:t>変換を行うことによって</a:t>
             </a:r>
             <a:r>
-              <a:rPr lang="en-US" altLang="ja-JP" sz="2800" dirty="0" smtClean="0"/>
+              <a:rPr lang="en-US" altLang="ja-JP" sz="2800" dirty="0"/>
               <a:t>w</a:t>
             </a:r>
             <a:r>
-              <a:rPr lang="ja-JP" altLang="en-US" sz="2800" dirty="0" smtClean="0"/>
+              <a:rPr lang="ja-JP" altLang="en-US" sz="2800" dirty="0"/>
               <a:t>に変換できるが、その過程を示せ。</a:t>
             </a:r>
-            <a:endParaRPr lang="ja-JP" altLang="en-US" sz="2800" dirty="0"/>
           </a:p>
         </p:txBody>
       </p:sp>
@@ -8087,13 +7956,6 @@
   <p:clrMapOvr>
     <a:masterClrMapping/>
   </p:clrMapOvr>
-  <p:timing>
-    <p:tnLst>
-      <p:par>
-        <p:cTn xmlns:p14="http://schemas.microsoft.com/office/powerpoint/2010/main" id="1" dur="indefinite" restart="never" nodeType="tmRoot"/>
-      </p:par>
-    </p:tnLst>
-  </p:timing>
 </p:sld>
 </file>
 
